--- a/HGT_filtering-pipeline.pptx
+++ b/HGT_filtering-pipeline.pptx
@@ -243,7 +243,7 @@
           <a:p>
             <a:fld id="{9386A93F-6D44-2341-95C7-2E010A24378A}" type="datetimeFigureOut">
               <a:rPr lang="en-US" smtClean="0"/>
-              <a:t>4/1/25</a:t>
+              <a:t>4/2/25</a:t>
             </a:fld>
             <a:endParaRPr lang="en-US"/>
           </a:p>
@@ -413,7 +413,7 @@
           <a:p>
             <a:fld id="{9386A93F-6D44-2341-95C7-2E010A24378A}" type="datetimeFigureOut">
               <a:rPr lang="en-US" smtClean="0"/>
-              <a:t>4/1/25</a:t>
+              <a:t>4/2/25</a:t>
             </a:fld>
             <a:endParaRPr lang="en-US"/>
           </a:p>
@@ -593,7 +593,7 @@
           <a:p>
             <a:fld id="{9386A93F-6D44-2341-95C7-2E010A24378A}" type="datetimeFigureOut">
               <a:rPr lang="en-US" smtClean="0"/>
-              <a:t>4/1/25</a:t>
+              <a:t>4/2/25</a:t>
             </a:fld>
             <a:endParaRPr lang="en-US"/>
           </a:p>
@@ -763,7 +763,7 @@
           <a:p>
             <a:fld id="{9386A93F-6D44-2341-95C7-2E010A24378A}" type="datetimeFigureOut">
               <a:rPr lang="en-US" smtClean="0"/>
-              <a:t>4/1/25</a:t>
+              <a:t>4/2/25</a:t>
             </a:fld>
             <a:endParaRPr lang="en-US"/>
           </a:p>
@@ -1009,7 +1009,7 @@
           <a:p>
             <a:fld id="{9386A93F-6D44-2341-95C7-2E010A24378A}" type="datetimeFigureOut">
               <a:rPr lang="en-US" smtClean="0"/>
-              <a:t>4/1/25</a:t>
+              <a:t>4/2/25</a:t>
             </a:fld>
             <a:endParaRPr lang="en-US"/>
           </a:p>
@@ -1241,7 +1241,7 @@
           <a:p>
             <a:fld id="{9386A93F-6D44-2341-95C7-2E010A24378A}" type="datetimeFigureOut">
               <a:rPr lang="en-US" smtClean="0"/>
-              <a:t>4/1/25</a:t>
+              <a:t>4/2/25</a:t>
             </a:fld>
             <a:endParaRPr lang="en-US"/>
           </a:p>
@@ -1608,7 +1608,7 @@
           <a:p>
             <a:fld id="{9386A93F-6D44-2341-95C7-2E010A24378A}" type="datetimeFigureOut">
               <a:rPr lang="en-US" smtClean="0"/>
-              <a:t>4/1/25</a:t>
+              <a:t>4/2/25</a:t>
             </a:fld>
             <a:endParaRPr lang="en-US"/>
           </a:p>
@@ -1726,7 +1726,7 @@
           <a:p>
             <a:fld id="{9386A93F-6D44-2341-95C7-2E010A24378A}" type="datetimeFigureOut">
               <a:rPr lang="en-US" smtClean="0"/>
-              <a:t>4/1/25</a:t>
+              <a:t>4/2/25</a:t>
             </a:fld>
             <a:endParaRPr lang="en-US"/>
           </a:p>
@@ -1821,7 +1821,7 @@
           <a:p>
             <a:fld id="{9386A93F-6D44-2341-95C7-2E010A24378A}" type="datetimeFigureOut">
               <a:rPr lang="en-US" smtClean="0"/>
-              <a:t>4/1/25</a:t>
+              <a:t>4/2/25</a:t>
             </a:fld>
             <a:endParaRPr lang="en-US"/>
           </a:p>
@@ -2098,7 +2098,7 @@
           <a:p>
             <a:fld id="{9386A93F-6D44-2341-95C7-2E010A24378A}" type="datetimeFigureOut">
               <a:rPr lang="en-US" smtClean="0"/>
-              <a:t>4/1/25</a:t>
+              <a:t>4/2/25</a:t>
             </a:fld>
             <a:endParaRPr lang="en-US"/>
           </a:p>
@@ -2355,7 +2355,7 @@
           <a:p>
             <a:fld id="{9386A93F-6D44-2341-95C7-2E010A24378A}" type="datetimeFigureOut">
               <a:rPr lang="en-US" smtClean="0"/>
-              <a:t>4/1/25</a:t>
+              <a:t>4/2/25</a:t>
             </a:fld>
             <a:endParaRPr lang="en-US"/>
           </a:p>
@@ -2568,7 +2568,7 @@
           <a:p>
             <a:fld id="{9386A93F-6D44-2341-95C7-2E010A24378A}" type="datetimeFigureOut">
               <a:rPr lang="en-US" smtClean="0"/>
-              <a:t>4/1/25</a:t>
+              <a:t>4/2/25</a:t>
             </a:fld>
             <a:endParaRPr lang="en-US"/>
           </a:p>
@@ -3494,7 +3494,7 @@
             <a:pPr algn="ctr"/>
             <a:r>
               <a:rPr lang="en-US" sz="1400" b="1" dirty="0"/>
-              <a:t>4.v3. Filtered inserts:</a:t>
+              <a:t>4.v2. Filtered inserts:</a:t>
             </a:r>
           </a:p>
           <a:p>

--- a/HGT_filtering-pipeline.pptx
+++ b/HGT_filtering-pipeline.pptx
@@ -6,6 +6,7 @@
   </p:sldMasterIdLst>
   <p:sldIdLst>
     <p:sldId id="257" r:id="rId2"/>
+    <p:sldId id="258" r:id="rId3"/>
   </p:sldIdLst>
   <p:sldSz cx="25199975" cy="14712950"/>
   <p:notesSz cx="6858000" cy="9144000"/>
@@ -243,7 +244,7 @@
           <a:p>
             <a:fld id="{9386A93F-6D44-2341-95C7-2E010A24378A}" type="datetimeFigureOut">
               <a:rPr lang="en-US" smtClean="0"/>
-              <a:t>4/2/25</a:t>
+              <a:t>4/26/25</a:t>
             </a:fld>
             <a:endParaRPr lang="en-US"/>
           </a:p>
@@ -413,7 +414,7 @@
           <a:p>
             <a:fld id="{9386A93F-6D44-2341-95C7-2E010A24378A}" type="datetimeFigureOut">
               <a:rPr lang="en-US" smtClean="0"/>
-              <a:t>4/2/25</a:t>
+              <a:t>4/26/25</a:t>
             </a:fld>
             <a:endParaRPr lang="en-US"/>
           </a:p>
@@ -593,7 +594,7 @@
           <a:p>
             <a:fld id="{9386A93F-6D44-2341-95C7-2E010A24378A}" type="datetimeFigureOut">
               <a:rPr lang="en-US" smtClean="0"/>
-              <a:t>4/2/25</a:t>
+              <a:t>4/26/25</a:t>
             </a:fld>
             <a:endParaRPr lang="en-US"/>
           </a:p>
@@ -763,7 +764,7 @@
           <a:p>
             <a:fld id="{9386A93F-6D44-2341-95C7-2E010A24378A}" type="datetimeFigureOut">
               <a:rPr lang="en-US" smtClean="0"/>
-              <a:t>4/2/25</a:t>
+              <a:t>4/26/25</a:t>
             </a:fld>
             <a:endParaRPr lang="en-US"/>
           </a:p>
@@ -1009,7 +1010,7 @@
           <a:p>
             <a:fld id="{9386A93F-6D44-2341-95C7-2E010A24378A}" type="datetimeFigureOut">
               <a:rPr lang="en-US" smtClean="0"/>
-              <a:t>4/2/25</a:t>
+              <a:t>4/26/25</a:t>
             </a:fld>
             <a:endParaRPr lang="en-US"/>
           </a:p>
@@ -1241,7 +1242,7 @@
           <a:p>
             <a:fld id="{9386A93F-6D44-2341-95C7-2E010A24378A}" type="datetimeFigureOut">
               <a:rPr lang="en-US" smtClean="0"/>
-              <a:t>4/2/25</a:t>
+              <a:t>4/26/25</a:t>
             </a:fld>
             <a:endParaRPr lang="en-US"/>
           </a:p>
@@ -1608,7 +1609,7 @@
           <a:p>
             <a:fld id="{9386A93F-6D44-2341-95C7-2E010A24378A}" type="datetimeFigureOut">
               <a:rPr lang="en-US" smtClean="0"/>
-              <a:t>4/2/25</a:t>
+              <a:t>4/26/25</a:t>
             </a:fld>
             <a:endParaRPr lang="en-US"/>
           </a:p>
@@ -1726,7 +1727,7 @@
           <a:p>
             <a:fld id="{9386A93F-6D44-2341-95C7-2E010A24378A}" type="datetimeFigureOut">
               <a:rPr lang="en-US" smtClean="0"/>
-              <a:t>4/2/25</a:t>
+              <a:t>4/26/25</a:t>
             </a:fld>
             <a:endParaRPr lang="en-US"/>
           </a:p>
@@ -1821,7 +1822,7 @@
           <a:p>
             <a:fld id="{9386A93F-6D44-2341-95C7-2E010A24378A}" type="datetimeFigureOut">
               <a:rPr lang="en-US" smtClean="0"/>
-              <a:t>4/2/25</a:t>
+              <a:t>4/26/25</a:t>
             </a:fld>
             <a:endParaRPr lang="en-US"/>
           </a:p>
@@ -2098,7 +2099,7 @@
           <a:p>
             <a:fld id="{9386A93F-6D44-2341-95C7-2E010A24378A}" type="datetimeFigureOut">
               <a:rPr lang="en-US" smtClean="0"/>
-              <a:t>4/2/25</a:t>
+              <a:t>4/26/25</a:t>
             </a:fld>
             <a:endParaRPr lang="en-US"/>
           </a:p>
@@ -2355,7 +2356,7 @@
           <a:p>
             <a:fld id="{9386A93F-6D44-2341-95C7-2E010A24378A}" type="datetimeFigureOut">
               <a:rPr lang="en-US" smtClean="0"/>
-              <a:t>4/2/25</a:t>
+              <a:t>4/26/25</a:t>
             </a:fld>
             <a:endParaRPr lang="en-US"/>
           </a:p>
@@ -2568,7 +2569,7 @@
           <a:p>
             <a:fld id="{9386A93F-6D44-2341-95C7-2E010A24378A}" type="datetimeFigureOut">
               <a:rPr lang="en-US" smtClean="0"/>
-              <a:t>4/2/25</a:t>
+              <a:t>4/26/25</a:t>
             </a:fld>
             <a:endParaRPr lang="en-US"/>
           </a:p>
@@ -6852,6 +6853,2263 @@
 </p:sld>
 </file>
 
+<file path=ppt/slides/slide2.xml><?xml version="1.0" encoding="utf-8"?>
+<p:sld xmlns:a="http://schemas.openxmlformats.org/drawingml/2006/main" xmlns:r="http://schemas.openxmlformats.org/officeDocument/2006/relationships" xmlns:p="http://schemas.openxmlformats.org/presentationml/2006/main">
+  <p:cSld>
+    <p:spTree>
+      <p:nvGrpSpPr>
+        <p:cNvPr id="1" name=""/>
+        <p:cNvGrpSpPr/>
+        <p:nvPr/>
+      </p:nvGrpSpPr>
+      <p:grpSpPr>
+        <a:xfrm>
+          <a:off x="0" y="0"/>
+          <a:ext cx="0" cy="0"/>
+          <a:chOff x="0" y="0"/>
+          <a:chExt cx="0" cy="0"/>
+        </a:xfrm>
+      </p:grpSpPr>
+      <p:sp>
+        <p:nvSpPr>
+          <p:cNvPr id="4" name="TextBox 3">
+            <a:extLst>
+              <a:ext uri="{FF2B5EF4-FFF2-40B4-BE49-F238E27FC236}">
+                <a16:creationId xmlns:a16="http://schemas.microsoft.com/office/drawing/2014/main" id="{79D15BB4-6BA6-2049-8E82-70645DB193B4}"/>
+              </a:ext>
+            </a:extLst>
+          </p:cNvPr>
+          <p:cNvSpPr txBox="1"/>
+          <p:nvPr/>
+        </p:nvSpPr>
+        <p:spPr>
+          <a:xfrm>
+            <a:off x="11808013" y="225572"/>
+            <a:ext cx="1091966" cy="400110"/>
+          </a:xfrm>
+          <a:prstGeom prst="rect">
+            <a:avLst/>
+          </a:prstGeom>
+          <a:noFill/>
+          <a:ln w="19050">
+            <a:solidFill>
+              <a:schemeClr val="tx1"/>
+            </a:solidFill>
+          </a:ln>
+        </p:spPr>
+        <p:txBody>
+          <a:bodyPr wrap="none" rtlCol="0">
+            <a:spAutoFit/>
+          </a:bodyPr>
+          <a:lstStyle/>
+          <a:p>
+            <a:r>
+              <a:rPr lang="en-US" sz="2000" b="1" dirty="0"/>
+              <a:t>Genome</a:t>
+            </a:r>
+          </a:p>
+        </p:txBody>
+      </p:sp>
+      <p:sp>
+        <p:nvSpPr>
+          <p:cNvPr id="5" name="TextBox 4">
+            <a:extLst>
+              <a:ext uri="{FF2B5EF4-FFF2-40B4-BE49-F238E27FC236}">
+                <a16:creationId xmlns:a16="http://schemas.microsoft.com/office/drawing/2014/main" id="{4AD14E54-D4CF-194B-9C3B-AEE4FF6C22B6}"/>
+              </a:ext>
+            </a:extLst>
+          </p:cNvPr>
+          <p:cNvSpPr txBox="1"/>
+          <p:nvPr/>
+        </p:nvSpPr>
+        <p:spPr>
+          <a:xfrm>
+            <a:off x="6317033" y="1469169"/>
+            <a:ext cx="1880579" cy="523220"/>
+          </a:xfrm>
+          <a:prstGeom prst="rect">
+            <a:avLst/>
+          </a:prstGeom>
+          <a:noFill/>
+        </p:spPr>
+        <p:txBody>
+          <a:bodyPr wrap="none" rtlCol="0">
+            <a:spAutoFit/>
+          </a:bodyPr>
+          <a:lstStyle/>
+          <a:p>
+            <a:pPr algn="ctr"/>
+            <a:r>
+              <a:rPr lang="en-US" sz="1400" b="1" dirty="0"/>
+              <a:t>1.v1. Unfiltered inserts</a:t>
+            </a:r>
+          </a:p>
+          <a:p>
+            <a:pPr algn="ctr"/>
+            <a:r>
+              <a:rPr lang="en-US" sz="1400" i="1" dirty="0">
+                <a:solidFill>
+                  <a:schemeClr val="accent1">
+                    <a:lumMod val="75000"/>
+                  </a:schemeClr>
+                </a:solidFill>
+              </a:rPr>
+              <a:t>Standard thresholds</a:t>
+            </a:r>
+          </a:p>
+        </p:txBody>
+      </p:sp>
+      <p:sp>
+        <p:nvSpPr>
+          <p:cNvPr id="6" name="TextBox 5">
+            <a:extLst>
+              <a:ext uri="{FF2B5EF4-FFF2-40B4-BE49-F238E27FC236}">
+                <a16:creationId xmlns:a16="http://schemas.microsoft.com/office/drawing/2014/main" id="{D8080F88-E331-2047-9AD7-ABE3E9C884B3}"/>
+              </a:ext>
+            </a:extLst>
+          </p:cNvPr>
+          <p:cNvSpPr txBox="1"/>
+          <p:nvPr/>
+        </p:nvSpPr>
+        <p:spPr>
+          <a:xfrm>
+            <a:off x="16753247" y="1469169"/>
+            <a:ext cx="1880579" cy="523220"/>
+          </a:xfrm>
+          <a:prstGeom prst="rect">
+            <a:avLst/>
+          </a:prstGeom>
+          <a:noFill/>
+        </p:spPr>
+        <p:txBody>
+          <a:bodyPr wrap="none" rtlCol="0">
+            <a:spAutoFit/>
+          </a:bodyPr>
+          <a:lstStyle/>
+          <a:p>
+            <a:pPr algn="ctr"/>
+            <a:r>
+              <a:rPr lang="en-US" sz="1400" b="1" dirty="0"/>
+              <a:t>1.v2. Unfiltered inserts</a:t>
+            </a:r>
+          </a:p>
+          <a:p>
+            <a:pPr algn="ctr"/>
+            <a:r>
+              <a:rPr lang="en-US" sz="1400" i="1" dirty="0">
+                <a:solidFill>
+                  <a:schemeClr val="accent2">
+                    <a:lumMod val="75000"/>
+                  </a:schemeClr>
+                </a:solidFill>
+              </a:rPr>
+              <a:t>Alternate thresholds</a:t>
+            </a:r>
+          </a:p>
+        </p:txBody>
+      </p:sp>
+      <p:sp>
+        <p:nvSpPr>
+          <p:cNvPr id="7" name="TextBox 6">
+            <a:extLst>
+              <a:ext uri="{FF2B5EF4-FFF2-40B4-BE49-F238E27FC236}">
+                <a16:creationId xmlns:a16="http://schemas.microsoft.com/office/drawing/2014/main" id="{209F653F-7200-2D41-880A-CA0582D478BF}"/>
+              </a:ext>
+            </a:extLst>
+          </p:cNvPr>
+          <p:cNvSpPr txBox="1"/>
+          <p:nvPr/>
+        </p:nvSpPr>
+        <p:spPr>
+          <a:xfrm>
+            <a:off x="6061962" y="2473622"/>
+            <a:ext cx="2390718" cy="738664"/>
+          </a:xfrm>
+          <a:prstGeom prst="rect">
+            <a:avLst/>
+          </a:prstGeom>
+          <a:noFill/>
+        </p:spPr>
+        <p:txBody>
+          <a:bodyPr wrap="none" rtlCol="0">
+            <a:spAutoFit/>
+          </a:bodyPr>
+          <a:lstStyle/>
+          <a:p>
+            <a:pPr algn="ctr"/>
+            <a:r>
+              <a:rPr lang="en-US" sz="1400" b="1" dirty="0"/>
+              <a:t>2.v1. Filtered inserts:</a:t>
+            </a:r>
+          </a:p>
+          <a:p>
+            <a:pPr algn="ctr"/>
+            <a:r>
+              <a:rPr lang="en-US" sz="1400" dirty="0"/>
+              <a:t>- Insert length vs contig length</a:t>
+            </a:r>
+          </a:p>
+          <a:p>
+            <a:pPr algn="ctr"/>
+            <a:r>
+              <a:rPr lang="en-US" sz="1400" i="1" dirty="0">
+                <a:solidFill>
+                  <a:schemeClr val="accent1">
+                    <a:lumMod val="75000"/>
+                  </a:schemeClr>
+                </a:solidFill>
+              </a:rPr>
+              <a:t>Standard thresholds</a:t>
+            </a:r>
+          </a:p>
+        </p:txBody>
+      </p:sp>
+      <p:sp>
+        <p:nvSpPr>
+          <p:cNvPr id="8" name="TextBox 7">
+            <a:extLst>
+              <a:ext uri="{FF2B5EF4-FFF2-40B4-BE49-F238E27FC236}">
+                <a16:creationId xmlns:a16="http://schemas.microsoft.com/office/drawing/2014/main" id="{E4DBABE2-F8ED-174A-8D10-E377AEB6701E}"/>
+              </a:ext>
+            </a:extLst>
+          </p:cNvPr>
+          <p:cNvSpPr txBox="1"/>
+          <p:nvPr/>
+        </p:nvSpPr>
+        <p:spPr>
+          <a:xfrm>
+            <a:off x="16429633" y="2473622"/>
+            <a:ext cx="2390718" cy="738664"/>
+          </a:xfrm>
+          <a:prstGeom prst="rect">
+            <a:avLst/>
+          </a:prstGeom>
+          <a:noFill/>
+        </p:spPr>
+        <p:txBody>
+          <a:bodyPr wrap="none" rtlCol="0">
+            <a:spAutoFit/>
+          </a:bodyPr>
+          <a:lstStyle/>
+          <a:p>
+            <a:pPr algn="ctr"/>
+            <a:r>
+              <a:rPr lang="en-US" sz="1400" b="1" dirty="0"/>
+              <a:t>2.v2. Filtered inserts:</a:t>
+            </a:r>
+          </a:p>
+          <a:p>
+            <a:pPr algn="ctr"/>
+            <a:r>
+              <a:rPr lang="en-US" sz="1400" dirty="0"/>
+              <a:t>- Insert length vs contig length</a:t>
+            </a:r>
+          </a:p>
+          <a:p>
+            <a:pPr algn="ctr"/>
+            <a:r>
+              <a:rPr lang="en-US" sz="1400" i="1" dirty="0">
+                <a:solidFill>
+                  <a:schemeClr val="accent2">
+                    <a:lumMod val="75000"/>
+                  </a:schemeClr>
+                </a:solidFill>
+              </a:rPr>
+              <a:t>Alternate thresholds</a:t>
+            </a:r>
+          </a:p>
+        </p:txBody>
+      </p:sp>
+      <p:sp>
+        <p:nvSpPr>
+          <p:cNvPr id="9" name="TextBox 8">
+            <a:extLst>
+              <a:ext uri="{FF2B5EF4-FFF2-40B4-BE49-F238E27FC236}">
+                <a16:creationId xmlns:a16="http://schemas.microsoft.com/office/drawing/2014/main" id="{CE9E3A89-700F-BD4B-B39C-DD01A77A5980}"/>
+              </a:ext>
+            </a:extLst>
+          </p:cNvPr>
+          <p:cNvSpPr txBox="1"/>
+          <p:nvPr/>
+        </p:nvSpPr>
+        <p:spPr>
+          <a:xfrm>
+            <a:off x="258477" y="156466"/>
+            <a:ext cx="4362727" cy="1323439"/>
+          </a:xfrm>
+          <a:prstGeom prst="rect">
+            <a:avLst/>
+          </a:prstGeom>
+          <a:noFill/>
+          <a:ln>
+            <a:solidFill>
+              <a:schemeClr val="tx1"/>
+            </a:solidFill>
+          </a:ln>
+        </p:spPr>
+        <p:txBody>
+          <a:bodyPr wrap="square" rtlCol="0">
+            <a:spAutoFit/>
+          </a:bodyPr>
+          <a:lstStyle/>
+          <a:p>
+            <a:r>
+              <a:rPr lang="en-US" sz="1600" b="1" dirty="0"/>
+              <a:t>Note: </a:t>
+            </a:r>
+            <a:r>
+              <a:rPr lang="en-US" sz="1600" i="1" dirty="0"/>
+              <a:t>The numbers/versions alongside the inserts can be used for version control (e.g. associated with a spreadsheet with all the counts for each step. They do not related to the numbered filtering steps/scripts in the bioinformatic pipeline.</a:t>
+            </a:r>
+          </a:p>
+        </p:txBody>
+      </p:sp>
+      <p:sp>
+        <p:nvSpPr>
+          <p:cNvPr id="12" name="TextBox 11">
+            <a:extLst>
+              <a:ext uri="{FF2B5EF4-FFF2-40B4-BE49-F238E27FC236}">
+                <a16:creationId xmlns:a16="http://schemas.microsoft.com/office/drawing/2014/main" id="{9D581CBE-81DD-0B46-8031-F67E8607273D}"/>
+              </a:ext>
+            </a:extLst>
+          </p:cNvPr>
+          <p:cNvSpPr txBox="1"/>
+          <p:nvPr/>
+        </p:nvSpPr>
+        <p:spPr>
+          <a:xfrm>
+            <a:off x="6061961" y="3618626"/>
+            <a:ext cx="2390719" cy="954107"/>
+          </a:xfrm>
+          <a:prstGeom prst="rect">
+            <a:avLst/>
+          </a:prstGeom>
+          <a:noFill/>
+        </p:spPr>
+        <p:txBody>
+          <a:bodyPr wrap="none" rtlCol="0">
+            <a:spAutoFit/>
+          </a:bodyPr>
+          <a:lstStyle/>
+          <a:p>
+            <a:pPr algn="ctr"/>
+            <a:r>
+              <a:rPr lang="en-US" sz="1400" b="1" dirty="0"/>
+              <a:t>3.v1. Filtered inserts:</a:t>
+            </a:r>
+          </a:p>
+          <a:p>
+            <a:pPr algn="ctr"/>
+            <a:r>
+              <a:rPr lang="en-US" sz="1400" dirty="0"/>
+              <a:t>- Insert length vs contig length</a:t>
+            </a:r>
+          </a:p>
+          <a:p>
+            <a:pPr algn="ctr"/>
+            <a:r>
+              <a:rPr lang="en-US" sz="1400" dirty="0"/>
+              <a:t>- False duplications</a:t>
+            </a:r>
+          </a:p>
+          <a:p>
+            <a:pPr algn="ctr"/>
+            <a:r>
+              <a:rPr lang="en-US" sz="1400" i="1" dirty="0">
+                <a:solidFill>
+                  <a:schemeClr val="accent1">
+                    <a:lumMod val="75000"/>
+                  </a:schemeClr>
+                </a:solidFill>
+              </a:rPr>
+              <a:t>Standard thresholds</a:t>
+            </a:r>
+          </a:p>
+        </p:txBody>
+      </p:sp>
+      <p:sp>
+        <p:nvSpPr>
+          <p:cNvPr id="13" name="TextBox 12">
+            <a:extLst>
+              <a:ext uri="{FF2B5EF4-FFF2-40B4-BE49-F238E27FC236}">
+                <a16:creationId xmlns:a16="http://schemas.microsoft.com/office/drawing/2014/main" id="{2CBE8C63-93C8-384C-B5CC-2DD847BFE618}"/>
+              </a:ext>
+            </a:extLst>
+          </p:cNvPr>
+          <p:cNvSpPr txBox="1"/>
+          <p:nvPr/>
+        </p:nvSpPr>
+        <p:spPr>
+          <a:xfrm>
+            <a:off x="16429631" y="3618626"/>
+            <a:ext cx="2390719" cy="954107"/>
+          </a:xfrm>
+          <a:prstGeom prst="rect">
+            <a:avLst/>
+          </a:prstGeom>
+          <a:noFill/>
+        </p:spPr>
+        <p:txBody>
+          <a:bodyPr wrap="none" rtlCol="0">
+            <a:spAutoFit/>
+          </a:bodyPr>
+          <a:lstStyle/>
+          <a:p>
+            <a:pPr algn="ctr"/>
+            <a:r>
+              <a:rPr lang="en-US" sz="1400" b="1" dirty="0"/>
+              <a:t>3.v2. Filtered inserts:</a:t>
+            </a:r>
+          </a:p>
+          <a:p>
+            <a:pPr algn="ctr"/>
+            <a:r>
+              <a:rPr lang="en-US" sz="1400" dirty="0"/>
+              <a:t>- Insert length vs contig length</a:t>
+            </a:r>
+          </a:p>
+          <a:p>
+            <a:pPr algn="ctr"/>
+            <a:r>
+              <a:rPr lang="en-US" sz="1400" dirty="0"/>
+              <a:t>- False duplications</a:t>
+            </a:r>
+          </a:p>
+          <a:p>
+            <a:pPr algn="ctr"/>
+            <a:r>
+              <a:rPr lang="en-US" sz="1400" i="1" dirty="0">
+                <a:solidFill>
+                  <a:schemeClr val="accent2">
+                    <a:lumMod val="75000"/>
+                  </a:schemeClr>
+                </a:solidFill>
+              </a:rPr>
+              <a:t>Alternate thresholds</a:t>
+            </a:r>
+          </a:p>
+        </p:txBody>
+      </p:sp>
+      <p:sp>
+        <p:nvSpPr>
+          <p:cNvPr id="14" name="TextBox 13">
+            <a:extLst>
+              <a:ext uri="{FF2B5EF4-FFF2-40B4-BE49-F238E27FC236}">
+                <a16:creationId xmlns:a16="http://schemas.microsoft.com/office/drawing/2014/main" id="{8D50C5D7-03F6-1846-A65C-2427BD56E71C}"/>
+              </a:ext>
+            </a:extLst>
+          </p:cNvPr>
+          <p:cNvSpPr txBox="1"/>
+          <p:nvPr/>
+        </p:nvSpPr>
+        <p:spPr>
+          <a:xfrm>
+            <a:off x="6034349" y="5151090"/>
+            <a:ext cx="2390719" cy="1169551"/>
+          </a:xfrm>
+          <a:prstGeom prst="rect">
+            <a:avLst/>
+          </a:prstGeom>
+          <a:noFill/>
+        </p:spPr>
+        <p:txBody>
+          <a:bodyPr wrap="none" rtlCol="0">
+            <a:spAutoFit/>
+          </a:bodyPr>
+          <a:lstStyle/>
+          <a:p>
+            <a:pPr algn="ctr"/>
+            <a:r>
+              <a:rPr lang="en-US" sz="1400" b="1" dirty="0"/>
+              <a:t>4.v1. Filtered inserts:</a:t>
+            </a:r>
+          </a:p>
+          <a:p>
+            <a:pPr algn="ctr"/>
+            <a:r>
+              <a:rPr lang="en-US" sz="1400" dirty="0"/>
+              <a:t>- Insert length vs contig length</a:t>
+            </a:r>
+          </a:p>
+          <a:p>
+            <a:pPr algn="ctr"/>
+            <a:r>
+              <a:rPr lang="en-US" sz="1400" dirty="0"/>
+              <a:t>- False duplications</a:t>
+            </a:r>
+          </a:p>
+          <a:p>
+            <a:pPr algn="ctr"/>
+            <a:r>
+              <a:rPr lang="en-US" sz="1400" dirty="0"/>
+              <a:t>- Flanked by Ns</a:t>
+            </a:r>
+          </a:p>
+          <a:p>
+            <a:pPr algn="ctr"/>
+            <a:r>
+              <a:rPr lang="en-US" sz="1400" i="1" dirty="0">
+                <a:solidFill>
+                  <a:schemeClr val="accent1">
+                    <a:lumMod val="75000"/>
+                  </a:schemeClr>
+                </a:solidFill>
+              </a:rPr>
+              <a:t>Standard thresholds</a:t>
+            </a:r>
+          </a:p>
+        </p:txBody>
+      </p:sp>
+      <p:sp>
+        <p:nvSpPr>
+          <p:cNvPr id="15" name="TextBox 14">
+            <a:extLst>
+              <a:ext uri="{FF2B5EF4-FFF2-40B4-BE49-F238E27FC236}">
+                <a16:creationId xmlns:a16="http://schemas.microsoft.com/office/drawing/2014/main" id="{07382D8C-47B0-3D47-9A60-CC4C6989A90D}"/>
+              </a:ext>
+            </a:extLst>
+          </p:cNvPr>
+          <p:cNvSpPr txBox="1"/>
+          <p:nvPr/>
+        </p:nvSpPr>
+        <p:spPr>
+          <a:xfrm>
+            <a:off x="16402020" y="5151090"/>
+            <a:ext cx="2390719" cy="1169551"/>
+          </a:xfrm>
+          <a:prstGeom prst="rect">
+            <a:avLst/>
+          </a:prstGeom>
+          <a:noFill/>
+        </p:spPr>
+        <p:txBody>
+          <a:bodyPr wrap="none" rtlCol="0">
+            <a:spAutoFit/>
+          </a:bodyPr>
+          <a:lstStyle/>
+          <a:p>
+            <a:pPr algn="ctr"/>
+            <a:r>
+              <a:rPr lang="en-US" sz="1400" b="1" dirty="0"/>
+              <a:t>4.v2. Filtered inserts:</a:t>
+            </a:r>
+          </a:p>
+          <a:p>
+            <a:pPr algn="ctr"/>
+            <a:r>
+              <a:rPr lang="en-US" sz="1400" dirty="0"/>
+              <a:t>- Insert length vs contig length</a:t>
+            </a:r>
+          </a:p>
+          <a:p>
+            <a:pPr algn="ctr"/>
+            <a:r>
+              <a:rPr lang="en-US" sz="1400" dirty="0"/>
+              <a:t>- False duplications</a:t>
+            </a:r>
+          </a:p>
+          <a:p>
+            <a:pPr algn="ctr"/>
+            <a:r>
+              <a:rPr lang="en-US" sz="1400" dirty="0"/>
+              <a:t>- Flanked by Ns</a:t>
+            </a:r>
+          </a:p>
+          <a:p>
+            <a:pPr algn="ctr"/>
+            <a:r>
+              <a:rPr lang="en-US" sz="1400" i="1" dirty="0">
+                <a:solidFill>
+                  <a:schemeClr val="accent2">
+                    <a:lumMod val="75000"/>
+                  </a:schemeClr>
+                </a:solidFill>
+              </a:rPr>
+              <a:t>Alternate thresholds</a:t>
+            </a:r>
+          </a:p>
+        </p:txBody>
+      </p:sp>
+      <p:sp>
+        <p:nvSpPr>
+          <p:cNvPr id="16" name="TextBox 15">
+            <a:extLst>
+              <a:ext uri="{FF2B5EF4-FFF2-40B4-BE49-F238E27FC236}">
+                <a16:creationId xmlns:a16="http://schemas.microsoft.com/office/drawing/2014/main" id="{4B7531FA-3444-C844-9A50-CF0405B132EA}"/>
+              </a:ext>
+            </a:extLst>
+          </p:cNvPr>
+          <p:cNvSpPr txBox="1"/>
+          <p:nvPr/>
+        </p:nvSpPr>
+        <p:spPr>
+          <a:xfrm>
+            <a:off x="5976550" y="6770845"/>
+            <a:ext cx="2390719" cy="1384995"/>
+          </a:xfrm>
+          <a:prstGeom prst="rect">
+            <a:avLst/>
+          </a:prstGeom>
+          <a:noFill/>
+        </p:spPr>
+        <p:txBody>
+          <a:bodyPr wrap="none" rtlCol="0">
+            <a:spAutoFit/>
+          </a:bodyPr>
+          <a:lstStyle/>
+          <a:p>
+            <a:pPr algn="ctr"/>
+            <a:r>
+              <a:rPr lang="en-US" sz="1400" b="1" dirty="0"/>
+              <a:t>5.v1. Filtered inserts:</a:t>
+            </a:r>
+          </a:p>
+          <a:p>
+            <a:pPr algn="ctr"/>
+            <a:r>
+              <a:rPr lang="en-US" sz="1400" dirty="0"/>
+              <a:t>- Insert length vs contig length</a:t>
+            </a:r>
+          </a:p>
+          <a:p>
+            <a:pPr algn="ctr"/>
+            <a:r>
+              <a:rPr lang="en-US" sz="1400" dirty="0"/>
+              <a:t>- False duplications</a:t>
+            </a:r>
+          </a:p>
+          <a:p>
+            <a:pPr algn="ctr"/>
+            <a:r>
+              <a:rPr lang="en-US" sz="1400" dirty="0"/>
+              <a:t>- Flanked by Ns</a:t>
+            </a:r>
+          </a:p>
+          <a:p>
+            <a:pPr algn="ctr"/>
+            <a:r>
+              <a:rPr lang="en-US" sz="1400" dirty="0"/>
+              <a:t>- Non-target bacteria</a:t>
+            </a:r>
+          </a:p>
+          <a:p>
+            <a:pPr algn="ctr"/>
+            <a:r>
+              <a:rPr lang="en-US" sz="1400" i="1" dirty="0">
+                <a:solidFill>
+                  <a:schemeClr val="accent1">
+                    <a:lumMod val="75000"/>
+                  </a:schemeClr>
+                </a:solidFill>
+              </a:rPr>
+              <a:t>Standard thresholds</a:t>
+            </a:r>
+          </a:p>
+        </p:txBody>
+      </p:sp>
+      <p:sp>
+        <p:nvSpPr>
+          <p:cNvPr id="17" name="TextBox 16">
+            <a:extLst>
+              <a:ext uri="{FF2B5EF4-FFF2-40B4-BE49-F238E27FC236}">
+                <a16:creationId xmlns:a16="http://schemas.microsoft.com/office/drawing/2014/main" id="{348EFCF4-FD6E-5740-B1AD-844F219CBE0D}"/>
+              </a:ext>
+            </a:extLst>
+          </p:cNvPr>
+          <p:cNvSpPr txBox="1"/>
+          <p:nvPr/>
+        </p:nvSpPr>
+        <p:spPr>
+          <a:xfrm>
+            <a:off x="16475344" y="6770844"/>
+            <a:ext cx="2390719" cy="1384995"/>
+          </a:xfrm>
+          <a:prstGeom prst="rect">
+            <a:avLst/>
+          </a:prstGeom>
+          <a:noFill/>
+        </p:spPr>
+        <p:txBody>
+          <a:bodyPr wrap="none" rtlCol="0">
+            <a:spAutoFit/>
+          </a:bodyPr>
+          <a:lstStyle/>
+          <a:p>
+            <a:pPr algn="ctr"/>
+            <a:r>
+              <a:rPr lang="en-US" sz="1400" b="1" dirty="0"/>
+              <a:t>5.v2. Filtered inserts:</a:t>
+            </a:r>
+          </a:p>
+          <a:p>
+            <a:pPr algn="ctr"/>
+            <a:r>
+              <a:rPr lang="en-US" sz="1400" dirty="0"/>
+              <a:t>- Insert length vs contig length</a:t>
+            </a:r>
+          </a:p>
+          <a:p>
+            <a:pPr algn="ctr"/>
+            <a:r>
+              <a:rPr lang="en-US" sz="1400" dirty="0"/>
+              <a:t>- False duplications</a:t>
+            </a:r>
+          </a:p>
+          <a:p>
+            <a:pPr algn="ctr"/>
+            <a:r>
+              <a:rPr lang="en-US" sz="1400" dirty="0"/>
+              <a:t>- Flanked by Ns</a:t>
+            </a:r>
+          </a:p>
+          <a:p>
+            <a:pPr algn="ctr"/>
+            <a:r>
+              <a:rPr lang="en-US" sz="1400" dirty="0"/>
+              <a:t>- Non-target bacteria</a:t>
+            </a:r>
+          </a:p>
+          <a:p>
+            <a:pPr algn="ctr"/>
+            <a:r>
+              <a:rPr lang="en-US" sz="1400" i="1" dirty="0">
+                <a:solidFill>
+                  <a:schemeClr val="accent2">
+                    <a:lumMod val="75000"/>
+                  </a:schemeClr>
+                </a:solidFill>
+              </a:rPr>
+              <a:t>Alternate thresholds</a:t>
+            </a:r>
+          </a:p>
+        </p:txBody>
+      </p:sp>
+      <p:sp>
+        <p:nvSpPr>
+          <p:cNvPr id="20" name="TextBox 19">
+            <a:extLst>
+              <a:ext uri="{FF2B5EF4-FFF2-40B4-BE49-F238E27FC236}">
+                <a16:creationId xmlns:a16="http://schemas.microsoft.com/office/drawing/2014/main" id="{FA6803DC-BA7F-8348-B934-4F6965560027}"/>
+              </a:ext>
+            </a:extLst>
+          </p:cNvPr>
+          <p:cNvSpPr txBox="1"/>
+          <p:nvPr/>
+        </p:nvSpPr>
+        <p:spPr>
+          <a:xfrm>
+            <a:off x="7246584" y="10949865"/>
+            <a:ext cx="2390719" cy="1600438"/>
+          </a:xfrm>
+          <a:prstGeom prst="rect">
+            <a:avLst/>
+          </a:prstGeom>
+          <a:noFill/>
+        </p:spPr>
+        <p:txBody>
+          <a:bodyPr wrap="none" rtlCol="0">
+            <a:spAutoFit/>
+          </a:bodyPr>
+          <a:lstStyle/>
+          <a:p>
+            <a:pPr algn="ctr"/>
+            <a:r>
+              <a:rPr lang="en-US" sz="1400" b="1" dirty="0"/>
+              <a:t>7.v2. Unique filtered inserts:</a:t>
+            </a:r>
+          </a:p>
+          <a:p>
+            <a:pPr algn="ctr"/>
+            <a:r>
+              <a:rPr lang="en-US" sz="1400" dirty="0"/>
+              <a:t>- Insert length vs contig length</a:t>
+            </a:r>
+          </a:p>
+          <a:p>
+            <a:pPr algn="ctr"/>
+            <a:r>
+              <a:rPr lang="en-US" sz="1400" dirty="0"/>
+              <a:t>- False duplications</a:t>
+            </a:r>
+          </a:p>
+          <a:p>
+            <a:pPr algn="ctr"/>
+            <a:r>
+              <a:rPr lang="en-US" sz="1400" dirty="0"/>
+              <a:t>- Flanked by Ns</a:t>
+            </a:r>
+          </a:p>
+          <a:p>
+            <a:pPr algn="ctr"/>
+            <a:r>
+              <a:rPr lang="en-US" sz="1400" dirty="0"/>
+              <a:t>- Non-target bacteria</a:t>
+            </a:r>
+          </a:p>
+          <a:p>
+            <a:pPr algn="ctr"/>
+            <a:r>
+              <a:rPr lang="en-US" sz="1400" dirty="0"/>
+              <a:t>- Sequence </a:t>
+            </a:r>
+            <a:r>
+              <a:rPr lang="en-US" sz="1400" dirty="0" err="1"/>
+              <a:t>complxity</a:t>
+            </a:r>
+            <a:endParaRPr lang="en-US" sz="1400" dirty="0"/>
+          </a:p>
+          <a:p>
+            <a:pPr algn="ctr"/>
+            <a:r>
+              <a:rPr lang="en-US" sz="1400" i="1" dirty="0">
+                <a:solidFill>
+                  <a:schemeClr val="accent1">
+                    <a:lumMod val="75000"/>
+                  </a:schemeClr>
+                </a:solidFill>
+              </a:rPr>
+              <a:t>Standard thresholds</a:t>
+            </a:r>
+          </a:p>
+        </p:txBody>
+      </p:sp>
+      <p:sp>
+        <p:nvSpPr>
+          <p:cNvPr id="23" name="TextBox 22">
+            <a:extLst>
+              <a:ext uri="{FF2B5EF4-FFF2-40B4-BE49-F238E27FC236}">
+                <a16:creationId xmlns:a16="http://schemas.microsoft.com/office/drawing/2014/main" id="{D458E0FA-05D3-044E-8785-C34DFEB30E50}"/>
+              </a:ext>
+            </a:extLst>
+          </p:cNvPr>
+          <p:cNvSpPr txBox="1"/>
+          <p:nvPr/>
+        </p:nvSpPr>
+        <p:spPr>
+          <a:xfrm>
+            <a:off x="14832565" y="10949865"/>
+            <a:ext cx="2921826" cy="1600438"/>
+          </a:xfrm>
+          <a:prstGeom prst="rect">
+            <a:avLst/>
+          </a:prstGeom>
+          <a:noFill/>
+        </p:spPr>
+        <p:txBody>
+          <a:bodyPr wrap="none" rtlCol="0">
+            <a:spAutoFit/>
+          </a:bodyPr>
+          <a:lstStyle/>
+          <a:p>
+            <a:pPr algn="ctr"/>
+            <a:r>
+              <a:rPr lang="en-US" sz="1400" b="1" dirty="0"/>
+              <a:t>7.v3. Filtered inserts with duplicates:</a:t>
+            </a:r>
+          </a:p>
+          <a:p>
+            <a:pPr algn="ctr"/>
+            <a:r>
+              <a:rPr lang="en-US" sz="1400" dirty="0"/>
+              <a:t>- Insert length vs contig length</a:t>
+            </a:r>
+          </a:p>
+          <a:p>
+            <a:pPr algn="ctr"/>
+            <a:r>
+              <a:rPr lang="en-US" sz="1400" dirty="0"/>
+              <a:t>- False duplications</a:t>
+            </a:r>
+          </a:p>
+          <a:p>
+            <a:pPr algn="ctr"/>
+            <a:r>
+              <a:rPr lang="en-US" sz="1400" dirty="0"/>
+              <a:t>- Flanked by Ns</a:t>
+            </a:r>
+          </a:p>
+          <a:p>
+            <a:pPr algn="ctr"/>
+            <a:r>
+              <a:rPr lang="en-US" sz="1400" dirty="0"/>
+              <a:t>- Non-target bacteria</a:t>
+            </a:r>
+          </a:p>
+          <a:p>
+            <a:pPr algn="ctr"/>
+            <a:r>
+              <a:rPr lang="en-US" sz="1400" dirty="0"/>
+              <a:t>- Sequence complexity</a:t>
+            </a:r>
+          </a:p>
+          <a:p>
+            <a:pPr algn="ctr"/>
+            <a:r>
+              <a:rPr lang="en-US" sz="1400" i="1" dirty="0">
+                <a:solidFill>
+                  <a:schemeClr val="accent2">
+                    <a:lumMod val="75000"/>
+                  </a:schemeClr>
+                </a:solidFill>
+              </a:rPr>
+              <a:t>Alternate thresholds</a:t>
+            </a:r>
+          </a:p>
+        </p:txBody>
+      </p:sp>
+      <p:sp>
+        <p:nvSpPr>
+          <p:cNvPr id="24" name="TextBox 23">
+            <a:extLst>
+              <a:ext uri="{FF2B5EF4-FFF2-40B4-BE49-F238E27FC236}">
+                <a16:creationId xmlns:a16="http://schemas.microsoft.com/office/drawing/2014/main" id="{F85D64B0-5957-B04E-8FD0-BC829C50747A}"/>
+              </a:ext>
+            </a:extLst>
+          </p:cNvPr>
+          <p:cNvSpPr txBox="1"/>
+          <p:nvPr/>
+        </p:nvSpPr>
+        <p:spPr>
+          <a:xfrm>
+            <a:off x="17708512" y="10949865"/>
+            <a:ext cx="2390719" cy="1600438"/>
+          </a:xfrm>
+          <a:prstGeom prst="rect">
+            <a:avLst/>
+          </a:prstGeom>
+          <a:noFill/>
+        </p:spPr>
+        <p:txBody>
+          <a:bodyPr wrap="none" rtlCol="0">
+            <a:spAutoFit/>
+          </a:bodyPr>
+          <a:lstStyle/>
+          <a:p>
+            <a:pPr algn="ctr"/>
+            <a:r>
+              <a:rPr lang="en-US" sz="1400" b="1" dirty="0"/>
+              <a:t>7.v4. Unique filtered inserts:</a:t>
+            </a:r>
+          </a:p>
+          <a:p>
+            <a:pPr algn="ctr"/>
+            <a:r>
+              <a:rPr lang="en-US" sz="1400" dirty="0"/>
+              <a:t>- Insert length vs contig length</a:t>
+            </a:r>
+          </a:p>
+          <a:p>
+            <a:pPr algn="ctr"/>
+            <a:r>
+              <a:rPr lang="en-US" sz="1400" dirty="0"/>
+              <a:t>- False duplications</a:t>
+            </a:r>
+          </a:p>
+          <a:p>
+            <a:pPr algn="ctr"/>
+            <a:r>
+              <a:rPr lang="en-US" sz="1400" dirty="0"/>
+              <a:t>- Flanked by Ns</a:t>
+            </a:r>
+          </a:p>
+          <a:p>
+            <a:pPr algn="ctr"/>
+            <a:r>
+              <a:rPr lang="en-US" sz="1400" dirty="0"/>
+              <a:t>- Non-target bacteria</a:t>
+            </a:r>
+          </a:p>
+          <a:p>
+            <a:pPr algn="ctr"/>
+            <a:r>
+              <a:rPr lang="en-US" sz="1400" dirty="0"/>
+              <a:t>- Sequence complexity</a:t>
+            </a:r>
+          </a:p>
+          <a:p>
+            <a:pPr algn="ctr"/>
+            <a:r>
+              <a:rPr lang="en-US" sz="1400" i="1" dirty="0">
+                <a:solidFill>
+                  <a:schemeClr val="accent2">
+                    <a:lumMod val="75000"/>
+                  </a:schemeClr>
+                </a:solidFill>
+              </a:rPr>
+              <a:t>Alternate thresholds</a:t>
+            </a:r>
+          </a:p>
+        </p:txBody>
+      </p:sp>
+      <p:sp>
+        <p:nvSpPr>
+          <p:cNvPr id="27" name="TextBox 26">
+            <a:extLst>
+              <a:ext uri="{FF2B5EF4-FFF2-40B4-BE49-F238E27FC236}">
+                <a16:creationId xmlns:a16="http://schemas.microsoft.com/office/drawing/2014/main" id="{38099BC1-7C5A-7046-99A9-6BBCB024205D}"/>
+              </a:ext>
+            </a:extLst>
+          </p:cNvPr>
+          <p:cNvSpPr txBox="1"/>
+          <p:nvPr/>
+        </p:nvSpPr>
+        <p:spPr>
+          <a:xfrm>
+            <a:off x="4406137" y="10949865"/>
+            <a:ext cx="2921826" cy="1600438"/>
+          </a:xfrm>
+          <a:prstGeom prst="rect">
+            <a:avLst/>
+          </a:prstGeom>
+          <a:noFill/>
+        </p:spPr>
+        <p:txBody>
+          <a:bodyPr wrap="none" rtlCol="0">
+            <a:spAutoFit/>
+          </a:bodyPr>
+          <a:lstStyle/>
+          <a:p>
+            <a:pPr algn="ctr"/>
+            <a:r>
+              <a:rPr lang="en-US" sz="1400" b="1" dirty="0"/>
+              <a:t>7.v1. Filtered inserts with duplicates:</a:t>
+            </a:r>
+          </a:p>
+          <a:p>
+            <a:pPr algn="ctr"/>
+            <a:r>
+              <a:rPr lang="en-US" sz="1400" dirty="0"/>
+              <a:t>- Insert length vs contig length</a:t>
+            </a:r>
+          </a:p>
+          <a:p>
+            <a:pPr algn="ctr"/>
+            <a:r>
+              <a:rPr lang="en-US" sz="1400" dirty="0"/>
+              <a:t>- False duplications</a:t>
+            </a:r>
+          </a:p>
+          <a:p>
+            <a:pPr algn="ctr"/>
+            <a:r>
+              <a:rPr lang="en-US" sz="1400" dirty="0"/>
+              <a:t>- Flanked by Ns</a:t>
+            </a:r>
+          </a:p>
+          <a:p>
+            <a:pPr algn="ctr"/>
+            <a:r>
+              <a:rPr lang="en-US" sz="1400" dirty="0"/>
+              <a:t>- Non-target bacteria</a:t>
+            </a:r>
+          </a:p>
+          <a:p>
+            <a:pPr algn="ctr"/>
+            <a:r>
+              <a:rPr lang="en-US" sz="1400" dirty="0"/>
+              <a:t>- Sequence complexity</a:t>
+            </a:r>
+          </a:p>
+          <a:p>
+            <a:pPr algn="ctr"/>
+            <a:r>
+              <a:rPr lang="en-US" sz="1400" i="1" dirty="0">
+                <a:solidFill>
+                  <a:schemeClr val="accent1">
+                    <a:lumMod val="75000"/>
+                  </a:schemeClr>
+                </a:solidFill>
+              </a:rPr>
+              <a:t>Standard thresholds</a:t>
+            </a:r>
+          </a:p>
+        </p:txBody>
+      </p:sp>
+      <p:sp>
+        <p:nvSpPr>
+          <p:cNvPr id="28" name="TextBox 27">
+            <a:extLst>
+              <a:ext uri="{FF2B5EF4-FFF2-40B4-BE49-F238E27FC236}">
+                <a16:creationId xmlns:a16="http://schemas.microsoft.com/office/drawing/2014/main" id="{6EF5C63B-4DB0-AD4D-911F-26DE25E9492B}"/>
+              </a:ext>
+            </a:extLst>
+          </p:cNvPr>
+          <p:cNvSpPr txBox="1"/>
+          <p:nvPr/>
+        </p:nvSpPr>
+        <p:spPr>
+          <a:xfrm>
+            <a:off x="6777830" y="13032520"/>
+            <a:ext cx="3365665" cy="1600438"/>
+          </a:xfrm>
+          <a:prstGeom prst="rect">
+            <a:avLst/>
+          </a:prstGeom>
+          <a:noFill/>
+        </p:spPr>
+        <p:txBody>
+          <a:bodyPr wrap="none" rtlCol="0">
+            <a:spAutoFit/>
+          </a:bodyPr>
+          <a:lstStyle/>
+          <a:p>
+            <a:pPr algn="ctr"/>
+            <a:r>
+              <a:rPr lang="en-US" sz="1400" b="1" dirty="0"/>
+              <a:t>8.v1. Unique putatively old filtered inserts:</a:t>
+            </a:r>
+          </a:p>
+          <a:p>
+            <a:pPr algn="ctr"/>
+            <a:r>
+              <a:rPr lang="en-US" sz="1400" dirty="0"/>
+              <a:t>- Insert length vs contig length</a:t>
+            </a:r>
+          </a:p>
+          <a:p>
+            <a:pPr algn="ctr"/>
+            <a:r>
+              <a:rPr lang="en-US" sz="1400" dirty="0"/>
+              <a:t>- False duplications</a:t>
+            </a:r>
+          </a:p>
+          <a:p>
+            <a:pPr algn="ctr"/>
+            <a:r>
+              <a:rPr lang="en-US" sz="1400" dirty="0"/>
+              <a:t>- Flanked by Ns</a:t>
+            </a:r>
+          </a:p>
+          <a:p>
+            <a:pPr algn="ctr"/>
+            <a:r>
+              <a:rPr lang="en-US" sz="1400" dirty="0"/>
+              <a:t>- Non-target bacteria</a:t>
+            </a:r>
+          </a:p>
+          <a:p>
+            <a:pPr algn="ctr"/>
+            <a:r>
+              <a:rPr lang="en-US" sz="1400" dirty="0"/>
+              <a:t>- Sequence complexity</a:t>
+            </a:r>
+          </a:p>
+          <a:p>
+            <a:pPr algn="ctr"/>
+            <a:r>
+              <a:rPr lang="en-US" sz="1400" i="1" dirty="0">
+                <a:solidFill>
+                  <a:schemeClr val="accent1">
+                    <a:lumMod val="75000"/>
+                  </a:schemeClr>
+                </a:solidFill>
+              </a:rPr>
+              <a:t>Standard thresholds</a:t>
+            </a:r>
+          </a:p>
+        </p:txBody>
+      </p:sp>
+      <p:sp>
+        <p:nvSpPr>
+          <p:cNvPr id="30" name="TextBox 29">
+            <a:extLst>
+              <a:ext uri="{FF2B5EF4-FFF2-40B4-BE49-F238E27FC236}">
+                <a16:creationId xmlns:a16="http://schemas.microsoft.com/office/drawing/2014/main" id="{F1C9C604-83BF-D946-9DA4-D7F31A751C55}"/>
+              </a:ext>
+            </a:extLst>
+          </p:cNvPr>
+          <p:cNvSpPr txBox="1"/>
+          <p:nvPr/>
+        </p:nvSpPr>
+        <p:spPr>
+          <a:xfrm>
+            <a:off x="17183230" y="13032520"/>
+            <a:ext cx="3365665" cy="1600438"/>
+          </a:xfrm>
+          <a:prstGeom prst="rect">
+            <a:avLst/>
+          </a:prstGeom>
+          <a:noFill/>
+        </p:spPr>
+        <p:txBody>
+          <a:bodyPr wrap="none" rtlCol="0">
+            <a:spAutoFit/>
+          </a:bodyPr>
+          <a:lstStyle/>
+          <a:p>
+            <a:pPr algn="ctr"/>
+            <a:r>
+              <a:rPr lang="en-US" sz="1400" b="1" dirty="0"/>
+              <a:t>8.v2. Unique putatively old filtered inserts:</a:t>
+            </a:r>
+          </a:p>
+          <a:p>
+            <a:pPr algn="ctr"/>
+            <a:r>
+              <a:rPr lang="en-US" sz="1400" dirty="0"/>
+              <a:t>- Insert length vs contig length</a:t>
+            </a:r>
+          </a:p>
+          <a:p>
+            <a:pPr algn="ctr"/>
+            <a:r>
+              <a:rPr lang="en-US" sz="1400" dirty="0"/>
+              <a:t>- False duplications</a:t>
+            </a:r>
+          </a:p>
+          <a:p>
+            <a:pPr algn="ctr"/>
+            <a:r>
+              <a:rPr lang="en-US" sz="1400" dirty="0"/>
+              <a:t>- Flanked by Ns</a:t>
+            </a:r>
+          </a:p>
+          <a:p>
+            <a:pPr algn="ctr"/>
+            <a:r>
+              <a:rPr lang="en-US" sz="1400" dirty="0"/>
+              <a:t>- Non-target bacteria</a:t>
+            </a:r>
+          </a:p>
+          <a:p>
+            <a:pPr algn="ctr"/>
+            <a:r>
+              <a:rPr lang="en-US" sz="1400" dirty="0"/>
+              <a:t>- Sequence complexity</a:t>
+            </a:r>
+          </a:p>
+          <a:p>
+            <a:pPr algn="ctr"/>
+            <a:r>
+              <a:rPr lang="en-US" sz="1400" i="1" dirty="0">
+                <a:solidFill>
+                  <a:schemeClr val="accent2">
+                    <a:lumMod val="75000"/>
+                  </a:schemeClr>
+                </a:solidFill>
+              </a:rPr>
+              <a:t>Alternate thresholds</a:t>
+            </a:r>
+          </a:p>
+        </p:txBody>
+      </p:sp>
+      <p:cxnSp>
+        <p:nvCxnSpPr>
+          <p:cNvPr id="33" name="Straight Arrow Connector 32">
+            <a:extLst>
+              <a:ext uri="{FF2B5EF4-FFF2-40B4-BE49-F238E27FC236}">
+                <a16:creationId xmlns:a16="http://schemas.microsoft.com/office/drawing/2014/main" id="{9A542E3C-41E7-FD46-9C1D-F365971515B2}"/>
+              </a:ext>
+            </a:extLst>
+          </p:cNvPr>
+          <p:cNvCxnSpPr>
+            <a:cxnSpLocks/>
+          </p:cNvCxnSpPr>
+          <p:nvPr/>
+        </p:nvCxnSpPr>
+        <p:spPr>
+          <a:xfrm flipH="1">
+            <a:off x="8425068" y="625682"/>
+            <a:ext cx="3114660" cy="843487"/>
+          </a:xfrm>
+          <a:prstGeom prst="straightConnector1">
+            <a:avLst/>
+          </a:prstGeom>
+          <a:ln>
+            <a:solidFill>
+              <a:schemeClr val="tx1"/>
+            </a:solidFill>
+            <a:tailEnd type="triangle"/>
+          </a:ln>
+        </p:spPr>
+        <p:style>
+          <a:lnRef idx="1">
+            <a:schemeClr val="accent1"/>
+          </a:lnRef>
+          <a:fillRef idx="0">
+            <a:schemeClr val="accent1"/>
+          </a:fillRef>
+          <a:effectRef idx="0">
+            <a:schemeClr val="accent1"/>
+          </a:effectRef>
+          <a:fontRef idx="minor">
+            <a:schemeClr val="tx1"/>
+          </a:fontRef>
+        </p:style>
+      </p:cxnSp>
+      <p:cxnSp>
+        <p:nvCxnSpPr>
+          <p:cNvPr id="35" name="Straight Arrow Connector 34">
+            <a:extLst>
+              <a:ext uri="{FF2B5EF4-FFF2-40B4-BE49-F238E27FC236}">
+                <a16:creationId xmlns:a16="http://schemas.microsoft.com/office/drawing/2014/main" id="{B1618980-A340-1F47-82EA-5C084CF4A795}"/>
+              </a:ext>
+            </a:extLst>
+          </p:cNvPr>
+          <p:cNvCxnSpPr>
+            <a:cxnSpLocks/>
+          </p:cNvCxnSpPr>
+          <p:nvPr/>
+        </p:nvCxnSpPr>
+        <p:spPr>
+          <a:xfrm>
+            <a:off x="13198236" y="625682"/>
+            <a:ext cx="3114660" cy="843487"/>
+          </a:xfrm>
+          <a:prstGeom prst="straightConnector1">
+            <a:avLst/>
+          </a:prstGeom>
+          <a:ln>
+            <a:solidFill>
+              <a:schemeClr val="tx1"/>
+            </a:solidFill>
+            <a:tailEnd type="triangle"/>
+          </a:ln>
+        </p:spPr>
+        <p:style>
+          <a:lnRef idx="1">
+            <a:schemeClr val="accent1"/>
+          </a:lnRef>
+          <a:fillRef idx="0">
+            <a:schemeClr val="accent1"/>
+          </a:fillRef>
+          <a:effectRef idx="0">
+            <a:schemeClr val="accent1"/>
+          </a:effectRef>
+          <a:fontRef idx="minor">
+            <a:schemeClr val="tx1"/>
+          </a:fontRef>
+        </p:style>
+      </p:cxnSp>
+      <p:cxnSp>
+        <p:nvCxnSpPr>
+          <p:cNvPr id="41" name="Straight Arrow Connector 40">
+            <a:extLst>
+              <a:ext uri="{FF2B5EF4-FFF2-40B4-BE49-F238E27FC236}">
+                <a16:creationId xmlns:a16="http://schemas.microsoft.com/office/drawing/2014/main" id="{1E10A0AC-93A2-0041-BFEB-449ECABBB3C5}"/>
+              </a:ext>
+            </a:extLst>
+          </p:cNvPr>
+          <p:cNvCxnSpPr>
+            <a:cxnSpLocks/>
+          </p:cNvCxnSpPr>
+          <p:nvPr/>
+        </p:nvCxnSpPr>
+        <p:spPr>
+          <a:xfrm flipH="1">
+            <a:off x="5867048" y="10156041"/>
+            <a:ext cx="545359" cy="650842"/>
+          </a:xfrm>
+          <a:prstGeom prst="straightConnector1">
+            <a:avLst/>
+          </a:prstGeom>
+          <a:ln>
+            <a:solidFill>
+              <a:schemeClr val="tx1"/>
+            </a:solidFill>
+            <a:tailEnd type="triangle"/>
+          </a:ln>
+        </p:spPr>
+        <p:style>
+          <a:lnRef idx="1">
+            <a:schemeClr val="accent1"/>
+          </a:lnRef>
+          <a:fillRef idx="0">
+            <a:schemeClr val="accent1"/>
+          </a:fillRef>
+          <a:effectRef idx="0">
+            <a:schemeClr val="accent1"/>
+          </a:effectRef>
+          <a:fontRef idx="minor">
+            <a:schemeClr val="tx1"/>
+          </a:fontRef>
+        </p:style>
+      </p:cxnSp>
+      <p:cxnSp>
+        <p:nvCxnSpPr>
+          <p:cNvPr id="43" name="Straight Arrow Connector 42">
+            <a:extLst>
+              <a:ext uri="{FF2B5EF4-FFF2-40B4-BE49-F238E27FC236}">
+                <a16:creationId xmlns:a16="http://schemas.microsoft.com/office/drawing/2014/main" id="{AC795674-A231-1A43-9999-A5CAF1038820}"/>
+              </a:ext>
+            </a:extLst>
+          </p:cNvPr>
+          <p:cNvCxnSpPr>
+            <a:cxnSpLocks/>
+          </p:cNvCxnSpPr>
+          <p:nvPr/>
+        </p:nvCxnSpPr>
+        <p:spPr>
+          <a:xfrm>
+            <a:off x="7915304" y="10150685"/>
+            <a:ext cx="545359" cy="650842"/>
+          </a:xfrm>
+          <a:prstGeom prst="straightConnector1">
+            <a:avLst/>
+          </a:prstGeom>
+          <a:ln>
+            <a:solidFill>
+              <a:schemeClr val="tx1"/>
+            </a:solidFill>
+            <a:tailEnd type="triangle"/>
+          </a:ln>
+        </p:spPr>
+        <p:style>
+          <a:lnRef idx="1">
+            <a:schemeClr val="accent1"/>
+          </a:lnRef>
+          <a:fillRef idx="0">
+            <a:schemeClr val="accent1"/>
+          </a:fillRef>
+          <a:effectRef idx="0">
+            <a:schemeClr val="accent1"/>
+          </a:effectRef>
+          <a:fontRef idx="minor">
+            <a:schemeClr val="tx1"/>
+          </a:fontRef>
+        </p:style>
+      </p:cxnSp>
+      <p:cxnSp>
+        <p:nvCxnSpPr>
+          <p:cNvPr id="46" name="Straight Arrow Connector 45">
+            <a:extLst>
+              <a:ext uri="{FF2B5EF4-FFF2-40B4-BE49-F238E27FC236}">
+                <a16:creationId xmlns:a16="http://schemas.microsoft.com/office/drawing/2014/main" id="{331A2F39-6529-784E-8A96-E2E80E7CDD48}"/>
+              </a:ext>
+            </a:extLst>
+          </p:cNvPr>
+          <p:cNvCxnSpPr>
+            <a:cxnSpLocks/>
+          </p:cNvCxnSpPr>
+          <p:nvPr/>
+        </p:nvCxnSpPr>
+        <p:spPr>
+          <a:xfrm flipH="1">
+            <a:off x="16346418" y="10150685"/>
+            <a:ext cx="545359" cy="650842"/>
+          </a:xfrm>
+          <a:prstGeom prst="straightConnector1">
+            <a:avLst/>
+          </a:prstGeom>
+          <a:ln>
+            <a:solidFill>
+              <a:schemeClr val="tx1"/>
+            </a:solidFill>
+            <a:tailEnd type="triangle"/>
+          </a:ln>
+        </p:spPr>
+        <p:style>
+          <a:lnRef idx="1">
+            <a:schemeClr val="accent1"/>
+          </a:lnRef>
+          <a:fillRef idx="0">
+            <a:schemeClr val="accent1"/>
+          </a:fillRef>
+          <a:effectRef idx="0">
+            <a:schemeClr val="accent1"/>
+          </a:effectRef>
+          <a:fontRef idx="minor">
+            <a:schemeClr val="tx1"/>
+          </a:fontRef>
+        </p:style>
+      </p:cxnSp>
+      <p:cxnSp>
+        <p:nvCxnSpPr>
+          <p:cNvPr id="47" name="Straight Arrow Connector 46">
+            <a:extLst>
+              <a:ext uri="{FF2B5EF4-FFF2-40B4-BE49-F238E27FC236}">
+                <a16:creationId xmlns:a16="http://schemas.microsoft.com/office/drawing/2014/main" id="{D7705B34-B6D8-7B4E-8B80-B3788AD858D7}"/>
+              </a:ext>
+            </a:extLst>
+          </p:cNvPr>
+          <p:cNvCxnSpPr>
+            <a:cxnSpLocks/>
+          </p:cNvCxnSpPr>
+          <p:nvPr/>
+        </p:nvCxnSpPr>
+        <p:spPr>
+          <a:xfrm>
+            <a:off x="18394674" y="10145329"/>
+            <a:ext cx="545359" cy="650842"/>
+          </a:xfrm>
+          <a:prstGeom prst="straightConnector1">
+            <a:avLst/>
+          </a:prstGeom>
+          <a:ln>
+            <a:solidFill>
+              <a:schemeClr val="tx1"/>
+            </a:solidFill>
+            <a:tailEnd type="triangle"/>
+          </a:ln>
+        </p:spPr>
+        <p:style>
+          <a:lnRef idx="1">
+            <a:schemeClr val="accent1"/>
+          </a:lnRef>
+          <a:fillRef idx="0">
+            <a:schemeClr val="accent1"/>
+          </a:fillRef>
+          <a:effectRef idx="0">
+            <a:schemeClr val="accent1"/>
+          </a:effectRef>
+          <a:fontRef idx="minor">
+            <a:schemeClr val="tx1"/>
+          </a:fontRef>
+        </p:style>
+      </p:cxnSp>
+      <p:cxnSp>
+        <p:nvCxnSpPr>
+          <p:cNvPr id="50" name="Straight Arrow Connector 49">
+            <a:extLst>
+              <a:ext uri="{FF2B5EF4-FFF2-40B4-BE49-F238E27FC236}">
+                <a16:creationId xmlns:a16="http://schemas.microsoft.com/office/drawing/2014/main" id="{8D8769D7-6309-EF43-949D-3F5D6A94F337}"/>
+              </a:ext>
+            </a:extLst>
+          </p:cNvPr>
+          <p:cNvCxnSpPr>
+            <a:cxnSpLocks/>
+          </p:cNvCxnSpPr>
+          <p:nvPr/>
+        </p:nvCxnSpPr>
+        <p:spPr>
+          <a:xfrm>
+            <a:off x="7257320" y="1992389"/>
+            <a:ext cx="0" cy="447793"/>
+          </a:xfrm>
+          <a:prstGeom prst="straightConnector1">
+            <a:avLst/>
+          </a:prstGeom>
+          <a:ln>
+            <a:solidFill>
+              <a:schemeClr val="tx1"/>
+            </a:solidFill>
+            <a:tailEnd type="triangle"/>
+          </a:ln>
+        </p:spPr>
+        <p:style>
+          <a:lnRef idx="1">
+            <a:schemeClr val="accent1"/>
+          </a:lnRef>
+          <a:fillRef idx="0">
+            <a:schemeClr val="accent1"/>
+          </a:fillRef>
+          <a:effectRef idx="0">
+            <a:schemeClr val="accent1"/>
+          </a:effectRef>
+          <a:fontRef idx="minor">
+            <a:schemeClr val="tx1"/>
+          </a:fontRef>
+        </p:style>
+      </p:cxnSp>
+      <p:cxnSp>
+        <p:nvCxnSpPr>
+          <p:cNvPr id="52" name="Straight Arrow Connector 51">
+            <a:extLst>
+              <a:ext uri="{FF2B5EF4-FFF2-40B4-BE49-F238E27FC236}">
+                <a16:creationId xmlns:a16="http://schemas.microsoft.com/office/drawing/2014/main" id="{BEF9459E-08E5-9D46-B1F7-DD88BFA29DB7}"/>
+              </a:ext>
+            </a:extLst>
+          </p:cNvPr>
+          <p:cNvCxnSpPr>
+            <a:cxnSpLocks/>
+          </p:cNvCxnSpPr>
+          <p:nvPr/>
+        </p:nvCxnSpPr>
+        <p:spPr>
+          <a:xfrm>
+            <a:off x="7244108" y="3169870"/>
+            <a:ext cx="0" cy="447793"/>
+          </a:xfrm>
+          <a:prstGeom prst="straightConnector1">
+            <a:avLst/>
+          </a:prstGeom>
+          <a:ln>
+            <a:solidFill>
+              <a:schemeClr val="tx1"/>
+            </a:solidFill>
+            <a:tailEnd type="triangle"/>
+          </a:ln>
+        </p:spPr>
+        <p:style>
+          <a:lnRef idx="1">
+            <a:schemeClr val="accent1"/>
+          </a:lnRef>
+          <a:fillRef idx="0">
+            <a:schemeClr val="accent1"/>
+          </a:fillRef>
+          <a:effectRef idx="0">
+            <a:schemeClr val="accent1"/>
+          </a:effectRef>
+          <a:fontRef idx="minor">
+            <a:schemeClr val="tx1"/>
+          </a:fontRef>
+        </p:style>
+      </p:cxnSp>
+      <p:cxnSp>
+        <p:nvCxnSpPr>
+          <p:cNvPr id="53" name="Straight Arrow Connector 52">
+            <a:extLst>
+              <a:ext uri="{FF2B5EF4-FFF2-40B4-BE49-F238E27FC236}">
+                <a16:creationId xmlns:a16="http://schemas.microsoft.com/office/drawing/2014/main" id="{E87FD5F4-0AC1-8348-A9D6-105805AE84E0}"/>
+              </a:ext>
+            </a:extLst>
+          </p:cNvPr>
+          <p:cNvCxnSpPr>
+            <a:cxnSpLocks/>
+          </p:cNvCxnSpPr>
+          <p:nvPr/>
+        </p:nvCxnSpPr>
+        <p:spPr>
+          <a:xfrm>
+            <a:off x="7225820" y="4609309"/>
+            <a:ext cx="0" cy="447793"/>
+          </a:xfrm>
+          <a:prstGeom prst="straightConnector1">
+            <a:avLst/>
+          </a:prstGeom>
+          <a:ln>
+            <a:solidFill>
+              <a:schemeClr val="tx1"/>
+            </a:solidFill>
+            <a:tailEnd type="triangle"/>
+          </a:ln>
+        </p:spPr>
+        <p:style>
+          <a:lnRef idx="1">
+            <a:schemeClr val="accent1"/>
+          </a:lnRef>
+          <a:fillRef idx="0">
+            <a:schemeClr val="accent1"/>
+          </a:fillRef>
+          <a:effectRef idx="0">
+            <a:schemeClr val="accent1"/>
+          </a:effectRef>
+          <a:fontRef idx="minor">
+            <a:schemeClr val="tx1"/>
+          </a:fontRef>
+        </p:style>
+      </p:cxnSp>
+      <p:cxnSp>
+        <p:nvCxnSpPr>
+          <p:cNvPr id="54" name="Straight Arrow Connector 53">
+            <a:extLst>
+              <a:ext uri="{FF2B5EF4-FFF2-40B4-BE49-F238E27FC236}">
+                <a16:creationId xmlns:a16="http://schemas.microsoft.com/office/drawing/2014/main" id="{82A524E1-5C8A-434E-A3CE-95287F8AE912}"/>
+              </a:ext>
+            </a:extLst>
+          </p:cNvPr>
+          <p:cNvCxnSpPr>
+            <a:cxnSpLocks/>
+          </p:cNvCxnSpPr>
+          <p:nvPr/>
+        </p:nvCxnSpPr>
+        <p:spPr>
+          <a:xfrm>
+            <a:off x="17610591" y="1992389"/>
+            <a:ext cx="0" cy="447793"/>
+          </a:xfrm>
+          <a:prstGeom prst="straightConnector1">
+            <a:avLst/>
+          </a:prstGeom>
+          <a:ln>
+            <a:solidFill>
+              <a:schemeClr val="tx1"/>
+            </a:solidFill>
+            <a:tailEnd type="triangle"/>
+          </a:ln>
+        </p:spPr>
+        <p:style>
+          <a:lnRef idx="1">
+            <a:schemeClr val="accent1"/>
+          </a:lnRef>
+          <a:fillRef idx="0">
+            <a:schemeClr val="accent1"/>
+          </a:fillRef>
+          <a:effectRef idx="0">
+            <a:schemeClr val="accent1"/>
+          </a:effectRef>
+          <a:fontRef idx="minor">
+            <a:schemeClr val="tx1"/>
+          </a:fontRef>
+        </p:style>
+      </p:cxnSp>
+      <p:cxnSp>
+        <p:nvCxnSpPr>
+          <p:cNvPr id="55" name="Straight Arrow Connector 54">
+            <a:extLst>
+              <a:ext uri="{FF2B5EF4-FFF2-40B4-BE49-F238E27FC236}">
+                <a16:creationId xmlns:a16="http://schemas.microsoft.com/office/drawing/2014/main" id="{67DA0B2E-3885-3840-B80A-8EFD30152B76}"/>
+              </a:ext>
+            </a:extLst>
+          </p:cNvPr>
+          <p:cNvCxnSpPr>
+            <a:cxnSpLocks/>
+          </p:cNvCxnSpPr>
+          <p:nvPr/>
+        </p:nvCxnSpPr>
+        <p:spPr>
+          <a:xfrm>
+            <a:off x="17597379" y="3169870"/>
+            <a:ext cx="0" cy="447793"/>
+          </a:xfrm>
+          <a:prstGeom prst="straightConnector1">
+            <a:avLst/>
+          </a:prstGeom>
+          <a:ln>
+            <a:solidFill>
+              <a:schemeClr val="tx1"/>
+            </a:solidFill>
+            <a:tailEnd type="triangle"/>
+          </a:ln>
+        </p:spPr>
+        <p:style>
+          <a:lnRef idx="1">
+            <a:schemeClr val="accent1"/>
+          </a:lnRef>
+          <a:fillRef idx="0">
+            <a:schemeClr val="accent1"/>
+          </a:fillRef>
+          <a:effectRef idx="0">
+            <a:schemeClr val="accent1"/>
+          </a:effectRef>
+          <a:fontRef idx="minor">
+            <a:schemeClr val="tx1"/>
+          </a:fontRef>
+        </p:style>
+      </p:cxnSp>
+      <p:cxnSp>
+        <p:nvCxnSpPr>
+          <p:cNvPr id="56" name="Straight Arrow Connector 55">
+            <a:extLst>
+              <a:ext uri="{FF2B5EF4-FFF2-40B4-BE49-F238E27FC236}">
+                <a16:creationId xmlns:a16="http://schemas.microsoft.com/office/drawing/2014/main" id="{8CCA2B6A-89CA-F947-B4C1-3DC707B03094}"/>
+              </a:ext>
+            </a:extLst>
+          </p:cNvPr>
+          <p:cNvCxnSpPr>
+            <a:cxnSpLocks/>
+          </p:cNvCxnSpPr>
+          <p:nvPr/>
+        </p:nvCxnSpPr>
+        <p:spPr>
+          <a:xfrm>
+            <a:off x="17579091" y="4609309"/>
+            <a:ext cx="0" cy="447793"/>
+          </a:xfrm>
+          <a:prstGeom prst="straightConnector1">
+            <a:avLst/>
+          </a:prstGeom>
+          <a:ln>
+            <a:solidFill>
+              <a:schemeClr val="tx1"/>
+            </a:solidFill>
+            <a:tailEnd type="triangle"/>
+          </a:ln>
+        </p:spPr>
+        <p:style>
+          <a:lnRef idx="1">
+            <a:schemeClr val="accent1"/>
+          </a:lnRef>
+          <a:fillRef idx="0">
+            <a:schemeClr val="accent1"/>
+          </a:fillRef>
+          <a:effectRef idx="0">
+            <a:schemeClr val="accent1"/>
+          </a:effectRef>
+          <a:fontRef idx="minor">
+            <a:schemeClr val="tx1"/>
+          </a:fontRef>
+        </p:style>
+      </p:cxnSp>
+      <p:cxnSp>
+        <p:nvCxnSpPr>
+          <p:cNvPr id="57" name="Straight Arrow Connector 56">
+            <a:extLst>
+              <a:ext uri="{FF2B5EF4-FFF2-40B4-BE49-F238E27FC236}">
+                <a16:creationId xmlns:a16="http://schemas.microsoft.com/office/drawing/2014/main" id="{042505FD-B585-CB4E-B35F-301B8EB11289}"/>
+              </a:ext>
+            </a:extLst>
+          </p:cNvPr>
+          <p:cNvCxnSpPr>
+            <a:cxnSpLocks/>
+          </p:cNvCxnSpPr>
+          <p:nvPr/>
+        </p:nvCxnSpPr>
+        <p:spPr>
+          <a:xfrm>
+            <a:off x="8460663" y="12550303"/>
+            <a:ext cx="0" cy="447793"/>
+          </a:xfrm>
+          <a:prstGeom prst="straightConnector1">
+            <a:avLst/>
+          </a:prstGeom>
+          <a:ln>
+            <a:solidFill>
+              <a:schemeClr val="tx1"/>
+            </a:solidFill>
+            <a:tailEnd type="triangle"/>
+          </a:ln>
+        </p:spPr>
+        <p:style>
+          <a:lnRef idx="1">
+            <a:schemeClr val="accent1"/>
+          </a:lnRef>
+          <a:fillRef idx="0">
+            <a:schemeClr val="accent1"/>
+          </a:fillRef>
+          <a:effectRef idx="0">
+            <a:schemeClr val="accent1"/>
+          </a:effectRef>
+          <a:fontRef idx="minor">
+            <a:schemeClr val="tx1"/>
+          </a:fontRef>
+        </p:style>
+      </p:cxnSp>
+      <p:cxnSp>
+        <p:nvCxnSpPr>
+          <p:cNvPr id="58" name="Straight Arrow Connector 57">
+            <a:extLst>
+              <a:ext uri="{FF2B5EF4-FFF2-40B4-BE49-F238E27FC236}">
+                <a16:creationId xmlns:a16="http://schemas.microsoft.com/office/drawing/2014/main" id="{6C8DB00C-870A-BC42-8ED2-66844AAD633A}"/>
+              </a:ext>
+            </a:extLst>
+          </p:cNvPr>
+          <p:cNvCxnSpPr>
+            <a:cxnSpLocks/>
+          </p:cNvCxnSpPr>
+          <p:nvPr/>
+        </p:nvCxnSpPr>
+        <p:spPr>
+          <a:xfrm>
+            <a:off x="7171910" y="6318354"/>
+            <a:ext cx="0" cy="447793"/>
+          </a:xfrm>
+          <a:prstGeom prst="straightConnector1">
+            <a:avLst/>
+          </a:prstGeom>
+          <a:ln>
+            <a:solidFill>
+              <a:schemeClr val="tx1"/>
+            </a:solidFill>
+            <a:tailEnd type="triangle"/>
+          </a:ln>
+        </p:spPr>
+        <p:style>
+          <a:lnRef idx="1">
+            <a:schemeClr val="accent1"/>
+          </a:lnRef>
+          <a:fillRef idx="0">
+            <a:schemeClr val="accent1"/>
+          </a:fillRef>
+          <a:effectRef idx="0">
+            <a:schemeClr val="accent1"/>
+          </a:effectRef>
+          <a:fontRef idx="minor">
+            <a:schemeClr val="tx1"/>
+          </a:fontRef>
+        </p:style>
+      </p:cxnSp>
+      <p:cxnSp>
+        <p:nvCxnSpPr>
+          <p:cNvPr id="59" name="Straight Arrow Connector 58">
+            <a:extLst>
+              <a:ext uri="{FF2B5EF4-FFF2-40B4-BE49-F238E27FC236}">
+                <a16:creationId xmlns:a16="http://schemas.microsoft.com/office/drawing/2014/main" id="{CBA25FCA-0518-6C43-BE79-1A1DD2B9ABB9}"/>
+              </a:ext>
+            </a:extLst>
+          </p:cNvPr>
+          <p:cNvCxnSpPr>
+            <a:cxnSpLocks/>
+          </p:cNvCxnSpPr>
+          <p:nvPr/>
+        </p:nvCxnSpPr>
+        <p:spPr>
+          <a:xfrm>
+            <a:off x="18897849" y="12550303"/>
+            <a:ext cx="0" cy="447793"/>
+          </a:xfrm>
+          <a:prstGeom prst="straightConnector1">
+            <a:avLst/>
+          </a:prstGeom>
+          <a:ln>
+            <a:solidFill>
+              <a:schemeClr val="tx1"/>
+            </a:solidFill>
+            <a:tailEnd type="triangle"/>
+          </a:ln>
+        </p:spPr>
+        <p:style>
+          <a:lnRef idx="1">
+            <a:schemeClr val="accent1"/>
+          </a:lnRef>
+          <a:fillRef idx="0">
+            <a:schemeClr val="accent1"/>
+          </a:fillRef>
+          <a:effectRef idx="0">
+            <a:schemeClr val="accent1"/>
+          </a:effectRef>
+          <a:fontRef idx="minor">
+            <a:schemeClr val="tx1"/>
+          </a:fontRef>
+        </p:style>
+      </p:cxnSp>
+      <p:sp>
+        <p:nvSpPr>
+          <p:cNvPr id="2" name="TextBox 1">
+            <a:extLst>
+              <a:ext uri="{FF2B5EF4-FFF2-40B4-BE49-F238E27FC236}">
+                <a16:creationId xmlns:a16="http://schemas.microsoft.com/office/drawing/2014/main" id="{F9492405-852F-8748-84B8-F43709FA6970}"/>
+              </a:ext>
+            </a:extLst>
+          </p:cNvPr>
+          <p:cNvSpPr txBox="1"/>
+          <p:nvPr/>
+        </p:nvSpPr>
+        <p:spPr>
+          <a:xfrm>
+            <a:off x="258477" y="1676933"/>
+            <a:ext cx="1396536" cy="507960"/>
+          </a:xfrm>
+          <a:prstGeom prst="rect">
+            <a:avLst/>
+          </a:prstGeom>
+          <a:noFill/>
+          <a:ln>
+            <a:solidFill>
+              <a:schemeClr val="tx1"/>
+            </a:solidFill>
+          </a:ln>
+        </p:spPr>
+        <p:txBody>
+          <a:bodyPr wrap="none" rtlCol="0">
+            <a:spAutoFit/>
+          </a:bodyPr>
+          <a:lstStyle/>
+          <a:p>
+            <a:r>
+              <a:rPr lang="en-US" b="1" dirty="0">
+                <a:solidFill>
+                  <a:srgbClr val="FF0000"/>
+                </a:solidFill>
+              </a:rPr>
+              <a:t>REVISED</a:t>
+            </a:r>
+          </a:p>
+        </p:txBody>
+      </p:sp>
+      <p:cxnSp>
+        <p:nvCxnSpPr>
+          <p:cNvPr id="69" name="Straight Arrow Connector 68">
+            <a:extLst>
+              <a:ext uri="{FF2B5EF4-FFF2-40B4-BE49-F238E27FC236}">
+                <a16:creationId xmlns:a16="http://schemas.microsoft.com/office/drawing/2014/main" id="{091CF808-C665-2141-A432-0720A64D3625}"/>
+              </a:ext>
+            </a:extLst>
+          </p:cNvPr>
+          <p:cNvCxnSpPr>
+            <a:cxnSpLocks/>
+          </p:cNvCxnSpPr>
+          <p:nvPr/>
+        </p:nvCxnSpPr>
+        <p:spPr>
+          <a:xfrm>
+            <a:off x="17597379" y="6248452"/>
+            <a:ext cx="0" cy="447793"/>
+          </a:xfrm>
+          <a:prstGeom prst="straightConnector1">
+            <a:avLst/>
+          </a:prstGeom>
+          <a:ln>
+            <a:solidFill>
+              <a:schemeClr val="tx1"/>
+            </a:solidFill>
+            <a:tailEnd type="triangle"/>
+          </a:ln>
+        </p:spPr>
+        <p:style>
+          <a:lnRef idx="1">
+            <a:schemeClr val="accent1"/>
+          </a:lnRef>
+          <a:fillRef idx="0">
+            <a:schemeClr val="accent1"/>
+          </a:fillRef>
+          <a:effectRef idx="0">
+            <a:schemeClr val="accent1"/>
+          </a:effectRef>
+          <a:fontRef idx="minor">
+            <a:schemeClr val="tx1"/>
+          </a:fontRef>
+        </p:style>
+      </p:cxnSp>
+      <p:sp>
+        <p:nvSpPr>
+          <p:cNvPr id="70" name="TextBox 69">
+            <a:extLst>
+              <a:ext uri="{FF2B5EF4-FFF2-40B4-BE49-F238E27FC236}">
+                <a16:creationId xmlns:a16="http://schemas.microsoft.com/office/drawing/2014/main" id="{70AFDFF3-CBC6-F749-ADD0-5662D9A069CA}"/>
+              </a:ext>
+            </a:extLst>
+          </p:cNvPr>
+          <p:cNvSpPr txBox="1"/>
+          <p:nvPr/>
+        </p:nvSpPr>
+        <p:spPr>
+          <a:xfrm>
+            <a:off x="5976550" y="8553009"/>
+            <a:ext cx="2390719" cy="1600438"/>
+          </a:xfrm>
+          <a:prstGeom prst="rect">
+            <a:avLst/>
+          </a:prstGeom>
+          <a:noFill/>
+        </p:spPr>
+        <p:txBody>
+          <a:bodyPr wrap="none" rtlCol="0">
+            <a:spAutoFit/>
+          </a:bodyPr>
+          <a:lstStyle/>
+          <a:p>
+            <a:pPr algn="ctr"/>
+            <a:r>
+              <a:rPr lang="en-US" sz="1400" b="1" dirty="0"/>
+              <a:t>6.v1. Filtered inserts:</a:t>
+            </a:r>
+          </a:p>
+          <a:p>
+            <a:pPr algn="ctr"/>
+            <a:r>
+              <a:rPr lang="en-US" sz="1400" dirty="0"/>
+              <a:t>- Insert length vs contig length</a:t>
+            </a:r>
+          </a:p>
+          <a:p>
+            <a:pPr algn="ctr"/>
+            <a:r>
+              <a:rPr lang="en-US" sz="1400" dirty="0"/>
+              <a:t>- False duplications</a:t>
+            </a:r>
+          </a:p>
+          <a:p>
+            <a:pPr algn="ctr"/>
+            <a:r>
+              <a:rPr lang="en-US" sz="1400" dirty="0"/>
+              <a:t>- Flanked by Ns</a:t>
+            </a:r>
+          </a:p>
+          <a:p>
+            <a:pPr algn="ctr"/>
+            <a:r>
+              <a:rPr lang="en-US" sz="1400" dirty="0"/>
+              <a:t>- Non-target bacteria</a:t>
+            </a:r>
+          </a:p>
+          <a:p>
+            <a:pPr algn="ctr"/>
+            <a:r>
+              <a:rPr lang="en-US" sz="1400" dirty="0"/>
+              <a:t>- Sequence complexity</a:t>
+            </a:r>
+          </a:p>
+          <a:p>
+            <a:pPr algn="ctr"/>
+            <a:r>
+              <a:rPr lang="en-US" sz="1400" i="1" dirty="0">
+                <a:solidFill>
+                  <a:schemeClr val="accent1">
+                    <a:lumMod val="75000"/>
+                  </a:schemeClr>
+                </a:solidFill>
+              </a:rPr>
+              <a:t>Standard thresholds</a:t>
+            </a:r>
+          </a:p>
+        </p:txBody>
+      </p:sp>
+      <p:cxnSp>
+        <p:nvCxnSpPr>
+          <p:cNvPr id="71" name="Straight Arrow Connector 70">
+            <a:extLst>
+              <a:ext uri="{FF2B5EF4-FFF2-40B4-BE49-F238E27FC236}">
+                <a16:creationId xmlns:a16="http://schemas.microsoft.com/office/drawing/2014/main" id="{2399C1A9-3106-A24E-AB7D-1C9C2AF72630}"/>
+              </a:ext>
+            </a:extLst>
+          </p:cNvPr>
+          <p:cNvCxnSpPr>
+            <a:cxnSpLocks/>
+          </p:cNvCxnSpPr>
+          <p:nvPr/>
+        </p:nvCxnSpPr>
+        <p:spPr>
+          <a:xfrm>
+            <a:off x="7171910" y="8100518"/>
+            <a:ext cx="0" cy="447793"/>
+          </a:xfrm>
+          <a:prstGeom prst="straightConnector1">
+            <a:avLst/>
+          </a:prstGeom>
+          <a:ln>
+            <a:solidFill>
+              <a:schemeClr val="tx1"/>
+            </a:solidFill>
+            <a:tailEnd type="triangle"/>
+          </a:ln>
+        </p:spPr>
+        <p:style>
+          <a:lnRef idx="1">
+            <a:schemeClr val="accent1"/>
+          </a:lnRef>
+          <a:fillRef idx="0">
+            <a:schemeClr val="accent1"/>
+          </a:fillRef>
+          <a:effectRef idx="0">
+            <a:schemeClr val="accent1"/>
+          </a:effectRef>
+          <a:fontRef idx="minor">
+            <a:schemeClr val="tx1"/>
+          </a:fontRef>
+        </p:style>
+      </p:cxnSp>
+      <p:sp>
+        <p:nvSpPr>
+          <p:cNvPr id="72" name="TextBox 71">
+            <a:extLst>
+              <a:ext uri="{FF2B5EF4-FFF2-40B4-BE49-F238E27FC236}">
+                <a16:creationId xmlns:a16="http://schemas.microsoft.com/office/drawing/2014/main" id="{51AD45CF-A5BA-1043-8FE6-8D9278B03DAE}"/>
+              </a:ext>
+            </a:extLst>
+          </p:cNvPr>
+          <p:cNvSpPr txBox="1"/>
+          <p:nvPr/>
+        </p:nvSpPr>
+        <p:spPr>
+          <a:xfrm>
+            <a:off x="16513152" y="8557707"/>
+            <a:ext cx="2390719" cy="1600438"/>
+          </a:xfrm>
+          <a:prstGeom prst="rect">
+            <a:avLst/>
+          </a:prstGeom>
+          <a:noFill/>
+        </p:spPr>
+        <p:txBody>
+          <a:bodyPr wrap="none" rtlCol="0">
+            <a:spAutoFit/>
+          </a:bodyPr>
+          <a:lstStyle/>
+          <a:p>
+            <a:pPr algn="ctr"/>
+            <a:r>
+              <a:rPr lang="en-US" sz="1400" b="1" dirty="0"/>
+              <a:t>6.v2. Filtered inserts:</a:t>
+            </a:r>
+          </a:p>
+          <a:p>
+            <a:pPr algn="ctr"/>
+            <a:r>
+              <a:rPr lang="en-US" sz="1400" dirty="0"/>
+              <a:t>- Insert length vs contig length</a:t>
+            </a:r>
+          </a:p>
+          <a:p>
+            <a:pPr algn="ctr"/>
+            <a:r>
+              <a:rPr lang="en-US" sz="1400" dirty="0"/>
+              <a:t>- False duplications</a:t>
+            </a:r>
+          </a:p>
+          <a:p>
+            <a:pPr algn="ctr"/>
+            <a:r>
+              <a:rPr lang="en-US" sz="1400" dirty="0"/>
+              <a:t>- Flanked by Ns</a:t>
+            </a:r>
+          </a:p>
+          <a:p>
+            <a:pPr algn="ctr"/>
+            <a:r>
+              <a:rPr lang="en-US" sz="1400" dirty="0"/>
+              <a:t>- Non-target bacteria</a:t>
+            </a:r>
+          </a:p>
+          <a:p>
+            <a:pPr algn="ctr"/>
+            <a:r>
+              <a:rPr lang="en-US" sz="1400" dirty="0"/>
+              <a:t>- Sequence complexity</a:t>
+            </a:r>
+          </a:p>
+          <a:p>
+            <a:pPr algn="ctr"/>
+            <a:r>
+              <a:rPr lang="en-US" sz="1400" i="1" dirty="0">
+                <a:solidFill>
+                  <a:schemeClr val="accent2">
+                    <a:lumMod val="75000"/>
+                  </a:schemeClr>
+                </a:solidFill>
+              </a:rPr>
+              <a:t>Alternate thresholds</a:t>
+            </a:r>
+          </a:p>
+        </p:txBody>
+      </p:sp>
+      <p:cxnSp>
+        <p:nvCxnSpPr>
+          <p:cNvPr id="73" name="Straight Arrow Connector 72">
+            <a:extLst>
+              <a:ext uri="{FF2B5EF4-FFF2-40B4-BE49-F238E27FC236}">
+                <a16:creationId xmlns:a16="http://schemas.microsoft.com/office/drawing/2014/main" id="{12527E14-DBE2-924F-B11E-75DAF8426A30}"/>
+              </a:ext>
+            </a:extLst>
+          </p:cNvPr>
+          <p:cNvCxnSpPr>
+            <a:cxnSpLocks/>
+          </p:cNvCxnSpPr>
+          <p:nvPr/>
+        </p:nvCxnSpPr>
+        <p:spPr>
+          <a:xfrm>
+            <a:off x="17708512" y="8105216"/>
+            <a:ext cx="0" cy="447793"/>
+          </a:xfrm>
+          <a:prstGeom prst="straightConnector1">
+            <a:avLst/>
+          </a:prstGeom>
+          <a:ln>
+            <a:solidFill>
+              <a:schemeClr val="tx1"/>
+            </a:solidFill>
+            <a:tailEnd type="triangle"/>
+          </a:ln>
+        </p:spPr>
+        <p:style>
+          <a:lnRef idx="1">
+            <a:schemeClr val="accent1"/>
+          </a:lnRef>
+          <a:fillRef idx="0">
+            <a:schemeClr val="accent1"/>
+          </a:fillRef>
+          <a:effectRef idx="0">
+            <a:schemeClr val="accent1"/>
+          </a:effectRef>
+          <a:fontRef idx="minor">
+            <a:schemeClr val="tx1"/>
+          </a:fontRef>
+        </p:style>
+      </p:cxnSp>
+    </p:spTree>
+    <p:extLst>
+      <p:ext uri="{BB962C8B-B14F-4D97-AF65-F5344CB8AC3E}">
+        <p14:creationId xmlns:p14="http://schemas.microsoft.com/office/powerpoint/2010/main" val="2238193808"/>
+      </p:ext>
+    </p:extLst>
+  </p:cSld>
+  <p:clrMapOvr>
+    <a:masterClrMapping/>
+  </p:clrMapOvr>
+</p:sld>
+</file>
+
 <file path=ppt/theme/theme1.xml><?xml version="1.0" encoding="utf-8"?>
 <a:theme xmlns:a="http://schemas.openxmlformats.org/drawingml/2006/main" name="Office Theme">
   <a:themeElements>

--- a/HGT_filtering-pipeline.pptx
+++ b/HGT_filtering-pipeline.pptx
@@ -5,8 +5,7 @@
     <p:sldMasterId id="2147483732" r:id="rId1"/>
   </p:sldMasterIdLst>
   <p:sldIdLst>
-    <p:sldId id="257" r:id="rId2"/>
-    <p:sldId id="258" r:id="rId3"/>
+    <p:sldId id="258" r:id="rId2"/>
   </p:sldIdLst>
   <p:sldSz cx="25199975" cy="14712950"/>
   <p:notesSz cx="6858000" cy="9144000"/>
@@ -244,7 +243,7 @@
           <a:p>
             <a:fld id="{9386A93F-6D44-2341-95C7-2E010A24378A}" type="datetimeFigureOut">
               <a:rPr lang="en-US" smtClean="0"/>
-              <a:t>4/26/25</a:t>
+              <a:t>5/1/25</a:t>
             </a:fld>
             <a:endParaRPr lang="en-US"/>
           </a:p>
@@ -414,7 +413,7 @@
           <a:p>
             <a:fld id="{9386A93F-6D44-2341-95C7-2E010A24378A}" type="datetimeFigureOut">
               <a:rPr lang="en-US" smtClean="0"/>
-              <a:t>4/26/25</a:t>
+              <a:t>5/1/25</a:t>
             </a:fld>
             <a:endParaRPr lang="en-US"/>
           </a:p>
@@ -594,7 +593,7 @@
           <a:p>
             <a:fld id="{9386A93F-6D44-2341-95C7-2E010A24378A}" type="datetimeFigureOut">
               <a:rPr lang="en-US" smtClean="0"/>
-              <a:t>4/26/25</a:t>
+              <a:t>5/1/25</a:t>
             </a:fld>
             <a:endParaRPr lang="en-US"/>
           </a:p>
@@ -764,7 +763,7 @@
           <a:p>
             <a:fld id="{9386A93F-6D44-2341-95C7-2E010A24378A}" type="datetimeFigureOut">
               <a:rPr lang="en-US" smtClean="0"/>
-              <a:t>4/26/25</a:t>
+              <a:t>5/1/25</a:t>
             </a:fld>
             <a:endParaRPr lang="en-US"/>
           </a:p>
@@ -1010,7 +1009,7 @@
           <a:p>
             <a:fld id="{9386A93F-6D44-2341-95C7-2E010A24378A}" type="datetimeFigureOut">
               <a:rPr lang="en-US" smtClean="0"/>
-              <a:t>4/26/25</a:t>
+              <a:t>5/1/25</a:t>
             </a:fld>
             <a:endParaRPr lang="en-US"/>
           </a:p>
@@ -1242,7 +1241,7 @@
           <a:p>
             <a:fld id="{9386A93F-6D44-2341-95C7-2E010A24378A}" type="datetimeFigureOut">
               <a:rPr lang="en-US" smtClean="0"/>
-              <a:t>4/26/25</a:t>
+              <a:t>5/1/25</a:t>
             </a:fld>
             <a:endParaRPr lang="en-US"/>
           </a:p>
@@ -1609,7 +1608,7 @@
           <a:p>
             <a:fld id="{9386A93F-6D44-2341-95C7-2E010A24378A}" type="datetimeFigureOut">
               <a:rPr lang="en-US" smtClean="0"/>
-              <a:t>4/26/25</a:t>
+              <a:t>5/1/25</a:t>
             </a:fld>
             <a:endParaRPr lang="en-US"/>
           </a:p>
@@ -1727,7 +1726,7 @@
           <a:p>
             <a:fld id="{9386A93F-6D44-2341-95C7-2E010A24378A}" type="datetimeFigureOut">
               <a:rPr lang="en-US" smtClean="0"/>
-              <a:t>4/26/25</a:t>
+              <a:t>5/1/25</a:t>
             </a:fld>
             <a:endParaRPr lang="en-US"/>
           </a:p>
@@ -1822,7 +1821,7 @@
           <a:p>
             <a:fld id="{9386A93F-6D44-2341-95C7-2E010A24378A}" type="datetimeFigureOut">
               <a:rPr lang="en-US" smtClean="0"/>
-              <a:t>4/26/25</a:t>
+              <a:t>5/1/25</a:t>
             </a:fld>
             <a:endParaRPr lang="en-US"/>
           </a:p>
@@ -2099,7 +2098,7 @@
           <a:p>
             <a:fld id="{9386A93F-6D44-2341-95C7-2E010A24378A}" type="datetimeFigureOut">
               <a:rPr lang="en-US" smtClean="0"/>
-              <a:t>4/26/25</a:t>
+              <a:t>5/1/25</a:t>
             </a:fld>
             <a:endParaRPr lang="en-US"/>
           </a:p>
@@ -2356,7 +2355,7 @@
           <a:p>
             <a:fld id="{9386A93F-6D44-2341-95C7-2E010A24378A}" type="datetimeFigureOut">
               <a:rPr lang="en-US" smtClean="0"/>
-              <a:t>4/26/25</a:t>
+              <a:t>5/1/25</a:t>
             </a:fld>
             <a:endParaRPr lang="en-US"/>
           </a:p>
@@ -2569,7 +2568,7 @@
           <a:p>
             <a:fld id="{9386A93F-6D44-2341-95C7-2E010A24378A}" type="datetimeFigureOut">
               <a:rPr lang="en-US" smtClean="0"/>
-              <a:t>4/26/25</a:t>
+              <a:t>5/1/25</a:t>
             </a:fld>
             <a:endParaRPr lang="en-US"/>
           </a:p>
@@ -2988,7 +2987,7 @@
         </p:nvSpPr>
         <p:spPr>
           <a:xfrm>
-            <a:off x="11808013" y="418076"/>
+            <a:off x="11808013" y="225572"/>
             <a:ext cx="1091966" cy="400110"/>
           </a:xfrm>
           <a:prstGeom prst="rect">
@@ -3028,7 +3027,7 @@
         </p:nvSpPr>
         <p:spPr>
           <a:xfrm>
-            <a:off x="6317033" y="1661673"/>
+            <a:off x="6317033" y="1469169"/>
             <a:ext cx="1880579" cy="523220"/>
           </a:xfrm>
           <a:prstGeom prst="rect">
@@ -3077,7 +3076,7 @@
         </p:nvSpPr>
         <p:spPr>
           <a:xfrm>
-            <a:off x="16753247" y="1661673"/>
+            <a:off x="16753247" y="1469169"/>
             <a:ext cx="1880579" cy="523220"/>
           </a:xfrm>
           <a:prstGeom prst="rect">
@@ -3126,7 +3125,7 @@
         </p:nvSpPr>
         <p:spPr>
           <a:xfrm>
-            <a:off x="6061962" y="2666126"/>
+            <a:off x="6061962" y="2473622"/>
             <a:ext cx="2390718" cy="738664"/>
           </a:xfrm>
           <a:prstGeom prst="rect">
@@ -3182,7 +3181,7 @@
         </p:nvSpPr>
         <p:spPr>
           <a:xfrm>
-            <a:off x="16429633" y="2666126"/>
+            <a:off x="16429633" y="2473622"/>
             <a:ext cx="2390718" cy="738664"/>
           </a:xfrm>
           <a:prstGeom prst="rect">
@@ -3282,7 +3281,7 @@
         </p:nvSpPr>
         <p:spPr>
           <a:xfrm>
-            <a:off x="6061961" y="3979571"/>
+            <a:off x="6061961" y="3618626"/>
             <a:ext cx="2390719" cy="954107"/>
           </a:xfrm>
           <a:prstGeom prst="rect">
@@ -3345,7 +3344,7 @@
         </p:nvSpPr>
         <p:spPr>
           <a:xfrm>
-            <a:off x="16429631" y="3979571"/>
+            <a:off x="16429631" y="3618626"/>
             <a:ext cx="2390719" cy="954107"/>
           </a:xfrm>
           <a:prstGeom prst="rect">
@@ -3408,7 +3407,7 @@
         </p:nvSpPr>
         <p:spPr>
           <a:xfrm>
-            <a:off x="6034349" y="5536098"/>
+            <a:off x="6034349" y="5104790"/>
             <a:ext cx="2390719" cy="1169551"/>
           </a:xfrm>
           <a:prstGeom prst="rect">
@@ -3446,7 +3445,7 @@
             <a:pPr algn="ctr"/>
             <a:r>
               <a:rPr lang="en-US" sz="1400" dirty="0"/>
-              <a:t>- Flanked by Ns</a:t>
+              <a:t>- Sequence complexity</a:t>
             </a:r>
           </a:p>
           <a:p>
@@ -3478,7 +3477,7 @@
         </p:nvSpPr>
         <p:spPr>
           <a:xfrm>
-            <a:off x="16402020" y="5536098"/>
+            <a:off x="16402020" y="5151090"/>
             <a:ext cx="2390719" cy="1169551"/>
           </a:xfrm>
           <a:prstGeom prst="rect">
@@ -3516,7 +3515,7 @@
             <a:pPr algn="ctr"/>
             <a:r>
               <a:rPr lang="en-US" sz="1400" dirty="0"/>
-              <a:t>- Flanked by Ns</a:t>
+              <a:t>- Sequence complexity</a:t>
             </a:r>
           </a:p>
           <a:p>
@@ -3548,7 +3547,7 @@
         </p:nvSpPr>
         <p:spPr>
           <a:xfrm>
-            <a:off x="3351167" y="7492088"/>
+            <a:off x="5976550" y="8658063"/>
             <a:ext cx="2390719" cy="1600438"/>
           </a:xfrm>
           <a:prstGeom prst="rect">
@@ -3565,7 +3564,7 @@
             <a:pPr algn="ctr"/>
             <a:r>
               <a:rPr lang="en-US" sz="1400" b="1" dirty="0"/>
-              <a:t>5.v1. Filtered inserts:</a:t>
+              <a:t>6.v1. Filtered inserts:</a:t>
             </a:r>
           </a:p>
           <a:p>
@@ -3580,6 +3579,13 @@
             <a:r>
               <a:rPr lang="en-US" sz="1400" dirty="0"/>
               <a:t>- False duplications</a:t>
+            </a:r>
+            <a:br>
+              <a:rPr lang="en-US" sz="1400" dirty="0"/>
+            </a:br>
+            <a:r>
+              <a:rPr lang="en-US" sz="1400" dirty="0"/>
+              <a:t>- Sequence complexity</a:t>
             </a:r>
           </a:p>
           <a:p>
@@ -3607,39 +3613,6 @@
                 </a:solidFill>
               </a:rPr>
               <a:t>Standard thresholds</a:t>
-            </a:r>
-          </a:p>
-          <a:p>
-            <a:pPr algn="ctr"/>
-            <a:r>
-              <a:rPr lang="en-US" sz="1400" i="1" dirty="0">
-                <a:solidFill>
-                  <a:schemeClr val="accent6">
-                    <a:lumMod val="75000"/>
-                  </a:schemeClr>
-                </a:solidFill>
-              </a:rPr>
-              <a:t>Similar </a:t>
-            </a:r>
-            <a:r>
-              <a:rPr lang="en-US" sz="1400" i="1" dirty="0" err="1">
-                <a:solidFill>
-                  <a:schemeClr val="accent6">
-                    <a:lumMod val="75000"/>
-                  </a:schemeClr>
-                </a:solidFill>
-              </a:rPr>
-              <a:t>Blatta</a:t>
-            </a:r>
-            <a:r>
-              <a:rPr lang="en-US" sz="1400" i="1" dirty="0">
-                <a:solidFill>
-                  <a:schemeClr val="accent6">
-                    <a:lumMod val="75000"/>
-                  </a:schemeClr>
-                </a:solidFill>
-              </a:rPr>
-              <a:t> vs bac BLAST</a:t>
             </a:r>
           </a:p>
         </p:txBody>
@@ -3658,7 +3631,7 @@
         </p:nvSpPr>
         <p:spPr>
           <a:xfrm>
-            <a:off x="13719467" y="7492087"/>
+            <a:off x="16475343" y="8759491"/>
             <a:ext cx="2390719" cy="1600438"/>
           </a:xfrm>
           <a:prstGeom prst="rect">
@@ -3675,7 +3648,7 @@
             <a:pPr algn="ctr"/>
             <a:r>
               <a:rPr lang="en-US" sz="1400" b="1" dirty="0"/>
-              <a:t>5.v3. Filtered inserts:</a:t>
+              <a:t>6.v2. Filtered inserts:</a:t>
             </a:r>
           </a:p>
           <a:p>
@@ -3690,6 +3663,13 @@
             <a:r>
               <a:rPr lang="en-US" sz="1400" dirty="0"/>
               <a:t>- False duplications</a:t>
+            </a:r>
+            <a:br>
+              <a:rPr lang="en-US" sz="1400" dirty="0"/>
+            </a:br>
+            <a:r>
+              <a:rPr lang="en-US" sz="1400" dirty="0"/>
+              <a:t>- Sequence complexity</a:t>
             </a:r>
           </a:p>
           <a:p>
@@ -3717,259 +3697,6 @@
                 </a:solidFill>
               </a:rPr>
               <a:t>Alternate thresholds</a:t>
-            </a:r>
-          </a:p>
-          <a:p>
-            <a:pPr algn="ctr"/>
-            <a:r>
-              <a:rPr lang="en-US" sz="1400" i="1" dirty="0">
-                <a:solidFill>
-                  <a:schemeClr val="accent6">
-                    <a:lumMod val="75000"/>
-                  </a:schemeClr>
-                </a:solidFill>
-              </a:rPr>
-              <a:t>Similar </a:t>
-            </a:r>
-            <a:r>
-              <a:rPr lang="en-US" sz="1400" i="1" dirty="0" err="1">
-                <a:solidFill>
-                  <a:schemeClr val="accent6">
-                    <a:lumMod val="75000"/>
-                  </a:schemeClr>
-                </a:solidFill>
-              </a:rPr>
-              <a:t>Blatta</a:t>
-            </a:r>
-            <a:r>
-              <a:rPr lang="en-US" sz="1400" i="1" dirty="0">
-                <a:solidFill>
-                  <a:schemeClr val="accent6">
-                    <a:lumMod val="75000"/>
-                  </a:schemeClr>
-                </a:solidFill>
-              </a:rPr>
-              <a:t> vs bac BLAST</a:t>
-            </a:r>
-          </a:p>
-        </p:txBody>
-      </p:sp>
-      <p:sp>
-        <p:nvSpPr>
-          <p:cNvPr id="18" name="TextBox 17">
-            <a:extLst>
-              <a:ext uri="{FF2B5EF4-FFF2-40B4-BE49-F238E27FC236}">
-                <a16:creationId xmlns:a16="http://schemas.microsoft.com/office/drawing/2014/main" id="{05599CAE-ADFC-6845-AFC5-1C194EAFA687}"/>
-              </a:ext>
-            </a:extLst>
-          </p:cNvPr>
-          <p:cNvSpPr txBox="1"/>
-          <p:nvPr/>
-        </p:nvSpPr>
-        <p:spPr>
-          <a:xfrm>
-            <a:off x="8714629" y="7492087"/>
-            <a:ext cx="2390719" cy="1600438"/>
-          </a:xfrm>
-          <a:prstGeom prst="rect">
-            <a:avLst/>
-          </a:prstGeom>
-          <a:noFill/>
-        </p:spPr>
-        <p:txBody>
-          <a:bodyPr wrap="none" rtlCol="0">
-            <a:spAutoFit/>
-          </a:bodyPr>
-          <a:lstStyle/>
-          <a:p>
-            <a:pPr algn="ctr"/>
-            <a:r>
-              <a:rPr lang="en-US" sz="1400" b="1" dirty="0"/>
-              <a:t>5.v2. Filtered inserts:</a:t>
-            </a:r>
-          </a:p>
-          <a:p>
-            <a:pPr algn="ctr"/>
-            <a:r>
-              <a:rPr lang="en-US" sz="1400" dirty="0"/>
-              <a:t>- Insert length vs contig length</a:t>
-            </a:r>
-          </a:p>
-          <a:p>
-            <a:pPr algn="ctr"/>
-            <a:r>
-              <a:rPr lang="en-US" sz="1400" dirty="0"/>
-              <a:t>- False duplications</a:t>
-            </a:r>
-          </a:p>
-          <a:p>
-            <a:pPr algn="ctr"/>
-            <a:r>
-              <a:rPr lang="en-US" sz="1400" dirty="0"/>
-              <a:t>- Flanked by Ns</a:t>
-            </a:r>
-          </a:p>
-          <a:p>
-            <a:pPr algn="ctr"/>
-            <a:r>
-              <a:rPr lang="en-US" sz="1400" dirty="0"/>
-              <a:t>- Non-target bacteria</a:t>
-            </a:r>
-          </a:p>
-          <a:p>
-            <a:pPr algn="ctr"/>
-            <a:r>
-              <a:rPr lang="en-US" sz="1400" i="1" dirty="0">
-                <a:solidFill>
-                  <a:schemeClr val="accent1">
-                    <a:lumMod val="75000"/>
-                  </a:schemeClr>
-                </a:solidFill>
-              </a:rPr>
-              <a:t>Standard thresholds</a:t>
-            </a:r>
-          </a:p>
-          <a:p>
-            <a:pPr algn="ctr"/>
-            <a:r>
-              <a:rPr lang="en-US" sz="1400" i="1" dirty="0">
-                <a:solidFill>
-                  <a:schemeClr val="accent4">
-                    <a:lumMod val="75000"/>
-                  </a:schemeClr>
-                </a:solidFill>
-              </a:rPr>
-              <a:t>Higher </a:t>
-            </a:r>
-            <a:r>
-              <a:rPr lang="en-US" sz="1400" i="1" dirty="0" err="1">
-                <a:solidFill>
-                  <a:schemeClr val="accent4">
-                    <a:lumMod val="75000"/>
-                  </a:schemeClr>
-                </a:solidFill>
-              </a:rPr>
-              <a:t>Blatta</a:t>
-            </a:r>
-            <a:r>
-              <a:rPr lang="en-US" sz="1400" i="1" dirty="0">
-                <a:solidFill>
-                  <a:schemeClr val="accent4">
-                    <a:lumMod val="75000"/>
-                  </a:schemeClr>
-                </a:solidFill>
-              </a:rPr>
-              <a:t> vs bac BLAST</a:t>
-            </a:r>
-          </a:p>
-        </p:txBody>
-      </p:sp>
-      <p:sp>
-        <p:nvSpPr>
-          <p:cNvPr id="19" name="TextBox 18">
-            <a:extLst>
-              <a:ext uri="{FF2B5EF4-FFF2-40B4-BE49-F238E27FC236}">
-                <a16:creationId xmlns:a16="http://schemas.microsoft.com/office/drawing/2014/main" id="{82FC6E06-CF48-7C4E-B0EE-0128302E3FB2}"/>
-              </a:ext>
-            </a:extLst>
-          </p:cNvPr>
-          <p:cNvSpPr txBox="1"/>
-          <p:nvPr/>
-        </p:nvSpPr>
-        <p:spPr>
-          <a:xfrm>
-            <a:off x="18944585" y="7492087"/>
-            <a:ext cx="2390719" cy="1600438"/>
-          </a:xfrm>
-          <a:prstGeom prst="rect">
-            <a:avLst/>
-          </a:prstGeom>
-          <a:noFill/>
-        </p:spPr>
-        <p:txBody>
-          <a:bodyPr wrap="none" rtlCol="0">
-            <a:spAutoFit/>
-          </a:bodyPr>
-          <a:lstStyle/>
-          <a:p>
-            <a:pPr algn="ctr"/>
-            <a:r>
-              <a:rPr lang="en-US" sz="1400" b="1" dirty="0"/>
-              <a:t>5.v4. Filtered inserts:</a:t>
-            </a:r>
-          </a:p>
-          <a:p>
-            <a:pPr algn="ctr"/>
-            <a:r>
-              <a:rPr lang="en-US" sz="1400" dirty="0"/>
-              <a:t>- Insert length vs contig length</a:t>
-            </a:r>
-          </a:p>
-          <a:p>
-            <a:pPr algn="ctr"/>
-            <a:r>
-              <a:rPr lang="en-US" sz="1400" dirty="0"/>
-              <a:t>- False duplications</a:t>
-            </a:r>
-          </a:p>
-          <a:p>
-            <a:pPr algn="ctr"/>
-            <a:r>
-              <a:rPr lang="en-US" sz="1400" dirty="0"/>
-              <a:t>- Flanked by Ns</a:t>
-            </a:r>
-          </a:p>
-          <a:p>
-            <a:pPr algn="ctr"/>
-            <a:r>
-              <a:rPr lang="en-US" sz="1400" dirty="0"/>
-              <a:t>- Non-target bacteria</a:t>
-            </a:r>
-          </a:p>
-          <a:p>
-            <a:pPr algn="ctr"/>
-            <a:r>
-              <a:rPr lang="en-US" sz="1400" i="1" dirty="0">
-                <a:solidFill>
-                  <a:schemeClr val="accent2">
-                    <a:lumMod val="75000"/>
-                  </a:schemeClr>
-                </a:solidFill>
-              </a:rPr>
-              <a:t>Alternate thresholds</a:t>
-            </a:r>
-          </a:p>
-          <a:p>
-            <a:pPr algn="ctr"/>
-            <a:r>
-              <a:rPr lang="en-US" sz="1400" i="1" dirty="0">
-                <a:solidFill>
-                  <a:schemeClr val="accent4">
-                    <a:lumMod val="75000"/>
-                  </a:schemeClr>
-                </a:solidFill>
-              </a:rPr>
-              <a:t>Higher </a:t>
-            </a:r>
-            <a:r>
-              <a:rPr lang="en-US" sz="1400" i="1" dirty="0" err="1">
-                <a:solidFill>
-                  <a:schemeClr val="accent4">
-                    <a:lumMod val="75000"/>
-                  </a:schemeClr>
-                </a:solidFill>
-              </a:rPr>
-              <a:t>Blatta</a:t>
-            </a:r>
-            <a:r>
-              <a:rPr lang="en-US" sz="1400" i="1" dirty="0">
-                <a:solidFill>
-                  <a:schemeClr val="accent4">
-                    <a:lumMod val="75000"/>
-                  </a:schemeClr>
-                </a:solidFill>
-              </a:rPr>
-              <a:t> vs bac BLAST</a:t>
             </a:r>
           </a:p>
         </p:txBody>
@@ -3988,8 +3715,8 @@
         </p:nvSpPr>
         <p:spPr>
           <a:xfrm>
-            <a:off x="4621204" y="9963638"/>
-            <a:ext cx="2390719" cy="1600438"/>
+            <a:off x="7284800" y="11014490"/>
+            <a:ext cx="2298321" cy="1600438"/>
           </a:xfrm>
           <a:prstGeom prst="rect">
             <a:avLst/>
@@ -4005,14 +3732,14 @@
             <a:pPr algn="ctr"/>
             <a:r>
               <a:rPr lang="en-US" sz="1400" b="1" dirty="0"/>
-              <a:t>6.v2. Unique filtered inserts:</a:t>
-            </a:r>
-          </a:p>
-          <a:p>
-            <a:pPr algn="ctr"/>
-            <a:r>
-              <a:rPr lang="en-US" sz="1400" dirty="0"/>
-              <a:t>- Insert length vs contig length</a:t>
+              <a:t>7.v2. Unique filtered inserts:</a:t>
+            </a:r>
+          </a:p>
+          <a:p>
+            <a:pPr algn="ctr"/>
+            <a:r>
+              <a:rPr lang="en-US" sz="1400" dirty="0"/>
+              <a:t>Insert length vs contig length</a:t>
             </a:r>
           </a:p>
           <a:p>
@@ -4020,6 +3747,13 @@
             <a:r>
               <a:rPr lang="en-US" sz="1400" dirty="0"/>
               <a:t>- False duplications</a:t>
+            </a:r>
+            <a:br>
+              <a:rPr lang="en-US" sz="1400" dirty="0"/>
+            </a:br>
+            <a:r>
+              <a:rPr lang="en-US" sz="1400" dirty="0"/>
+              <a:t>- Sequence complexity</a:t>
             </a:r>
           </a:p>
           <a:p>
@@ -4047,699 +3781,6 @@
                 </a:solidFill>
               </a:rPr>
               <a:t>Standard thresholds</a:t>
-            </a:r>
-          </a:p>
-          <a:p>
-            <a:pPr algn="ctr"/>
-            <a:r>
-              <a:rPr lang="en-US" sz="1400" i="1" dirty="0">
-                <a:solidFill>
-                  <a:schemeClr val="accent6">
-                    <a:lumMod val="75000"/>
-                  </a:schemeClr>
-                </a:solidFill>
-              </a:rPr>
-              <a:t>Similar </a:t>
-            </a:r>
-            <a:r>
-              <a:rPr lang="en-US" sz="1400" i="1" dirty="0" err="1">
-                <a:solidFill>
-                  <a:schemeClr val="accent6">
-                    <a:lumMod val="75000"/>
-                  </a:schemeClr>
-                </a:solidFill>
-              </a:rPr>
-              <a:t>Blatta</a:t>
-            </a:r>
-            <a:r>
-              <a:rPr lang="en-US" sz="1400" i="1" dirty="0">
-                <a:solidFill>
-                  <a:schemeClr val="accent6">
-                    <a:lumMod val="75000"/>
-                  </a:schemeClr>
-                </a:solidFill>
-              </a:rPr>
-              <a:t> vs bac BLAST</a:t>
-            </a:r>
-          </a:p>
-        </p:txBody>
-      </p:sp>
-      <p:sp>
-        <p:nvSpPr>
-          <p:cNvPr id="21" name="TextBox 20">
-            <a:extLst>
-              <a:ext uri="{FF2B5EF4-FFF2-40B4-BE49-F238E27FC236}">
-                <a16:creationId xmlns:a16="http://schemas.microsoft.com/office/drawing/2014/main" id="{17CF1A8D-F2E4-8949-8F56-5FE413556E18}"/>
-              </a:ext>
-            </a:extLst>
-          </p:cNvPr>
-          <p:cNvSpPr txBox="1"/>
-          <p:nvPr/>
-        </p:nvSpPr>
-        <p:spPr>
-          <a:xfrm>
-            <a:off x="6964155" y="9963638"/>
-            <a:ext cx="2921827" cy="1600438"/>
-          </a:xfrm>
-          <a:prstGeom prst="rect">
-            <a:avLst/>
-          </a:prstGeom>
-          <a:noFill/>
-        </p:spPr>
-        <p:txBody>
-          <a:bodyPr wrap="none" rtlCol="0">
-            <a:spAutoFit/>
-          </a:bodyPr>
-          <a:lstStyle/>
-          <a:p>
-            <a:pPr algn="ctr"/>
-            <a:r>
-              <a:rPr lang="en-US" sz="1400" b="1" dirty="0"/>
-              <a:t>6.v3. Filtered inserts with duplicates:</a:t>
-            </a:r>
-          </a:p>
-          <a:p>
-            <a:pPr algn="ctr"/>
-            <a:r>
-              <a:rPr lang="en-US" sz="1400" dirty="0"/>
-              <a:t>- Insert length vs contig length</a:t>
-            </a:r>
-          </a:p>
-          <a:p>
-            <a:pPr algn="ctr"/>
-            <a:r>
-              <a:rPr lang="en-US" sz="1400" dirty="0"/>
-              <a:t>- False duplications</a:t>
-            </a:r>
-          </a:p>
-          <a:p>
-            <a:pPr algn="ctr"/>
-            <a:r>
-              <a:rPr lang="en-US" sz="1400" dirty="0"/>
-              <a:t>- Flanked by Ns</a:t>
-            </a:r>
-          </a:p>
-          <a:p>
-            <a:pPr algn="ctr"/>
-            <a:r>
-              <a:rPr lang="en-US" sz="1400" dirty="0"/>
-              <a:t>- Non-target bacteria</a:t>
-            </a:r>
-          </a:p>
-          <a:p>
-            <a:pPr algn="ctr"/>
-            <a:r>
-              <a:rPr lang="en-US" sz="1400" i="1" dirty="0">
-                <a:solidFill>
-                  <a:schemeClr val="accent1">
-                    <a:lumMod val="75000"/>
-                  </a:schemeClr>
-                </a:solidFill>
-              </a:rPr>
-              <a:t>Standard thresholds</a:t>
-            </a:r>
-          </a:p>
-          <a:p>
-            <a:pPr algn="ctr"/>
-            <a:r>
-              <a:rPr lang="en-US" sz="1400" i="1" dirty="0">
-                <a:solidFill>
-                  <a:schemeClr val="accent4">
-                    <a:lumMod val="75000"/>
-                  </a:schemeClr>
-                </a:solidFill>
-              </a:rPr>
-              <a:t>Higher </a:t>
-            </a:r>
-            <a:r>
-              <a:rPr lang="en-US" sz="1400" i="1" dirty="0" err="1">
-                <a:solidFill>
-                  <a:schemeClr val="accent4">
-                    <a:lumMod val="75000"/>
-                  </a:schemeClr>
-                </a:solidFill>
-              </a:rPr>
-              <a:t>Blatta</a:t>
-            </a:r>
-            <a:r>
-              <a:rPr lang="en-US" sz="1400" i="1" dirty="0">
-                <a:solidFill>
-                  <a:schemeClr val="accent4">
-                    <a:lumMod val="75000"/>
-                  </a:schemeClr>
-                </a:solidFill>
-              </a:rPr>
-              <a:t> vs bac BLAST</a:t>
-            </a:r>
-          </a:p>
-        </p:txBody>
-      </p:sp>
-      <p:sp>
-        <p:nvSpPr>
-          <p:cNvPr id="22" name="TextBox 21">
-            <a:extLst>
-              <a:ext uri="{FF2B5EF4-FFF2-40B4-BE49-F238E27FC236}">
-                <a16:creationId xmlns:a16="http://schemas.microsoft.com/office/drawing/2014/main" id="{0E65CE1A-9B65-7246-8EB7-71B05551D801}"/>
-              </a:ext>
-            </a:extLst>
-          </p:cNvPr>
-          <p:cNvSpPr txBox="1"/>
-          <p:nvPr/>
-        </p:nvSpPr>
-        <p:spPr>
-          <a:xfrm>
-            <a:off x="9888196" y="9963638"/>
-            <a:ext cx="2390719" cy="1600438"/>
-          </a:xfrm>
-          <a:prstGeom prst="rect">
-            <a:avLst/>
-          </a:prstGeom>
-          <a:noFill/>
-        </p:spPr>
-        <p:txBody>
-          <a:bodyPr wrap="none" rtlCol="0">
-            <a:spAutoFit/>
-          </a:bodyPr>
-          <a:lstStyle/>
-          <a:p>
-            <a:pPr algn="ctr"/>
-            <a:r>
-              <a:rPr lang="en-US" sz="1400" b="1" dirty="0"/>
-              <a:t>6.v4. Unique filtered inserts:</a:t>
-            </a:r>
-          </a:p>
-          <a:p>
-            <a:pPr algn="ctr"/>
-            <a:r>
-              <a:rPr lang="en-US" sz="1400" dirty="0"/>
-              <a:t>- Insert length vs contig length</a:t>
-            </a:r>
-          </a:p>
-          <a:p>
-            <a:pPr algn="ctr"/>
-            <a:r>
-              <a:rPr lang="en-US" sz="1400" dirty="0"/>
-              <a:t>- False duplications</a:t>
-            </a:r>
-          </a:p>
-          <a:p>
-            <a:pPr algn="ctr"/>
-            <a:r>
-              <a:rPr lang="en-US" sz="1400" dirty="0"/>
-              <a:t>- Flanked by Ns</a:t>
-            </a:r>
-          </a:p>
-          <a:p>
-            <a:pPr algn="ctr"/>
-            <a:r>
-              <a:rPr lang="en-US" sz="1400" dirty="0"/>
-              <a:t>- Non-target bacteria</a:t>
-            </a:r>
-          </a:p>
-          <a:p>
-            <a:pPr algn="ctr"/>
-            <a:r>
-              <a:rPr lang="en-US" sz="1400" i="1" dirty="0">
-                <a:solidFill>
-                  <a:schemeClr val="accent1">
-                    <a:lumMod val="75000"/>
-                  </a:schemeClr>
-                </a:solidFill>
-              </a:rPr>
-              <a:t>Standard thresholds</a:t>
-            </a:r>
-          </a:p>
-          <a:p>
-            <a:pPr algn="ctr"/>
-            <a:r>
-              <a:rPr lang="en-US" sz="1400" i="1" dirty="0">
-                <a:solidFill>
-                  <a:schemeClr val="accent4">
-                    <a:lumMod val="75000"/>
-                  </a:schemeClr>
-                </a:solidFill>
-              </a:rPr>
-              <a:t>Higher </a:t>
-            </a:r>
-            <a:r>
-              <a:rPr lang="en-US" sz="1400" i="1" dirty="0" err="1">
-                <a:solidFill>
-                  <a:schemeClr val="accent4">
-                    <a:lumMod val="75000"/>
-                  </a:schemeClr>
-                </a:solidFill>
-              </a:rPr>
-              <a:t>Blatta</a:t>
-            </a:r>
-            <a:r>
-              <a:rPr lang="en-US" sz="1400" i="1" dirty="0">
-                <a:solidFill>
-                  <a:schemeClr val="accent4">
-                    <a:lumMod val="75000"/>
-                  </a:schemeClr>
-                </a:solidFill>
-              </a:rPr>
-              <a:t> vs bac BLAST</a:t>
-            </a:r>
-          </a:p>
-        </p:txBody>
-      </p:sp>
-      <p:sp>
-        <p:nvSpPr>
-          <p:cNvPr id="23" name="TextBox 22">
-            <a:extLst>
-              <a:ext uri="{FF2B5EF4-FFF2-40B4-BE49-F238E27FC236}">
-                <a16:creationId xmlns:a16="http://schemas.microsoft.com/office/drawing/2014/main" id="{D458E0FA-05D3-044E-8785-C34DFEB30E50}"/>
-              </a:ext>
-            </a:extLst>
-          </p:cNvPr>
-          <p:cNvSpPr txBox="1"/>
-          <p:nvPr/>
-        </p:nvSpPr>
-        <p:spPr>
-          <a:xfrm>
-            <a:off x="12155095" y="9963638"/>
-            <a:ext cx="2921827" cy="1600438"/>
-          </a:xfrm>
-          <a:prstGeom prst="rect">
-            <a:avLst/>
-          </a:prstGeom>
-          <a:noFill/>
-        </p:spPr>
-        <p:txBody>
-          <a:bodyPr wrap="none" rtlCol="0">
-            <a:spAutoFit/>
-          </a:bodyPr>
-          <a:lstStyle/>
-          <a:p>
-            <a:pPr algn="ctr"/>
-            <a:r>
-              <a:rPr lang="en-US" sz="1400" b="1" dirty="0"/>
-              <a:t>6.v5. Filtered inserts with duplicates:</a:t>
-            </a:r>
-          </a:p>
-          <a:p>
-            <a:pPr algn="ctr"/>
-            <a:r>
-              <a:rPr lang="en-US" sz="1400" dirty="0"/>
-              <a:t>- Insert length vs contig length</a:t>
-            </a:r>
-          </a:p>
-          <a:p>
-            <a:pPr algn="ctr"/>
-            <a:r>
-              <a:rPr lang="en-US" sz="1400" dirty="0"/>
-              <a:t>- False duplications</a:t>
-            </a:r>
-          </a:p>
-          <a:p>
-            <a:pPr algn="ctr"/>
-            <a:r>
-              <a:rPr lang="en-US" sz="1400" dirty="0"/>
-              <a:t>- Flanked by Ns</a:t>
-            </a:r>
-          </a:p>
-          <a:p>
-            <a:pPr algn="ctr"/>
-            <a:r>
-              <a:rPr lang="en-US" sz="1400" dirty="0"/>
-              <a:t>- Non-target bacteria</a:t>
-            </a:r>
-          </a:p>
-          <a:p>
-            <a:pPr algn="ctr"/>
-            <a:r>
-              <a:rPr lang="en-US" sz="1400" i="1" dirty="0">
-                <a:solidFill>
-                  <a:schemeClr val="accent2">
-                    <a:lumMod val="75000"/>
-                  </a:schemeClr>
-                </a:solidFill>
-              </a:rPr>
-              <a:t>Alternate thresholds</a:t>
-            </a:r>
-          </a:p>
-          <a:p>
-            <a:pPr algn="ctr"/>
-            <a:r>
-              <a:rPr lang="en-US" sz="1400" i="1" dirty="0">
-                <a:solidFill>
-                  <a:schemeClr val="accent6">
-                    <a:lumMod val="75000"/>
-                  </a:schemeClr>
-                </a:solidFill>
-              </a:rPr>
-              <a:t>Similar </a:t>
-            </a:r>
-            <a:r>
-              <a:rPr lang="en-US" sz="1400" i="1" dirty="0" err="1">
-                <a:solidFill>
-                  <a:schemeClr val="accent6">
-                    <a:lumMod val="75000"/>
-                  </a:schemeClr>
-                </a:solidFill>
-              </a:rPr>
-              <a:t>Blatta</a:t>
-            </a:r>
-            <a:r>
-              <a:rPr lang="en-US" sz="1400" i="1" dirty="0">
-                <a:solidFill>
-                  <a:schemeClr val="accent6">
-                    <a:lumMod val="75000"/>
-                  </a:schemeClr>
-                </a:solidFill>
-              </a:rPr>
-              <a:t> vs bac BLAST</a:t>
-            </a:r>
-          </a:p>
-        </p:txBody>
-      </p:sp>
-      <p:sp>
-        <p:nvSpPr>
-          <p:cNvPr id="24" name="TextBox 23">
-            <a:extLst>
-              <a:ext uri="{FF2B5EF4-FFF2-40B4-BE49-F238E27FC236}">
-                <a16:creationId xmlns:a16="http://schemas.microsoft.com/office/drawing/2014/main" id="{F85D64B0-5957-B04E-8FD0-BC829C50747A}"/>
-              </a:ext>
-            </a:extLst>
-          </p:cNvPr>
-          <p:cNvSpPr txBox="1"/>
-          <p:nvPr/>
-        </p:nvSpPr>
-        <p:spPr>
-          <a:xfrm>
-            <a:off x="15031043" y="9963638"/>
-            <a:ext cx="2390719" cy="1600438"/>
-          </a:xfrm>
-          <a:prstGeom prst="rect">
-            <a:avLst/>
-          </a:prstGeom>
-          <a:noFill/>
-        </p:spPr>
-        <p:txBody>
-          <a:bodyPr wrap="none" rtlCol="0">
-            <a:spAutoFit/>
-          </a:bodyPr>
-          <a:lstStyle/>
-          <a:p>
-            <a:pPr algn="ctr"/>
-            <a:r>
-              <a:rPr lang="en-US" sz="1400" b="1" dirty="0"/>
-              <a:t>6.v6. Unique filtered inserts:</a:t>
-            </a:r>
-          </a:p>
-          <a:p>
-            <a:pPr algn="ctr"/>
-            <a:r>
-              <a:rPr lang="en-US" sz="1400" dirty="0"/>
-              <a:t>- Insert length vs contig length</a:t>
-            </a:r>
-          </a:p>
-          <a:p>
-            <a:pPr algn="ctr"/>
-            <a:r>
-              <a:rPr lang="en-US" sz="1400" dirty="0"/>
-              <a:t>- False duplications</a:t>
-            </a:r>
-          </a:p>
-          <a:p>
-            <a:pPr algn="ctr"/>
-            <a:r>
-              <a:rPr lang="en-US" sz="1400" dirty="0"/>
-              <a:t>- Flanked by Ns</a:t>
-            </a:r>
-          </a:p>
-          <a:p>
-            <a:pPr algn="ctr"/>
-            <a:r>
-              <a:rPr lang="en-US" sz="1400" dirty="0"/>
-              <a:t>- Non-target bacteria</a:t>
-            </a:r>
-          </a:p>
-          <a:p>
-            <a:pPr algn="ctr"/>
-            <a:r>
-              <a:rPr lang="en-US" sz="1400" i="1" dirty="0">
-                <a:solidFill>
-                  <a:schemeClr val="accent2">
-                    <a:lumMod val="75000"/>
-                  </a:schemeClr>
-                </a:solidFill>
-              </a:rPr>
-              <a:t>Alternate thresholds</a:t>
-            </a:r>
-          </a:p>
-          <a:p>
-            <a:pPr algn="ctr"/>
-            <a:r>
-              <a:rPr lang="en-US" sz="1400" i="1" dirty="0">
-                <a:solidFill>
-                  <a:schemeClr val="accent6">
-                    <a:lumMod val="75000"/>
-                  </a:schemeClr>
-                </a:solidFill>
-              </a:rPr>
-              <a:t>Similar </a:t>
-            </a:r>
-            <a:r>
-              <a:rPr lang="en-US" sz="1400" i="1" dirty="0" err="1">
-                <a:solidFill>
-                  <a:schemeClr val="accent6">
-                    <a:lumMod val="75000"/>
-                  </a:schemeClr>
-                </a:solidFill>
-              </a:rPr>
-              <a:t>Blatta</a:t>
-            </a:r>
-            <a:r>
-              <a:rPr lang="en-US" sz="1400" i="1" dirty="0">
-                <a:solidFill>
-                  <a:schemeClr val="accent6">
-                    <a:lumMod val="75000"/>
-                  </a:schemeClr>
-                </a:solidFill>
-              </a:rPr>
-              <a:t> vs bac BLAST</a:t>
-            </a:r>
-          </a:p>
-        </p:txBody>
-      </p:sp>
-      <p:sp>
-        <p:nvSpPr>
-          <p:cNvPr id="25" name="TextBox 24">
-            <a:extLst>
-              <a:ext uri="{FF2B5EF4-FFF2-40B4-BE49-F238E27FC236}">
-                <a16:creationId xmlns:a16="http://schemas.microsoft.com/office/drawing/2014/main" id="{15F44069-ACD7-C542-8C9C-5452C8B4AC69}"/>
-              </a:ext>
-            </a:extLst>
-          </p:cNvPr>
-          <p:cNvSpPr txBox="1"/>
-          <p:nvPr/>
-        </p:nvSpPr>
-        <p:spPr>
-          <a:xfrm>
-            <a:off x="17308537" y="9963638"/>
-            <a:ext cx="2921827" cy="1600438"/>
-          </a:xfrm>
-          <a:prstGeom prst="rect">
-            <a:avLst/>
-          </a:prstGeom>
-          <a:noFill/>
-        </p:spPr>
-        <p:txBody>
-          <a:bodyPr wrap="none" rtlCol="0">
-            <a:spAutoFit/>
-          </a:bodyPr>
-          <a:lstStyle/>
-          <a:p>
-            <a:pPr algn="ctr"/>
-            <a:r>
-              <a:rPr lang="en-US" sz="1400" b="1" dirty="0"/>
-              <a:t>6.v7. Filtered inserts with duplicates:</a:t>
-            </a:r>
-          </a:p>
-          <a:p>
-            <a:pPr algn="ctr"/>
-            <a:r>
-              <a:rPr lang="en-US" sz="1400" dirty="0"/>
-              <a:t>- Insert length vs contig length</a:t>
-            </a:r>
-          </a:p>
-          <a:p>
-            <a:pPr algn="ctr"/>
-            <a:r>
-              <a:rPr lang="en-US" sz="1400" dirty="0"/>
-              <a:t>- False duplications</a:t>
-            </a:r>
-          </a:p>
-          <a:p>
-            <a:pPr algn="ctr"/>
-            <a:r>
-              <a:rPr lang="en-US" sz="1400" dirty="0"/>
-              <a:t>- Flanked by Ns</a:t>
-            </a:r>
-          </a:p>
-          <a:p>
-            <a:pPr algn="ctr"/>
-            <a:r>
-              <a:rPr lang="en-US" sz="1400" dirty="0"/>
-              <a:t>- Non-target bacteria</a:t>
-            </a:r>
-          </a:p>
-          <a:p>
-            <a:pPr algn="ctr"/>
-            <a:r>
-              <a:rPr lang="en-US" sz="1400" i="1" dirty="0">
-                <a:solidFill>
-                  <a:schemeClr val="accent2">
-                    <a:lumMod val="75000"/>
-                  </a:schemeClr>
-                </a:solidFill>
-              </a:rPr>
-              <a:t>Alternate thresholds</a:t>
-            </a:r>
-          </a:p>
-          <a:p>
-            <a:pPr algn="ctr"/>
-            <a:r>
-              <a:rPr lang="en-US" sz="1400" i="1" dirty="0">
-                <a:solidFill>
-                  <a:schemeClr val="accent4">
-                    <a:lumMod val="75000"/>
-                  </a:schemeClr>
-                </a:solidFill>
-              </a:rPr>
-              <a:t>Higher </a:t>
-            </a:r>
-            <a:r>
-              <a:rPr lang="en-US" sz="1400" i="1" dirty="0" err="1">
-                <a:solidFill>
-                  <a:schemeClr val="accent4">
-                    <a:lumMod val="75000"/>
-                  </a:schemeClr>
-                </a:solidFill>
-              </a:rPr>
-              <a:t>Blatta</a:t>
-            </a:r>
-            <a:r>
-              <a:rPr lang="en-US" sz="1400" i="1" dirty="0">
-                <a:solidFill>
-                  <a:schemeClr val="accent4">
-                    <a:lumMod val="75000"/>
-                  </a:schemeClr>
-                </a:solidFill>
-              </a:rPr>
-              <a:t> vs bac BLAST</a:t>
-            </a:r>
-          </a:p>
-        </p:txBody>
-      </p:sp>
-      <p:sp>
-        <p:nvSpPr>
-          <p:cNvPr id="26" name="TextBox 25">
-            <a:extLst>
-              <a:ext uri="{FF2B5EF4-FFF2-40B4-BE49-F238E27FC236}">
-                <a16:creationId xmlns:a16="http://schemas.microsoft.com/office/drawing/2014/main" id="{3673ADC7-E279-F340-AC3D-CCB493C02103}"/>
-              </a:ext>
-            </a:extLst>
-          </p:cNvPr>
-          <p:cNvSpPr txBox="1"/>
-          <p:nvPr/>
-        </p:nvSpPr>
-        <p:spPr>
-          <a:xfrm>
-            <a:off x="20383230" y="9963638"/>
-            <a:ext cx="2390719" cy="1600438"/>
-          </a:xfrm>
-          <a:prstGeom prst="rect">
-            <a:avLst/>
-          </a:prstGeom>
-          <a:noFill/>
-        </p:spPr>
-        <p:txBody>
-          <a:bodyPr wrap="none" rtlCol="0">
-            <a:spAutoFit/>
-          </a:bodyPr>
-          <a:lstStyle/>
-          <a:p>
-            <a:pPr algn="ctr"/>
-            <a:r>
-              <a:rPr lang="en-US" sz="1400" b="1" dirty="0"/>
-              <a:t>6.v8. Unique filtered inserts:</a:t>
-            </a:r>
-          </a:p>
-          <a:p>
-            <a:pPr algn="ctr"/>
-            <a:r>
-              <a:rPr lang="en-US" sz="1400" dirty="0"/>
-              <a:t>- Insert length vs contig length</a:t>
-            </a:r>
-          </a:p>
-          <a:p>
-            <a:pPr algn="ctr"/>
-            <a:r>
-              <a:rPr lang="en-US" sz="1400" dirty="0"/>
-              <a:t>- False duplications</a:t>
-            </a:r>
-          </a:p>
-          <a:p>
-            <a:pPr algn="ctr"/>
-            <a:r>
-              <a:rPr lang="en-US" sz="1400" dirty="0"/>
-              <a:t>- Flanked by Ns</a:t>
-            </a:r>
-          </a:p>
-          <a:p>
-            <a:pPr algn="ctr"/>
-            <a:r>
-              <a:rPr lang="en-US" sz="1400" dirty="0"/>
-              <a:t>- Non-target bacteria</a:t>
-            </a:r>
-          </a:p>
-          <a:p>
-            <a:pPr algn="ctr"/>
-            <a:r>
-              <a:rPr lang="en-US" sz="1400" i="1" dirty="0">
-                <a:solidFill>
-                  <a:schemeClr val="accent2">
-                    <a:lumMod val="75000"/>
-                  </a:schemeClr>
-                </a:solidFill>
-              </a:rPr>
-              <a:t>Alternate thresholds</a:t>
-            </a:r>
-          </a:p>
-          <a:p>
-            <a:pPr algn="ctr"/>
-            <a:r>
-              <a:rPr lang="en-US" sz="1400" i="1" dirty="0">
-                <a:solidFill>
-                  <a:schemeClr val="accent4">
-                    <a:lumMod val="75000"/>
-                  </a:schemeClr>
-                </a:solidFill>
-              </a:rPr>
-              <a:t>Higher </a:t>
-            </a:r>
-            <a:r>
-              <a:rPr lang="en-US" sz="1400" i="1" dirty="0" err="1">
-                <a:solidFill>
-                  <a:schemeClr val="accent4">
-                    <a:lumMod val="75000"/>
-                  </a:schemeClr>
-                </a:solidFill>
-              </a:rPr>
-              <a:t>Blatta</a:t>
-            </a:r>
-            <a:r>
-              <a:rPr lang="en-US" sz="1400" i="1" dirty="0">
-                <a:solidFill>
-                  <a:schemeClr val="accent4">
-                    <a:lumMod val="75000"/>
-                  </a:schemeClr>
-                </a:solidFill>
-              </a:rPr>
-              <a:t> vs bac BLAST</a:t>
             </a:r>
           </a:p>
         </p:txBody>
@@ -4758,8 +3799,8 @@
         </p:nvSpPr>
         <p:spPr>
           <a:xfrm>
-            <a:off x="1780756" y="9963638"/>
-            <a:ext cx="2921827" cy="1600438"/>
+            <a:off x="4398154" y="11014490"/>
+            <a:ext cx="2921826" cy="1600438"/>
           </a:xfrm>
           <a:prstGeom prst="rect">
             <a:avLst/>
@@ -4775,7 +3816,7 @@
             <a:pPr algn="ctr"/>
             <a:r>
               <a:rPr lang="en-US" sz="1400" b="1" dirty="0"/>
-              <a:t>6.v1. Filtered inserts with duplicates:</a:t>
+              <a:t>7.v1. Filtered inserts with duplicates:</a:t>
             </a:r>
           </a:p>
           <a:p>
@@ -4790,6 +3831,13 @@
             <a:r>
               <a:rPr lang="en-US" sz="1400" dirty="0"/>
               <a:t>- False duplications</a:t>
+            </a:r>
+            <a:br>
+              <a:rPr lang="en-US" sz="1400" dirty="0"/>
+            </a:br>
+            <a:r>
+              <a:rPr lang="en-US" sz="1400" dirty="0"/>
+              <a:t>- Sequence complexity</a:t>
             </a:r>
           </a:p>
           <a:p>
@@ -4817,39 +3865,6 @@
                 </a:solidFill>
               </a:rPr>
               <a:t>Standard thresholds</a:t>
-            </a:r>
-          </a:p>
-          <a:p>
-            <a:pPr algn="ctr"/>
-            <a:r>
-              <a:rPr lang="en-US" sz="1400" i="1" dirty="0">
-                <a:solidFill>
-                  <a:schemeClr val="accent6">
-                    <a:lumMod val="75000"/>
-                  </a:schemeClr>
-                </a:solidFill>
-              </a:rPr>
-              <a:t>Similar </a:t>
-            </a:r>
-            <a:r>
-              <a:rPr lang="en-US" sz="1400" i="1" dirty="0" err="1">
-                <a:solidFill>
-                  <a:schemeClr val="accent6">
-                    <a:lumMod val="75000"/>
-                  </a:schemeClr>
-                </a:solidFill>
-              </a:rPr>
-              <a:t>Blatta</a:t>
-            </a:r>
-            <a:r>
-              <a:rPr lang="en-US" sz="1400" i="1" dirty="0">
-                <a:solidFill>
-                  <a:schemeClr val="accent6">
-                    <a:lumMod val="75000"/>
-                  </a:schemeClr>
-                </a:solidFill>
-              </a:rPr>
-              <a:t> vs bac BLAST</a:t>
             </a:r>
           </a:p>
         </p:txBody>
@@ -4868,7 +3883,7 @@
         </p:nvSpPr>
         <p:spPr>
           <a:xfrm>
-            <a:off x="4059056" y="12270663"/>
+            <a:off x="6769847" y="13097145"/>
             <a:ext cx="3365665" cy="1600438"/>
           </a:xfrm>
           <a:prstGeom prst="rect">
@@ -4885,14 +3900,14 @@
             <a:pPr algn="ctr"/>
             <a:r>
               <a:rPr lang="en-US" sz="1400" b="1" dirty="0"/>
-              <a:t>7.v1. Unique putatively old filtered inserts:</a:t>
-            </a:r>
-          </a:p>
-          <a:p>
-            <a:pPr algn="ctr"/>
-            <a:r>
-              <a:rPr lang="en-US" sz="1400" dirty="0"/>
-              <a:t>- Insert length vs contig length</a:t>
+              <a:t>8.v1. Unique putatively old filtered inserts:</a:t>
+            </a:r>
+          </a:p>
+          <a:p>
+            <a:pPr algn="ctr"/>
+            <a:r>
+              <a:rPr lang="en-US" sz="1400" dirty="0"/>
+              <a:t>Insert length vs contig length</a:t>
             </a:r>
           </a:p>
           <a:p>
@@ -4900,6 +3915,13 @@
             <a:r>
               <a:rPr lang="en-US" sz="1400" dirty="0"/>
               <a:t>- False duplications</a:t>
+            </a:r>
+            <a:br>
+              <a:rPr lang="en-US" sz="1400" dirty="0"/>
+            </a:br>
+            <a:r>
+              <a:rPr lang="en-US" sz="1400" dirty="0"/>
+              <a:t>- Sequence complexity</a:t>
             </a:r>
           </a:p>
           <a:p>
@@ -4927,369 +3949,6 @@
                 </a:solidFill>
               </a:rPr>
               <a:t>Standard thresholds</a:t>
-            </a:r>
-          </a:p>
-          <a:p>
-            <a:pPr algn="ctr"/>
-            <a:r>
-              <a:rPr lang="en-US" sz="1400" i="1" dirty="0">
-                <a:solidFill>
-                  <a:schemeClr val="accent6">
-                    <a:lumMod val="75000"/>
-                  </a:schemeClr>
-                </a:solidFill>
-              </a:rPr>
-              <a:t>Similar </a:t>
-            </a:r>
-            <a:r>
-              <a:rPr lang="en-US" sz="1400" i="1" dirty="0" err="1">
-                <a:solidFill>
-                  <a:schemeClr val="accent6">
-                    <a:lumMod val="75000"/>
-                  </a:schemeClr>
-                </a:solidFill>
-              </a:rPr>
-              <a:t>Blatta</a:t>
-            </a:r>
-            <a:r>
-              <a:rPr lang="en-US" sz="1400" i="1" dirty="0">
-                <a:solidFill>
-                  <a:schemeClr val="accent6">
-                    <a:lumMod val="75000"/>
-                  </a:schemeClr>
-                </a:solidFill>
-              </a:rPr>
-              <a:t> vs bac BLAST</a:t>
-            </a:r>
-          </a:p>
-        </p:txBody>
-      </p:sp>
-      <p:sp>
-        <p:nvSpPr>
-          <p:cNvPr id="29" name="TextBox 28">
-            <a:extLst>
-              <a:ext uri="{FF2B5EF4-FFF2-40B4-BE49-F238E27FC236}">
-                <a16:creationId xmlns:a16="http://schemas.microsoft.com/office/drawing/2014/main" id="{253EEB91-7CEB-3740-B88F-B4E8D8933F71}"/>
-              </a:ext>
-            </a:extLst>
-          </p:cNvPr>
-          <p:cNvSpPr txBox="1"/>
-          <p:nvPr/>
-        </p:nvSpPr>
-        <p:spPr>
-          <a:xfrm>
-            <a:off x="9419013" y="12270663"/>
-            <a:ext cx="3365665" cy="1600438"/>
-          </a:xfrm>
-          <a:prstGeom prst="rect">
-            <a:avLst/>
-          </a:prstGeom>
-          <a:noFill/>
-        </p:spPr>
-        <p:txBody>
-          <a:bodyPr wrap="none" rtlCol="0">
-            <a:spAutoFit/>
-          </a:bodyPr>
-          <a:lstStyle/>
-          <a:p>
-            <a:pPr algn="ctr"/>
-            <a:r>
-              <a:rPr lang="en-US" sz="1400" b="1" dirty="0"/>
-              <a:t>7.v2. Unique putatively old filtered inserts:</a:t>
-            </a:r>
-          </a:p>
-          <a:p>
-            <a:pPr algn="ctr"/>
-            <a:r>
-              <a:rPr lang="en-US" sz="1400" dirty="0"/>
-              <a:t>- Insert length vs contig length</a:t>
-            </a:r>
-          </a:p>
-          <a:p>
-            <a:pPr algn="ctr"/>
-            <a:r>
-              <a:rPr lang="en-US" sz="1400" dirty="0"/>
-              <a:t>- False duplications</a:t>
-            </a:r>
-          </a:p>
-          <a:p>
-            <a:pPr algn="ctr"/>
-            <a:r>
-              <a:rPr lang="en-US" sz="1400" dirty="0"/>
-              <a:t>- Flanked by Ns</a:t>
-            </a:r>
-          </a:p>
-          <a:p>
-            <a:pPr algn="ctr"/>
-            <a:r>
-              <a:rPr lang="en-US" sz="1400" dirty="0"/>
-              <a:t>- Non-target bacteria</a:t>
-            </a:r>
-          </a:p>
-          <a:p>
-            <a:pPr algn="ctr"/>
-            <a:r>
-              <a:rPr lang="en-US" sz="1400" i="1" dirty="0">
-                <a:solidFill>
-                  <a:schemeClr val="accent1">
-                    <a:lumMod val="75000"/>
-                  </a:schemeClr>
-                </a:solidFill>
-              </a:rPr>
-              <a:t>Standard thresholds</a:t>
-            </a:r>
-          </a:p>
-          <a:p>
-            <a:pPr algn="ctr"/>
-            <a:r>
-              <a:rPr lang="en-US" sz="1400" i="1" dirty="0">
-                <a:solidFill>
-                  <a:schemeClr val="accent4">
-                    <a:lumMod val="75000"/>
-                  </a:schemeClr>
-                </a:solidFill>
-              </a:rPr>
-              <a:t>Higher </a:t>
-            </a:r>
-            <a:r>
-              <a:rPr lang="en-US" sz="1400" i="1" dirty="0" err="1">
-                <a:solidFill>
-                  <a:schemeClr val="accent4">
-                    <a:lumMod val="75000"/>
-                  </a:schemeClr>
-                </a:solidFill>
-              </a:rPr>
-              <a:t>Blatta</a:t>
-            </a:r>
-            <a:r>
-              <a:rPr lang="en-US" sz="1400" i="1" dirty="0">
-                <a:solidFill>
-                  <a:schemeClr val="accent4">
-                    <a:lumMod val="75000"/>
-                  </a:schemeClr>
-                </a:solidFill>
-              </a:rPr>
-              <a:t> vs bac BLAST</a:t>
-            </a:r>
-          </a:p>
-        </p:txBody>
-      </p:sp>
-      <p:sp>
-        <p:nvSpPr>
-          <p:cNvPr id="30" name="TextBox 29">
-            <a:extLst>
-              <a:ext uri="{FF2B5EF4-FFF2-40B4-BE49-F238E27FC236}">
-                <a16:creationId xmlns:a16="http://schemas.microsoft.com/office/drawing/2014/main" id="{F1C9C604-83BF-D946-9DA4-D7F31A751C55}"/>
-              </a:ext>
-            </a:extLst>
-          </p:cNvPr>
-          <p:cNvSpPr txBox="1"/>
-          <p:nvPr/>
-        </p:nvSpPr>
-        <p:spPr>
-          <a:xfrm>
-            <a:off x="14543571" y="12270663"/>
-            <a:ext cx="3365665" cy="1600438"/>
-          </a:xfrm>
-          <a:prstGeom prst="rect">
-            <a:avLst/>
-          </a:prstGeom>
-          <a:noFill/>
-        </p:spPr>
-        <p:txBody>
-          <a:bodyPr wrap="none" rtlCol="0">
-            <a:spAutoFit/>
-          </a:bodyPr>
-          <a:lstStyle/>
-          <a:p>
-            <a:pPr algn="ctr"/>
-            <a:r>
-              <a:rPr lang="en-US" sz="1400" b="1" dirty="0"/>
-              <a:t>7.v3. Unique putatively old filtered inserts:</a:t>
-            </a:r>
-          </a:p>
-          <a:p>
-            <a:pPr algn="ctr"/>
-            <a:r>
-              <a:rPr lang="en-US" sz="1400" dirty="0"/>
-              <a:t>- Insert length vs contig length</a:t>
-            </a:r>
-          </a:p>
-          <a:p>
-            <a:pPr algn="ctr"/>
-            <a:r>
-              <a:rPr lang="en-US" sz="1400" dirty="0"/>
-              <a:t>- False duplications</a:t>
-            </a:r>
-          </a:p>
-          <a:p>
-            <a:pPr algn="ctr"/>
-            <a:r>
-              <a:rPr lang="en-US" sz="1400" dirty="0"/>
-              <a:t>- Flanked by Ns</a:t>
-            </a:r>
-          </a:p>
-          <a:p>
-            <a:pPr algn="ctr"/>
-            <a:r>
-              <a:rPr lang="en-US" sz="1400" dirty="0"/>
-              <a:t>- Non-target bacteria</a:t>
-            </a:r>
-          </a:p>
-          <a:p>
-            <a:pPr algn="ctr"/>
-            <a:r>
-              <a:rPr lang="en-US" sz="1400" i="1" dirty="0">
-                <a:solidFill>
-                  <a:schemeClr val="accent2">
-                    <a:lumMod val="75000"/>
-                  </a:schemeClr>
-                </a:solidFill>
-              </a:rPr>
-              <a:t>Alternate thresholds</a:t>
-            </a:r>
-          </a:p>
-          <a:p>
-            <a:pPr algn="ctr"/>
-            <a:r>
-              <a:rPr lang="en-US" sz="1400" i="1" dirty="0">
-                <a:solidFill>
-                  <a:schemeClr val="accent6">
-                    <a:lumMod val="75000"/>
-                  </a:schemeClr>
-                </a:solidFill>
-              </a:rPr>
-              <a:t>Similar </a:t>
-            </a:r>
-            <a:r>
-              <a:rPr lang="en-US" sz="1400" i="1" dirty="0" err="1">
-                <a:solidFill>
-                  <a:schemeClr val="accent6">
-                    <a:lumMod val="75000"/>
-                  </a:schemeClr>
-                </a:solidFill>
-              </a:rPr>
-              <a:t>Blatta</a:t>
-            </a:r>
-            <a:r>
-              <a:rPr lang="en-US" sz="1400" i="1" dirty="0">
-                <a:solidFill>
-                  <a:schemeClr val="accent6">
-                    <a:lumMod val="75000"/>
-                  </a:schemeClr>
-                </a:solidFill>
-              </a:rPr>
-              <a:t> vs bac BLAST</a:t>
-            </a:r>
-          </a:p>
-        </p:txBody>
-      </p:sp>
-      <p:sp>
-        <p:nvSpPr>
-          <p:cNvPr id="31" name="TextBox 30">
-            <a:extLst>
-              <a:ext uri="{FF2B5EF4-FFF2-40B4-BE49-F238E27FC236}">
-                <a16:creationId xmlns:a16="http://schemas.microsoft.com/office/drawing/2014/main" id="{9D11AD6F-0807-4F46-911F-98514BB41463}"/>
-              </a:ext>
-            </a:extLst>
-          </p:cNvPr>
-          <p:cNvSpPr txBox="1"/>
-          <p:nvPr/>
-        </p:nvSpPr>
-        <p:spPr>
-          <a:xfrm>
-            <a:off x="19968909" y="12270663"/>
-            <a:ext cx="3365665" cy="1600438"/>
-          </a:xfrm>
-          <a:prstGeom prst="rect">
-            <a:avLst/>
-          </a:prstGeom>
-          <a:noFill/>
-        </p:spPr>
-        <p:txBody>
-          <a:bodyPr wrap="none" rtlCol="0">
-            <a:spAutoFit/>
-          </a:bodyPr>
-          <a:lstStyle/>
-          <a:p>
-            <a:pPr algn="ctr"/>
-            <a:r>
-              <a:rPr lang="en-US" sz="1400" b="1" dirty="0"/>
-              <a:t>7.v4. Unique putatively old filtered inserts:</a:t>
-            </a:r>
-          </a:p>
-          <a:p>
-            <a:pPr algn="ctr"/>
-            <a:r>
-              <a:rPr lang="en-US" sz="1400" dirty="0"/>
-              <a:t>- Insert length vs contig length</a:t>
-            </a:r>
-          </a:p>
-          <a:p>
-            <a:pPr algn="ctr"/>
-            <a:r>
-              <a:rPr lang="en-US" sz="1400" dirty="0"/>
-              <a:t>- False duplications</a:t>
-            </a:r>
-          </a:p>
-          <a:p>
-            <a:pPr algn="ctr"/>
-            <a:r>
-              <a:rPr lang="en-US" sz="1400" dirty="0"/>
-              <a:t>- Flanked by Ns</a:t>
-            </a:r>
-          </a:p>
-          <a:p>
-            <a:pPr algn="ctr"/>
-            <a:r>
-              <a:rPr lang="en-US" sz="1400" dirty="0"/>
-              <a:t>- Non-target bacteria</a:t>
-            </a:r>
-          </a:p>
-          <a:p>
-            <a:pPr algn="ctr"/>
-            <a:r>
-              <a:rPr lang="en-US" sz="1400" i="1" dirty="0">
-                <a:solidFill>
-                  <a:schemeClr val="accent2">
-                    <a:lumMod val="75000"/>
-                  </a:schemeClr>
-                </a:solidFill>
-              </a:rPr>
-              <a:t>Alternate thresholds</a:t>
-            </a:r>
-          </a:p>
-          <a:p>
-            <a:pPr algn="ctr"/>
-            <a:r>
-              <a:rPr lang="en-US" sz="1400" i="1" dirty="0">
-                <a:solidFill>
-                  <a:schemeClr val="accent4">
-                    <a:lumMod val="75000"/>
-                  </a:schemeClr>
-                </a:solidFill>
-              </a:rPr>
-              <a:t>Higher </a:t>
-            </a:r>
-            <a:r>
-              <a:rPr lang="en-US" sz="1400" i="1" dirty="0" err="1">
-                <a:solidFill>
-                  <a:schemeClr val="accent4">
-                    <a:lumMod val="75000"/>
-                  </a:schemeClr>
-                </a:solidFill>
-              </a:rPr>
-              <a:t>Blatta</a:t>
-            </a:r>
-            <a:r>
-              <a:rPr lang="en-US" sz="1400" i="1" dirty="0">
-                <a:solidFill>
-                  <a:schemeClr val="accent4">
-                    <a:lumMod val="75000"/>
-                  </a:schemeClr>
-                </a:solidFill>
-              </a:rPr>
-              <a:t> vs bac BLAST</a:t>
             </a:r>
           </a:p>
         </p:txBody>
@@ -5310,7 +3969,7 @@
         </p:nvCxnSpPr>
         <p:spPr>
           <a:xfrm flipH="1">
-            <a:off x="8425068" y="818186"/>
+            <a:off x="8425068" y="625682"/>
             <a:ext cx="3114660" cy="843487"/>
           </a:xfrm>
           <a:prstGeom prst="straightConnector1">
@@ -5354,184 +4013,8 @@
         </p:nvCxnSpPr>
         <p:spPr>
           <a:xfrm>
-            <a:off x="13198236" y="818186"/>
+            <a:off x="13198236" y="625682"/>
             <a:ext cx="3114660" cy="843487"/>
-          </a:xfrm>
-          <a:prstGeom prst="straightConnector1">
-            <a:avLst/>
-          </a:prstGeom>
-          <a:ln>
-            <a:solidFill>
-              <a:schemeClr val="tx1"/>
-            </a:solidFill>
-            <a:tailEnd type="triangle"/>
-          </a:ln>
-        </p:spPr>
-        <p:style>
-          <a:lnRef idx="1">
-            <a:schemeClr val="accent1"/>
-          </a:lnRef>
-          <a:fillRef idx="0">
-            <a:schemeClr val="accent1"/>
-          </a:fillRef>
-          <a:effectRef idx="0">
-            <a:schemeClr val="accent1"/>
-          </a:effectRef>
-          <a:fontRef idx="minor">
-            <a:schemeClr val="tx1"/>
-          </a:fontRef>
-        </p:style>
-      </p:cxnSp>
-      <p:cxnSp>
-        <p:nvCxnSpPr>
-          <p:cNvPr id="36" name="Straight Arrow Connector 35">
-            <a:extLst>
-              <a:ext uri="{FF2B5EF4-FFF2-40B4-BE49-F238E27FC236}">
-                <a16:creationId xmlns:a16="http://schemas.microsoft.com/office/drawing/2014/main" id="{2D06E5BA-C654-3F4E-B9B8-E3F947AD2A6C}"/>
-              </a:ext>
-            </a:extLst>
-          </p:cNvPr>
-          <p:cNvCxnSpPr>
-            <a:cxnSpLocks/>
-          </p:cNvCxnSpPr>
-          <p:nvPr/>
-        </p:nvCxnSpPr>
-        <p:spPr>
-          <a:xfrm flipH="1">
-            <a:off x="5193792" y="6695700"/>
-            <a:ext cx="1090718" cy="716536"/>
-          </a:xfrm>
-          <a:prstGeom prst="straightConnector1">
-            <a:avLst/>
-          </a:prstGeom>
-          <a:ln>
-            <a:solidFill>
-              <a:schemeClr val="tx1"/>
-            </a:solidFill>
-            <a:tailEnd type="triangle"/>
-          </a:ln>
-        </p:spPr>
-        <p:style>
-          <a:lnRef idx="1">
-            <a:schemeClr val="accent1"/>
-          </a:lnRef>
-          <a:fillRef idx="0">
-            <a:schemeClr val="accent1"/>
-          </a:fillRef>
-          <a:effectRef idx="0">
-            <a:schemeClr val="accent1"/>
-          </a:effectRef>
-          <a:fontRef idx="minor">
-            <a:schemeClr val="tx1"/>
-          </a:fontRef>
-        </p:style>
-      </p:cxnSp>
-      <p:cxnSp>
-        <p:nvCxnSpPr>
-          <p:cNvPr id="38" name="Straight Arrow Connector 37">
-            <a:extLst>
-              <a:ext uri="{FF2B5EF4-FFF2-40B4-BE49-F238E27FC236}">
-                <a16:creationId xmlns:a16="http://schemas.microsoft.com/office/drawing/2014/main" id="{B9A33471-62BE-7F43-9620-3F1CD06AF201}"/>
-              </a:ext>
-            </a:extLst>
-          </p:cNvPr>
-          <p:cNvCxnSpPr>
-            <a:cxnSpLocks/>
-          </p:cNvCxnSpPr>
-          <p:nvPr/>
-        </p:nvCxnSpPr>
-        <p:spPr>
-          <a:xfrm>
-            <a:off x="8028432" y="6705649"/>
-            <a:ext cx="1090718" cy="716536"/>
-          </a:xfrm>
-          <a:prstGeom prst="straightConnector1">
-            <a:avLst/>
-          </a:prstGeom>
-          <a:ln>
-            <a:solidFill>
-              <a:schemeClr val="tx1"/>
-            </a:solidFill>
-            <a:tailEnd type="triangle"/>
-          </a:ln>
-        </p:spPr>
-        <p:style>
-          <a:lnRef idx="1">
-            <a:schemeClr val="accent1"/>
-          </a:lnRef>
-          <a:fillRef idx="0">
-            <a:schemeClr val="accent1"/>
-          </a:fillRef>
-          <a:effectRef idx="0">
-            <a:schemeClr val="accent1"/>
-          </a:effectRef>
-          <a:fontRef idx="minor">
-            <a:schemeClr val="tx1"/>
-          </a:fontRef>
-        </p:style>
-      </p:cxnSp>
-      <p:cxnSp>
-        <p:nvCxnSpPr>
-          <p:cNvPr id="39" name="Straight Arrow Connector 38">
-            <a:extLst>
-              <a:ext uri="{FF2B5EF4-FFF2-40B4-BE49-F238E27FC236}">
-                <a16:creationId xmlns:a16="http://schemas.microsoft.com/office/drawing/2014/main" id="{86362F95-BDF6-A345-96CD-23CF9CBBE1AC}"/>
-              </a:ext>
-            </a:extLst>
-          </p:cNvPr>
-          <p:cNvCxnSpPr>
-            <a:cxnSpLocks/>
-          </p:cNvCxnSpPr>
-          <p:nvPr/>
-        </p:nvCxnSpPr>
-        <p:spPr>
-          <a:xfrm flipH="1">
-            <a:off x="15550896" y="6765602"/>
-            <a:ext cx="1090718" cy="716536"/>
-          </a:xfrm>
-          <a:prstGeom prst="straightConnector1">
-            <a:avLst/>
-          </a:prstGeom>
-          <a:ln>
-            <a:solidFill>
-              <a:schemeClr val="tx1"/>
-            </a:solidFill>
-            <a:tailEnd type="triangle"/>
-          </a:ln>
-        </p:spPr>
-        <p:style>
-          <a:lnRef idx="1">
-            <a:schemeClr val="accent1"/>
-          </a:lnRef>
-          <a:fillRef idx="0">
-            <a:schemeClr val="accent1"/>
-          </a:fillRef>
-          <a:effectRef idx="0">
-            <a:schemeClr val="accent1"/>
-          </a:effectRef>
-          <a:fontRef idx="minor">
-            <a:schemeClr val="tx1"/>
-          </a:fontRef>
-        </p:style>
-      </p:cxnSp>
-      <p:cxnSp>
-        <p:nvCxnSpPr>
-          <p:cNvPr id="40" name="Straight Arrow Connector 39">
-            <a:extLst>
-              <a:ext uri="{FF2B5EF4-FFF2-40B4-BE49-F238E27FC236}">
-                <a16:creationId xmlns:a16="http://schemas.microsoft.com/office/drawing/2014/main" id="{DCF8BC59-06BB-5541-893D-9FE70645B471}"/>
-              </a:ext>
-            </a:extLst>
-          </p:cNvPr>
-          <p:cNvCxnSpPr>
-            <a:cxnSpLocks/>
-          </p:cNvCxnSpPr>
-          <p:nvPr/>
-        </p:nvCxnSpPr>
-        <p:spPr>
-          <a:xfrm>
-            <a:off x="18385536" y="6775551"/>
-            <a:ext cx="789581" cy="578247"/>
           </a:xfrm>
           <a:prstGeom prst="straightConnector1">
             <a:avLst/>
@@ -5574,7 +4057,7 @@
         </p:nvCxnSpPr>
         <p:spPr>
           <a:xfrm flipH="1">
-            <a:off x="3241668" y="9169814"/>
+            <a:off x="5859065" y="10220666"/>
             <a:ext cx="545359" cy="650842"/>
           </a:xfrm>
           <a:prstGeom prst="straightConnector1">
@@ -5618,271 +4101,7 @@
         </p:nvCxnSpPr>
         <p:spPr>
           <a:xfrm>
-            <a:off x="5289924" y="9164458"/>
-            <a:ext cx="545359" cy="650842"/>
-          </a:xfrm>
-          <a:prstGeom prst="straightConnector1">
-            <a:avLst/>
-          </a:prstGeom>
-          <a:ln>
-            <a:solidFill>
-              <a:schemeClr val="tx1"/>
-            </a:solidFill>
-            <a:tailEnd type="triangle"/>
-          </a:ln>
-        </p:spPr>
-        <p:style>
-          <a:lnRef idx="1">
-            <a:schemeClr val="accent1"/>
-          </a:lnRef>
-          <a:fillRef idx="0">
-            <a:schemeClr val="accent1"/>
-          </a:fillRef>
-          <a:effectRef idx="0">
-            <a:schemeClr val="accent1"/>
-          </a:effectRef>
-          <a:fontRef idx="minor">
-            <a:schemeClr val="tx1"/>
-          </a:fontRef>
-        </p:style>
-      </p:cxnSp>
-      <p:cxnSp>
-        <p:nvCxnSpPr>
-          <p:cNvPr id="44" name="Straight Arrow Connector 43">
-            <a:extLst>
-              <a:ext uri="{FF2B5EF4-FFF2-40B4-BE49-F238E27FC236}">
-                <a16:creationId xmlns:a16="http://schemas.microsoft.com/office/drawing/2014/main" id="{D3117AC9-5995-FC40-B4B4-C40DD8B4716D}"/>
-              </a:ext>
-            </a:extLst>
-          </p:cNvPr>
-          <p:cNvCxnSpPr>
-            <a:cxnSpLocks/>
-          </p:cNvCxnSpPr>
-          <p:nvPr/>
-        </p:nvCxnSpPr>
-        <p:spPr>
-          <a:xfrm flipH="1">
-            <a:off x="8511733" y="9159102"/>
-            <a:ext cx="545359" cy="650842"/>
-          </a:xfrm>
-          <a:prstGeom prst="straightConnector1">
-            <a:avLst/>
-          </a:prstGeom>
-          <a:ln>
-            <a:solidFill>
-              <a:schemeClr val="tx1"/>
-            </a:solidFill>
-            <a:tailEnd type="triangle"/>
-          </a:ln>
-        </p:spPr>
-        <p:style>
-          <a:lnRef idx="1">
-            <a:schemeClr val="accent1"/>
-          </a:lnRef>
-          <a:fillRef idx="0">
-            <a:schemeClr val="accent1"/>
-          </a:fillRef>
-          <a:effectRef idx="0">
-            <a:schemeClr val="accent1"/>
-          </a:effectRef>
-          <a:fontRef idx="minor">
-            <a:schemeClr val="tx1"/>
-          </a:fontRef>
-        </p:style>
-      </p:cxnSp>
-      <p:cxnSp>
-        <p:nvCxnSpPr>
-          <p:cNvPr id="45" name="Straight Arrow Connector 44">
-            <a:extLst>
-              <a:ext uri="{FF2B5EF4-FFF2-40B4-BE49-F238E27FC236}">
-                <a16:creationId xmlns:a16="http://schemas.microsoft.com/office/drawing/2014/main" id="{5E07072E-0B6B-2B42-8BC1-551B18E41FAE}"/>
-              </a:ext>
-            </a:extLst>
-          </p:cNvPr>
-          <p:cNvCxnSpPr>
-            <a:cxnSpLocks/>
-          </p:cNvCxnSpPr>
-          <p:nvPr/>
-        </p:nvCxnSpPr>
-        <p:spPr>
-          <a:xfrm>
-            <a:off x="10559989" y="9153746"/>
-            <a:ext cx="545359" cy="650842"/>
-          </a:xfrm>
-          <a:prstGeom prst="straightConnector1">
-            <a:avLst/>
-          </a:prstGeom>
-          <a:ln>
-            <a:solidFill>
-              <a:schemeClr val="tx1"/>
-            </a:solidFill>
-            <a:tailEnd type="triangle"/>
-          </a:ln>
-        </p:spPr>
-        <p:style>
-          <a:lnRef idx="1">
-            <a:schemeClr val="accent1"/>
-          </a:lnRef>
-          <a:fillRef idx="0">
-            <a:schemeClr val="accent1"/>
-          </a:fillRef>
-          <a:effectRef idx="0">
-            <a:schemeClr val="accent1"/>
-          </a:effectRef>
-          <a:fontRef idx="minor">
-            <a:schemeClr val="tx1"/>
-          </a:fontRef>
-        </p:style>
-      </p:cxnSp>
-      <p:cxnSp>
-        <p:nvCxnSpPr>
-          <p:cNvPr id="46" name="Straight Arrow Connector 45">
-            <a:extLst>
-              <a:ext uri="{FF2B5EF4-FFF2-40B4-BE49-F238E27FC236}">
-                <a16:creationId xmlns:a16="http://schemas.microsoft.com/office/drawing/2014/main" id="{331A2F39-6529-784E-8A96-E2E80E7CDD48}"/>
-              </a:ext>
-            </a:extLst>
-          </p:cNvPr>
-          <p:cNvCxnSpPr>
-            <a:cxnSpLocks/>
-          </p:cNvCxnSpPr>
-          <p:nvPr/>
-        </p:nvCxnSpPr>
-        <p:spPr>
-          <a:xfrm flipH="1">
-            <a:off x="13668949" y="9164458"/>
-            <a:ext cx="545359" cy="650842"/>
-          </a:xfrm>
-          <a:prstGeom prst="straightConnector1">
-            <a:avLst/>
-          </a:prstGeom>
-          <a:ln>
-            <a:solidFill>
-              <a:schemeClr val="tx1"/>
-            </a:solidFill>
-            <a:tailEnd type="triangle"/>
-          </a:ln>
-        </p:spPr>
-        <p:style>
-          <a:lnRef idx="1">
-            <a:schemeClr val="accent1"/>
-          </a:lnRef>
-          <a:fillRef idx="0">
-            <a:schemeClr val="accent1"/>
-          </a:fillRef>
-          <a:effectRef idx="0">
-            <a:schemeClr val="accent1"/>
-          </a:effectRef>
-          <a:fontRef idx="minor">
-            <a:schemeClr val="tx1"/>
-          </a:fontRef>
-        </p:style>
-      </p:cxnSp>
-      <p:cxnSp>
-        <p:nvCxnSpPr>
-          <p:cNvPr id="47" name="Straight Arrow Connector 46">
-            <a:extLst>
-              <a:ext uri="{FF2B5EF4-FFF2-40B4-BE49-F238E27FC236}">
-                <a16:creationId xmlns:a16="http://schemas.microsoft.com/office/drawing/2014/main" id="{D7705B34-B6D8-7B4E-8B80-B3788AD858D7}"/>
-              </a:ext>
-            </a:extLst>
-          </p:cNvPr>
-          <p:cNvCxnSpPr>
-            <a:cxnSpLocks/>
-          </p:cNvCxnSpPr>
-          <p:nvPr/>
-        </p:nvCxnSpPr>
-        <p:spPr>
-          <a:xfrm>
-            <a:off x="15717205" y="9159102"/>
-            <a:ext cx="545359" cy="650842"/>
-          </a:xfrm>
-          <a:prstGeom prst="straightConnector1">
-            <a:avLst/>
-          </a:prstGeom>
-          <a:ln>
-            <a:solidFill>
-              <a:schemeClr val="tx1"/>
-            </a:solidFill>
-            <a:tailEnd type="triangle"/>
-          </a:ln>
-        </p:spPr>
-        <p:style>
-          <a:lnRef idx="1">
-            <a:schemeClr val="accent1"/>
-          </a:lnRef>
-          <a:fillRef idx="0">
-            <a:schemeClr val="accent1"/>
-          </a:fillRef>
-          <a:effectRef idx="0">
-            <a:schemeClr val="accent1"/>
-          </a:effectRef>
-          <a:fontRef idx="minor">
-            <a:schemeClr val="tx1"/>
-          </a:fontRef>
-        </p:style>
-      </p:cxnSp>
-      <p:cxnSp>
-        <p:nvCxnSpPr>
-          <p:cNvPr id="48" name="Straight Arrow Connector 47">
-            <a:extLst>
-              <a:ext uri="{FF2B5EF4-FFF2-40B4-BE49-F238E27FC236}">
-                <a16:creationId xmlns:a16="http://schemas.microsoft.com/office/drawing/2014/main" id="{7D70DF88-C8CE-6C41-94E0-CCBE2962DFE7}"/>
-              </a:ext>
-            </a:extLst>
-          </p:cNvPr>
-          <p:cNvCxnSpPr>
-            <a:cxnSpLocks/>
-          </p:cNvCxnSpPr>
-          <p:nvPr/>
-        </p:nvCxnSpPr>
-        <p:spPr>
-          <a:xfrm flipH="1">
-            <a:off x="18902438" y="9189103"/>
-            <a:ext cx="545359" cy="650842"/>
-          </a:xfrm>
-          <a:prstGeom prst="straightConnector1">
-            <a:avLst/>
-          </a:prstGeom>
-          <a:ln>
-            <a:solidFill>
-              <a:schemeClr val="tx1"/>
-            </a:solidFill>
-            <a:tailEnd type="triangle"/>
-          </a:ln>
-        </p:spPr>
-        <p:style>
-          <a:lnRef idx="1">
-            <a:schemeClr val="accent1"/>
-          </a:lnRef>
-          <a:fillRef idx="0">
-            <a:schemeClr val="accent1"/>
-          </a:fillRef>
-          <a:effectRef idx="0">
-            <a:schemeClr val="accent1"/>
-          </a:effectRef>
-          <a:fontRef idx="minor">
-            <a:schemeClr val="tx1"/>
-          </a:fontRef>
-        </p:style>
-      </p:cxnSp>
-      <p:cxnSp>
-        <p:nvCxnSpPr>
-          <p:cNvPr id="49" name="Straight Arrow Connector 48">
-            <a:extLst>
-              <a:ext uri="{FF2B5EF4-FFF2-40B4-BE49-F238E27FC236}">
-                <a16:creationId xmlns:a16="http://schemas.microsoft.com/office/drawing/2014/main" id="{7C79D365-6767-2548-8FD4-11D193AC844C}"/>
-              </a:ext>
-            </a:extLst>
-          </p:cNvPr>
-          <p:cNvCxnSpPr>
-            <a:cxnSpLocks/>
-          </p:cNvCxnSpPr>
-          <p:nvPr/>
-        </p:nvCxnSpPr>
-        <p:spPr>
-          <a:xfrm>
-            <a:off x="20950694" y="9183747"/>
+            <a:off x="7907321" y="10215310"/>
             <a:ext cx="545359" cy="650842"/>
           </a:xfrm>
           <a:prstGeom prst="straightConnector1">
@@ -5926,7 +4145,7 @@
         </p:nvCxnSpPr>
         <p:spPr>
           <a:xfrm>
-            <a:off x="7257320" y="2184893"/>
+            <a:off x="7257320" y="1992389"/>
             <a:ext cx="0" cy="447793"/>
           </a:xfrm>
           <a:prstGeom prst="straightConnector1">
@@ -5970,7 +4189,7 @@
         </p:nvCxnSpPr>
         <p:spPr>
           <a:xfrm>
-            <a:off x="7244108" y="3458626"/>
+            <a:off x="7244108" y="3169870"/>
             <a:ext cx="0" cy="447793"/>
           </a:xfrm>
           <a:prstGeom prst="straightConnector1">
@@ -6014,7 +4233,7 @@
         </p:nvCxnSpPr>
         <p:spPr>
           <a:xfrm>
-            <a:off x="7225820" y="4970254"/>
+            <a:off x="7225820" y="4609309"/>
             <a:ext cx="0" cy="447793"/>
           </a:xfrm>
           <a:prstGeom prst="straightConnector1">
@@ -6058,7 +4277,7 @@
         </p:nvCxnSpPr>
         <p:spPr>
           <a:xfrm>
-            <a:off x="17610591" y="2184893"/>
+            <a:off x="17610591" y="1992389"/>
             <a:ext cx="0" cy="447793"/>
           </a:xfrm>
           <a:prstGeom prst="straightConnector1">
@@ -6102,7 +4321,7 @@
         </p:nvCxnSpPr>
         <p:spPr>
           <a:xfrm>
-            <a:off x="17597379" y="3458626"/>
+            <a:off x="17597379" y="3169870"/>
             <a:ext cx="0" cy="447793"/>
           </a:xfrm>
           <a:prstGeom prst="straightConnector1">
@@ -6146,7 +4365,7 @@
         </p:nvCxnSpPr>
         <p:spPr>
           <a:xfrm>
-            <a:off x="17579091" y="4970254"/>
+            <a:off x="17579091" y="4609309"/>
             <a:ext cx="0" cy="447793"/>
           </a:xfrm>
           <a:prstGeom prst="straightConnector1">
@@ -6190,7 +4409,7 @@
         </p:nvCxnSpPr>
         <p:spPr>
           <a:xfrm>
-            <a:off x="5739151" y="11673804"/>
+            <a:off x="8452680" y="12614928"/>
             <a:ext cx="0" cy="447793"/>
           </a:xfrm>
           <a:prstGeom prst="straightConnector1">
@@ -6234,2498 +4453,7 @@
         </p:nvCxnSpPr>
         <p:spPr>
           <a:xfrm>
-            <a:off x="11159522" y="11673804"/>
-            <a:ext cx="0" cy="447793"/>
-          </a:xfrm>
-          <a:prstGeom prst="straightConnector1">
-            <a:avLst/>
-          </a:prstGeom>
-          <a:ln>
-            <a:solidFill>
-              <a:schemeClr val="tx1"/>
-            </a:solidFill>
-            <a:tailEnd type="triangle"/>
-          </a:ln>
-        </p:spPr>
-        <p:style>
-          <a:lnRef idx="1">
-            <a:schemeClr val="accent1"/>
-          </a:lnRef>
-          <a:fillRef idx="0">
-            <a:schemeClr val="accent1"/>
-          </a:fillRef>
-          <a:effectRef idx="0">
-            <a:schemeClr val="accent1"/>
-          </a:effectRef>
-          <a:fontRef idx="minor">
-            <a:schemeClr val="tx1"/>
-          </a:fontRef>
-        </p:style>
-      </p:cxnSp>
-      <p:cxnSp>
-        <p:nvCxnSpPr>
-          <p:cNvPr id="59" name="Straight Arrow Connector 58">
-            <a:extLst>
-              <a:ext uri="{FF2B5EF4-FFF2-40B4-BE49-F238E27FC236}">
-                <a16:creationId xmlns:a16="http://schemas.microsoft.com/office/drawing/2014/main" id="{CBA25FCA-0518-6C43-BE79-1A1DD2B9ABB9}"/>
-              </a:ext>
-            </a:extLst>
-          </p:cNvPr>
-          <p:cNvCxnSpPr>
-            <a:cxnSpLocks/>
-          </p:cNvCxnSpPr>
-          <p:nvPr/>
-        </p:nvCxnSpPr>
-        <p:spPr>
-          <a:xfrm>
-            <a:off x="16254214" y="11690400"/>
-            <a:ext cx="0" cy="447793"/>
-          </a:xfrm>
-          <a:prstGeom prst="straightConnector1">
-            <a:avLst/>
-          </a:prstGeom>
-          <a:ln>
-            <a:solidFill>
-              <a:schemeClr val="tx1"/>
-            </a:solidFill>
-            <a:tailEnd type="triangle"/>
-          </a:ln>
-        </p:spPr>
-        <p:style>
-          <a:lnRef idx="1">
-            <a:schemeClr val="accent1"/>
-          </a:lnRef>
-          <a:fillRef idx="0">
-            <a:schemeClr val="accent1"/>
-          </a:fillRef>
-          <a:effectRef idx="0">
-            <a:schemeClr val="accent1"/>
-          </a:effectRef>
-          <a:fontRef idx="minor">
-            <a:schemeClr val="tx1"/>
-          </a:fontRef>
-        </p:style>
-      </p:cxnSp>
-      <p:cxnSp>
-        <p:nvCxnSpPr>
-          <p:cNvPr id="60" name="Straight Arrow Connector 59">
-            <a:extLst>
-              <a:ext uri="{FF2B5EF4-FFF2-40B4-BE49-F238E27FC236}">
-                <a16:creationId xmlns:a16="http://schemas.microsoft.com/office/drawing/2014/main" id="{296B6762-DEA1-0944-8412-9AAFC714DE40}"/>
-              </a:ext>
-            </a:extLst>
-          </p:cNvPr>
-          <p:cNvCxnSpPr>
-            <a:cxnSpLocks/>
-          </p:cNvCxnSpPr>
-          <p:nvPr/>
-        </p:nvCxnSpPr>
-        <p:spPr>
-          <a:xfrm>
-            <a:off x="21651741" y="11673804"/>
-            <a:ext cx="0" cy="447793"/>
-          </a:xfrm>
-          <a:prstGeom prst="straightConnector1">
-            <a:avLst/>
-          </a:prstGeom>
-          <a:ln>
-            <a:solidFill>
-              <a:schemeClr val="tx1"/>
-            </a:solidFill>
-            <a:tailEnd type="triangle"/>
-          </a:ln>
-        </p:spPr>
-        <p:style>
-          <a:lnRef idx="1">
-            <a:schemeClr val="accent1"/>
-          </a:lnRef>
-          <a:fillRef idx="0">
-            <a:schemeClr val="accent1"/>
-          </a:fillRef>
-          <a:effectRef idx="0">
-            <a:schemeClr val="accent1"/>
-          </a:effectRef>
-          <a:fontRef idx="minor">
-            <a:schemeClr val="tx1"/>
-          </a:fontRef>
-        </p:style>
-      </p:cxnSp>
-      <p:cxnSp>
-        <p:nvCxnSpPr>
-          <p:cNvPr id="3" name="Straight Connector 2">
-            <a:extLst>
-              <a:ext uri="{FF2B5EF4-FFF2-40B4-BE49-F238E27FC236}">
-                <a16:creationId xmlns:a16="http://schemas.microsoft.com/office/drawing/2014/main" id="{90CFA791-7395-0F41-A253-0F55DF30BD04}"/>
-              </a:ext>
-            </a:extLst>
-          </p:cNvPr>
-          <p:cNvCxnSpPr>
-            <a:cxnSpLocks/>
-          </p:cNvCxnSpPr>
-          <p:nvPr/>
-        </p:nvCxnSpPr>
-        <p:spPr>
-          <a:xfrm>
-            <a:off x="19055347" y="7492087"/>
-            <a:ext cx="2279957" cy="1600438"/>
-          </a:xfrm>
-          <a:prstGeom prst="line">
-            <a:avLst/>
-          </a:prstGeom>
-          <a:ln w="76200">
-            <a:solidFill>
-              <a:srgbClr val="FF0000"/>
-            </a:solidFill>
-          </a:ln>
-        </p:spPr>
-        <p:style>
-          <a:lnRef idx="1">
-            <a:schemeClr val="accent1"/>
-          </a:lnRef>
-          <a:fillRef idx="0">
-            <a:schemeClr val="accent1"/>
-          </a:fillRef>
-          <a:effectRef idx="0">
-            <a:schemeClr val="accent1"/>
-          </a:effectRef>
-          <a:fontRef idx="minor">
-            <a:schemeClr val="tx1"/>
-          </a:fontRef>
-        </p:style>
-      </p:cxnSp>
-      <p:cxnSp>
-        <p:nvCxnSpPr>
-          <p:cNvPr id="62" name="Straight Connector 61">
-            <a:extLst>
-              <a:ext uri="{FF2B5EF4-FFF2-40B4-BE49-F238E27FC236}">
-                <a16:creationId xmlns:a16="http://schemas.microsoft.com/office/drawing/2014/main" id="{132D2D1E-B2A9-5044-BA8E-BF3D978C916A}"/>
-              </a:ext>
-            </a:extLst>
-          </p:cNvPr>
-          <p:cNvCxnSpPr>
-            <a:cxnSpLocks/>
-          </p:cNvCxnSpPr>
-          <p:nvPr/>
-        </p:nvCxnSpPr>
-        <p:spPr>
-          <a:xfrm flipH="1">
-            <a:off x="18982194" y="7477491"/>
-            <a:ext cx="2279957" cy="1600438"/>
-          </a:xfrm>
-          <a:prstGeom prst="line">
-            <a:avLst/>
-          </a:prstGeom>
-          <a:ln w="76200">
-            <a:solidFill>
-              <a:srgbClr val="FF0000"/>
-            </a:solidFill>
-          </a:ln>
-        </p:spPr>
-        <p:style>
-          <a:lnRef idx="1">
-            <a:schemeClr val="accent1"/>
-          </a:lnRef>
-          <a:fillRef idx="0">
-            <a:schemeClr val="accent1"/>
-          </a:fillRef>
-          <a:effectRef idx="0">
-            <a:schemeClr val="accent1"/>
-          </a:effectRef>
-          <a:fontRef idx="minor">
-            <a:schemeClr val="tx1"/>
-          </a:fontRef>
-        </p:style>
-      </p:cxnSp>
-      <p:cxnSp>
-        <p:nvCxnSpPr>
-          <p:cNvPr id="63" name="Straight Connector 62">
-            <a:extLst>
-              <a:ext uri="{FF2B5EF4-FFF2-40B4-BE49-F238E27FC236}">
-                <a16:creationId xmlns:a16="http://schemas.microsoft.com/office/drawing/2014/main" id="{BDBAFD56-D0F4-D341-98B5-748D8F7D59F8}"/>
-              </a:ext>
-            </a:extLst>
-          </p:cNvPr>
-          <p:cNvCxnSpPr>
-            <a:cxnSpLocks/>
-          </p:cNvCxnSpPr>
-          <p:nvPr/>
-        </p:nvCxnSpPr>
-        <p:spPr>
-          <a:xfrm>
-            <a:off x="17762459" y="10062629"/>
-            <a:ext cx="2279957" cy="1600438"/>
-          </a:xfrm>
-          <a:prstGeom prst="line">
-            <a:avLst/>
-          </a:prstGeom>
-          <a:ln w="76200">
-            <a:solidFill>
-              <a:srgbClr val="FF0000"/>
-            </a:solidFill>
-          </a:ln>
-        </p:spPr>
-        <p:style>
-          <a:lnRef idx="1">
-            <a:schemeClr val="accent1"/>
-          </a:lnRef>
-          <a:fillRef idx="0">
-            <a:schemeClr val="accent1"/>
-          </a:fillRef>
-          <a:effectRef idx="0">
-            <a:schemeClr val="accent1"/>
-          </a:effectRef>
-          <a:fontRef idx="minor">
-            <a:schemeClr val="tx1"/>
-          </a:fontRef>
-        </p:style>
-      </p:cxnSp>
-      <p:cxnSp>
-        <p:nvCxnSpPr>
-          <p:cNvPr id="64" name="Straight Connector 63">
-            <a:extLst>
-              <a:ext uri="{FF2B5EF4-FFF2-40B4-BE49-F238E27FC236}">
-                <a16:creationId xmlns:a16="http://schemas.microsoft.com/office/drawing/2014/main" id="{438F89C1-81D7-0642-A9B0-316095547C71}"/>
-              </a:ext>
-            </a:extLst>
-          </p:cNvPr>
-          <p:cNvCxnSpPr>
-            <a:cxnSpLocks/>
-          </p:cNvCxnSpPr>
-          <p:nvPr/>
-        </p:nvCxnSpPr>
-        <p:spPr>
-          <a:xfrm flipH="1">
-            <a:off x="17689306" y="10048033"/>
-            <a:ext cx="2279957" cy="1600438"/>
-          </a:xfrm>
-          <a:prstGeom prst="line">
-            <a:avLst/>
-          </a:prstGeom>
-          <a:ln w="76200">
-            <a:solidFill>
-              <a:srgbClr val="FF0000"/>
-            </a:solidFill>
-          </a:ln>
-        </p:spPr>
-        <p:style>
-          <a:lnRef idx="1">
-            <a:schemeClr val="accent1"/>
-          </a:lnRef>
-          <a:fillRef idx="0">
-            <a:schemeClr val="accent1"/>
-          </a:fillRef>
-          <a:effectRef idx="0">
-            <a:schemeClr val="accent1"/>
-          </a:effectRef>
-          <a:fontRef idx="minor">
-            <a:schemeClr val="tx1"/>
-          </a:fontRef>
-        </p:style>
-      </p:cxnSp>
-      <p:cxnSp>
-        <p:nvCxnSpPr>
-          <p:cNvPr id="65" name="Straight Connector 64">
-            <a:extLst>
-              <a:ext uri="{FF2B5EF4-FFF2-40B4-BE49-F238E27FC236}">
-                <a16:creationId xmlns:a16="http://schemas.microsoft.com/office/drawing/2014/main" id="{2986DC53-0750-5643-87C2-A3D33991F6C4}"/>
-              </a:ext>
-            </a:extLst>
-          </p:cNvPr>
-          <p:cNvCxnSpPr>
-            <a:cxnSpLocks/>
-          </p:cNvCxnSpPr>
-          <p:nvPr/>
-        </p:nvCxnSpPr>
-        <p:spPr>
-          <a:xfrm>
-            <a:off x="20476797" y="10064997"/>
-            <a:ext cx="2279957" cy="1600438"/>
-          </a:xfrm>
-          <a:prstGeom prst="line">
-            <a:avLst/>
-          </a:prstGeom>
-          <a:ln w="76200">
-            <a:solidFill>
-              <a:srgbClr val="FF0000"/>
-            </a:solidFill>
-          </a:ln>
-        </p:spPr>
-        <p:style>
-          <a:lnRef idx="1">
-            <a:schemeClr val="accent1"/>
-          </a:lnRef>
-          <a:fillRef idx="0">
-            <a:schemeClr val="accent1"/>
-          </a:fillRef>
-          <a:effectRef idx="0">
-            <a:schemeClr val="accent1"/>
-          </a:effectRef>
-          <a:fontRef idx="minor">
-            <a:schemeClr val="tx1"/>
-          </a:fontRef>
-        </p:style>
-      </p:cxnSp>
-      <p:cxnSp>
-        <p:nvCxnSpPr>
-          <p:cNvPr id="66" name="Straight Connector 65">
-            <a:extLst>
-              <a:ext uri="{FF2B5EF4-FFF2-40B4-BE49-F238E27FC236}">
-                <a16:creationId xmlns:a16="http://schemas.microsoft.com/office/drawing/2014/main" id="{6D4269B3-9F39-A643-BC33-A7E062BD74CC}"/>
-              </a:ext>
-            </a:extLst>
-          </p:cNvPr>
-          <p:cNvCxnSpPr>
-            <a:cxnSpLocks/>
-          </p:cNvCxnSpPr>
-          <p:nvPr/>
-        </p:nvCxnSpPr>
-        <p:spPr>
-          <a:xfrm flipH="1">
-            <a:off x="20403644" y="10050401"/>
-            <a:ext cx="2279957" cy="1600438"/>
-          </a:xfrm>
-          <a:prstGeom prst="line">
-            <a:avLst/>
-          </a:prstGeom>
-          <a:ln w="76200">
-            <a:solidFill>
-              <a:srgbClr val="FF0000"/>
-            </a:solidFill>
-          </a:ln>
-        </p:spPr>
-        <p:style>
-          <a:lnRef idx="1">
-            <a:schemeClr val="accent1"/>
-          </a:lnRef>
-          <a:fillRef idx="0">
-            <a:schemeClr val="accent1"/>
-          </a:fillRef>
-          <a:effectRef idx="0">
-            <a:schemeClr val="accent1"/>
-          </a:effectRef>
-          <a:fontRef idx="minor">
-            <a:schemeClr val="tx1"/>
-          </a:fontRef>
-        </p:style>
-      </p:cxnSp>
-      <p:cxnSp>
-        <p:nvCxnSpPr>
-          <p:cNvPr id="67" name="Straight Connector 66">
-            <a:extLst>
-              <a:ext uri="{FF2B5EF4-FFF2-40B4-BE49-F238E27FC236}">
-                <a16:creationId xmlns:a16="http://schemas.microsoft.com/office/drawing/2014/main" id="{326C822E-11C4-B147-9076-77A03CB1D3A3}"/>
-              </a:ext>
-            </a:extLst>
-          </p:cNvPr>
-          <p:cNvCxnSpPr>
-            <a:cxnSpLocks/>
-          </p:cNvCxnSpPr>
-          <p:nvPr/>
-        </p:nvCxnSpPr>
-        <p:spPr>
-          <a:xfrm>
-            <a:off x="20694635" y="12301592"/>
-            <a:ext cx="2279957" cy="1600438"/>
-          </a:xfrm>
-          <a:prstGeom prst="line">
-            <a:avLst/>
-          </a:prstGeom>
-          <a:ln w="76200">
-            <a:solidFill>
-              <a:srgbClr val="FF0000"/>
-            </a:solidFill>
-          </a:ln>
-        </p:spPr>
-        <p:style>
-          <a:lnRef idx="1">
-            <a:schemeClr val="accent1"/>
-          </a:lnRef>
-          <a:fillRef idx="0">
-            <a:schemeClr val="accent1"/>
-          </a:fillRef>
-          <a:effectRef idx="0">
-            <a:schemeClr val="accent1"/>
-          </a:effectRef>
-          <a:fontRef idx="minor">
-            <a:schemeClr val="tx1"/>
-          </a:fontRef>
-        </p:style>
-      </p:cxnSp>
-      <p:cxnSp>
-        <p:nvCxnSpPr>
-          <p:cNvPr id="68" name="Straight Connector 67">
-            <a:extLst>
-              <a:ext uri="{FF2B5EF4-FFF2-40B4-BE49-F238E27FC236}">
-                <a16:creationId xmlns:a16="http://schemas.microsoft.com/office/drawing/2014/main" id="{371ACAA0-1787-8D4A-A4D5-23BAEF437826}"/>
-              </a:ext>
-            </a:extLst>
-          </p:cNvPr>
-          <p:cNvCxnSpPr>
-            <a:cxnSpLocks/>
-          </p:cNvCxnSpPr>
-          <p:nvPr/>
-        </p:nvCxnSpPr>
-        <p:spPr>
-          <a:xfrm flipH="1">
-            <a:off x="20621482" y="12286996"/>
-            <a:ext cx="2279957" cy="1600438"/>
-          </a:xfrm>
-          <a:prstGeom prst="line">
-            <a:avLst/>
-          </a:prstGeom>
-          <a:ln w="76200">
-            <a:solidFill>
-              <a:srgbClr val="FF0000"/>
-            </a:solidFill>
-          </a:ln>
-        </p:spPr>
-        <p:style>
-          <a:lnRef idx="1">
-            <a:schemeClr val="accent1"/>
-          </a:lnRef>
-          <a:fillRef idx="0">
-            <a:schemeClr val="accent1"/>
-          </a:fillRef>
-          <a:effectRef idx="0">
-            <a:schemeClr val="accent1"/>
-          </a:effectRef>
-          <a:fontRef idx="minor">
-            <a:schemeClr val="tx1"/>
-          </a:fontRef>
-        </p:style>
-      </p:cxnSp>
-      <p:sp>
-        <p:nvSpPr>
-          <p:cNvPr id="11" name="TextBox 10">
-            <a:extLst>
-              <a:ext uri="{FF2B5EF4-FFF2-40B4-BE49-F238E27FC236}">
-                <a16:creationId xmlns:a16="http://schemas.microsoft.com/office/drawing/2014/main" id="{75EFD2F0-AB0D-D646-8D42-11EA7591001B}"/>
-              </a:ext>
-            </a:extLst>
-          </p:cNvPr>
-          <p:cNvSpPr txBox="1"/>
-          <p:nvPr/>
-        </p:nvSpPr>
-        <p:spPr>
-          <a:xfrm>
-            <a:off x="21014135" y="5902971"/>
-            <a:ext cx="2713092" cy="646331"/>
-          </a:xfrm>
-          <a:prstGeom prst="rect">
-            <a:avLst/>
-          </a:prstGeom>
-          <a:noFill/>
-          <a:ln>
-            <a:solidFill>
-              <a:schemeClr val="tx1"/>
-            </a:solidFill>
-          </a:ln>
-        </p:spPr>
-        <p:txBody>
-          <a:bodyPr wrap="square" rtlCol="0">
-            <a:spAutoFit/>
-          </a:bodyPr>
-          <a:lstStyle/>
-          <a:p>
-            <a:r>
-              <a:rPr lang="en-US" sz="1800" dirty="0"/>
-              <a:t>We are not including these crossed out versions </a:t>
-            </a:r>
-          </a:p>
-        </p:txBody>
-      </p:sp>
-      <p:sp>
-        <p:nvSpPr>
-          <p:cNvPr id="32" name="Down Arrow 31">
-            <a:extLst>
-              <a:ext uri="{FF2B5EF4-FFF2-40B4-BE49-F238E27FC236}">
-                <a16:creationId xmlns:a16="http://schemas.microsoft.com/office/drawing/2014/main" id="{45AF5539-A94D-694C-8FCD-8D145D601C78}"/>
-              </a:ext>
-            </a:extLst>
-          </p:cNvPr>
-          <p:cNvSpPr/>
-          <p:nvPr/>
-        </p:nvSpPr>
-        <p:spPr>
-          <a:xfrm rot="2059356">
-            <a:off x="21796278" y="6637310"/>
-            <a:ext cx="334061" cy="955661"/>
-          </a:xfrm>
-          <a:prstGeom prst="downArrow">
-            <a:avLst/>
-          </a:prstGeom>
-          <a:solidFill>
-            <a:schemeClr val="tx1"/>
-          </a:solidFill>
-          <a:ln>
-            <a:solidFill>
-              <a:schemeClr val="tx1"/>
-            </a:solidFill>
-          </a:ln>
-        </p:spPr>
-        <p:style>
-          <a:lnRef idx="2">
-            <a:schemeClr val="accent1">
-              <a:shade val="50000"/>
-            </a:schemeClr>
-          </a:lnRef>
-          <a:fillRef idx="1">
-            <a:schemeClr val="accent1"/>
-          </a:fillRef>
-          <a:effectRef idx="0">
-            <a:schemeClr val="accent1"/>
-          </a:effectRef>
-          <a:fontRef idx="minor">
-            <a:schemeClr val="lt1"/>
-          </a:fontRef>
-        </p:style>
-        <p:txBody>
-          <a:bodyPr rtlCol="0" anchor="ctr"/>
-          <a:lstStyle/>
-          <a:p>
-            <a:pPr algn="ctr"/>
-            <a:endParaRPr lang="en-US"/>
-          </a:p>
-        </p:txBody>
-      </p:sp>
-      <p:sp>
-        <p:nvSpPr>
-          <p:cNvPr id="34" name="Oval 33">
-            <a:extLst>
-              <a:ext uri="{FF2B5EF4-FFF2-40B4-BE49-F238E27FC236}">
-                <a16:creationId xmlns:a16="http://schemas.microsoft.com/office/drawing/2014/main" id="{148F41EC-5414-9947-BA86-0EE73DD64AC7}"/>
-              </a:ext>
-            </a:extLst>
-          </p:cNvPr>
-          <p:cNvSpPr/>
-          <p:nvPr/>
-        </p:nvSpPr>
-        <p:spPr>
-          <a:xfrm rot="20022199">
-            <a:off x="17699224" y="7117124"/>
-            <a:ext cx="6259540" cy="7696755"/>
-          </a:xfrm>
-          <a:prstGeom prst="ellipse">
-            <a:avLst/>
-          </a:prstGeom>
-          <a:noFill/>
-          <a:ln w="38100">
-            <a:solidFill>
-              <a:schemeClr val="tx1"/>
-            </a:solidFill>
-          </a:ln>
-        </p:spPr>
-        <p:style>
-          <a:lnRef idx="2">
-            <a:schemeClr val="accent1">
-              <a:shade val="50000"/>
-            </a:schemeClr>
-          </a:lnRef>
-          <a:fillRef idx="1">
-            <a:schemeClr val="accent1"/>
-          </a:fillRef>
-          <a:effectRef idx="0">
-            <a:schemeClr val="accent1"/>
-          </a:effectRef>
-          <a:fontRef idx="minor">
-            <a:schemeClr val="lt1"/>
-          </a:fontRef>
-        </p:style>
-        <p:txBody>
-          <a:bodyPr rtlCol="0" anchor="ctr"/>
-          <a:lstStyle/>
-          <a:p>
-            <a:pPr algn="ctr"/>
-            <a:endParaRPr lang="en-US"/>
-          </a:p>
-        </p:txBody>
-      </p:sp>
-    </p:spTree>
-    <p:extLst>
-      <p:ext uri="{BB962C8B-B14F-4D97-AF65-F5344CB8AC3E}">
-        <p14:creationId xmlns:p14="http://schemas.microsoft.com/office/powerpoint/2010/main" val="1176634097"/>
-      </p:ext>
-    </p:extLst>
-  </p:cSld>
-  <p:clrMapOvr>
-    <a:masterClrMapping/>
-  </p:clrMapOvr>
-</p:sld>
-</file>
-
-<file path=ppt/slides/slide2.xml><?xml version="1.0" encoding="utf-8"?>
-<p:sld xmlns:a="http://schemas.openxmlformats.org/drawingml/2006/main" xmlns:r="http://schemas.openxmlformats.org/officeDocument/2006/relationships" xmlns:p="http://schemas.openxmlformats.org/presentationml/2006/main">
-  <p:cSld>
-    <p:spTree>
-      <p:nvGrpSpPr>
-        <p:cNvPr id="1" name=""/>
-        <p:cNvGrpSpPr/>
-        <p:nvPr/>
-      </p:nvGrpSpPr>
-      <p:grpSpPr>
-        <a:xfrm>
-          <a:off x="0" y="0"/>
-          <a:ext cx="0" cy="0"/>
-          <a:chOff x="0" y="0"/>
-          <a:chExt cx="0" cy="0"/>
-        </a:xfrm>
-      </p:grpSpPr>
-      <p:sp>
-        <p:nvSpPr>
-          <p:cNvPr id="4" name="TextBox 3">
-            <a:extLst>
-              <a:ext uri="{FF2B5EF4-FFF2-40B4-BE49-F238E27FC236}">
-                <a16:creationId xmlns:a16="http://schemas.microsoft.com/office/drawing/2014/main" id="{79D15BB4-6BA6-2049-8E82-70645DB193B4}"/>
-              </a:ext>
-            </a:extLst>
-          </p:cNvPr>
-          <p:cNvSpPr txBox="1"/>
-          <p:nvPr/>
-        </p:nvSpPr>
-        <p:spPr>
-          <a:xfrm>
-            <a:off x="11808013" y="225572"/>
-            <a:ext cx="1091966" cy="400110"/>
-          </a:xfrm>
-          <a:prstGeom prst="rect">
-            <a:avLst/>
-          </a:prstGeom>
-          <a:noFill/>
-          <a:ln w="19050">
-            <a:solidFill>
-              <a:schemeClr val="tx1"/>
-            </a:solidFill>
-          </a:ln>
-        </p:spPr>
-        <p:txBody>
-          <a:bodyPr wrap="none" rtlCol="0">
-            <a:spAutoFit/>
-          </a:bodyPr>
-          <a:lstStyle/>
-          <a:p>
-            <a:r>
-              <a:rPr lang="en-US" sz="2000" b="1" dirty="0"/>
-              <a:t>Genome</a:t>
-            </a:r>
-          </a:p>
-        </p:txBody>
-      </p:sp>
-      <p:sp>
-        <p:nvSpPr>
-          <p:cNvPr id="5" name="TextBox 4">
-            <a:extLst>
-              <a:ext uri="{FF2B5EF4-FFF2-40B4-BE49-F238E27FC236}">
-                <a16:creationId xmlns:a16="http://schemas.microsoft.com/office/drawing/2014/main" id="{4AD14E54-D4CF-194B-9C3B-AEE4FF6C22B6}"/>
-              </a:ext>
-            </a:extLst>
-          </p:cNvPr>
-          <p:cNvSpPr txBox="1"/>
-          <p:nvPr/>
-        </p:nvSpPr>
-        <p:spPr>
-          <a:xfrm>
-            <a:off x="6317033" y="1469169"/>
-            <a:ext cx="1880579" cy="523220"/>
-          </a:xfrm>
-          <a:prstGeom prst="rect">
-            <a:avLst/>
-          </a:prstGeom>
-          <a:noFill/>
-        </p:spPr>
-        <p:txBody>
-          <a:bodyPr wrap="none" rtlCol="0">
-            <a:spAutoFit/>
-          </a:bodyPr>
-          <a:lstStyle/>
-          <a:p>
-            <a:pPr algn="ctr"/>
-            <a:r>
-              <a:rPr lang="en-US" sz="1400" b="1" dirty="0"/>
-              <a:t>1.v1. Unfiltered inserts</a:t>
-            </a:r>
-          </a:p>
-          <a:p>
-            <a:pPr algn="ctr"/>
-            <a:r>
-              <a:rPr lang="en-US" sz="1400" i="1" dirty="0">
-                <a:solidFill>
-                  <a:schemeClr val="accent1">
-                    <a:lumMod val="75000"/>
-                  </a:schemeClr>
-                </a:solidFill>
-              </a:rPr>
-              <a:t>Standard thresholds</a:t>
-            </a:r>
-          </a:p>
-        </p:txBody>
-      </p:sp>
-      <p:sp>
-        <p:nvSpPr>
-          <p:cNvPr id="6" name="TextBox 5">
-            <a:extLst>
-              <a:ext uri="{FF2B5EF4-FFF2-40B4-BE49-F238E27FC236}">
-                <a16:creationId xmlns:a16="http://schemas.microsoft.com/office/drawing/2014/main" id="{D8080F88-E331-2047-9AD7-ABE3E9C884B3}"/>
-              </a:ext>
-            </a:extLst>
-          </p:cNvPr>
-          <p:cNvSpPr txBox="1"/>
-          <p:nvPr/>
-        </p:nvSpPr>
-        <p:spPr>
-          <a:xfrm>
-            <a:off x="16753247" y="1469169"/>
-            <a:ext cx="1880579" cy="523220"/>
-          </a:xfrm>
-          <a:prstGeom prst="rect">
-            <a:avLst/>
-          </a:prstGeom>
-          <a:noFill/>
-        </p:spPr>
-        <p:txBody>
-          <a:bodyPr wrap="none" rtlCol="0">
-            <a:spAutoFit/>
-          </a:bodyPr>
-          <a:lstStyle/>
-          <a:p>
-            <a:pPr algn="ctr"/>
-            <a:r>
-              <a:rPr lang="en-US" sz="1400" b="1" dirty="0"/>
-              <a:t>1.v2. Unfiltered inserts</a:t>
-            </a:r>
-          </a:p>
-          <a:p>
-            <a:pPr algn="ctr"/>
-            <a:r>
-              <a:rPr lang="en-US" sz="1400" i="1" dirty="0">
-                <a:solidFill>
-                  <a:schemeClr val="accent2">
-                    <a:lumMod val="75000"/>
-                  </a:schemeClr>
-                </a:solidFill>
-              </a:rPr>
-              <a:t>Alternate thresholds</a:t>
-            </a:r>
-          </a:p>
-        </p:txBody>
-      </p:sp>
-      <p:sp>
-        <p:nvSpPr>
-          <p:cNvPr id="7" name="TextBox 6">
-            <a:extLst>
-              <a:ext uri="{FF2B5EF4-FFF2-40B4-BE49-F238E27FC236}">
-                <a16:creationId xmlns:a16="http://schemas.microsoft.com/office/drawing/2014/main" id="{209F653F-7200-2D41-880A-CA0582D478BF}"/>
-              </a:ext>
-            </a:extLst>
-          </p:cNvPr>
-          <p:cNvSpPr txBox="1"/>
-          <p:nvPr/>
-        </p:nvSpPr>
-        <p:spPr>
-          <a:xfrm>
-            <a:off x="6061962" y="2473622"/>
-            <a:ext cx="2390718" cy="738664"/>
-          </a:xfrm>
-          <a:prstGeom prst="rect">
-            <a:avLst/>
-          </a:prstGeom>
-          <a:noFill/>
-        </p:spPr>
-        <p:txBody>
-          <a:bodyPr wrap="none" rtlCol="0">
-            <a:spAutoFit/>
-          </a:bodyPr>
-          <a:lstStyle/>
-          <a:p>
-            <a:pPr algn="ctr"/>
-            <a:r>
-              <a:rPr lang="en-US" sz="1400" b="1" dirty="0"/>
-              <a:t>2.v1. Filtered inserts:</a:t>
-            </a:r>
-          </a:p>
-          <a:p>
-            <a:pPr algn="ctr"/>
-            <a:r>
-              <a:rPr lang="en-US" sz="1400" dirty="0"/>
-              <a:t>- Insert length vs contig length</a:t>
-            </a:r>
-          </a:p>
-          <a:p>
-            <a:pPr algn="ctr"/>
-            <a:r>
-              <a:rPr lang="en-US" sz="1400" i="1" dirty="0">
-                <a:solidFill>
-                  <a:schemeClr val="accent1">
-                    <a:lumMod val="75000"/>
-                  </a:schemeClr>
-                </a:solidFill>
-              </a:rPr>
-              <a:t>Standard thresholds</a:t>
-            </a:r>
-          </a:p>
-        </p:txBody>
-      </p:sp>
-      <p:sp>
-        <p:nvSpPr>
-          <p:cNvPr id="8" name="TextBox 7">
-            <a:extLst>
-              <a:ext uri="{FF2B5EF4-FFF2-40B4-BE49-F238E27FC236}">
-                <a16:creationId xmlns:a16="http://schemas.microsoft.com/office/drawing/2014/main" id="{E4DBABE2-F8ED-174A-8D10-E377AEB6701E}"/>
-              </a:ext>
-            </a:extLst>
-          </p:cNvPr>
-          <p:cNvSpPr txBox="1"/>
-          <p:nvPr/>
-        </p:nvSpPr>
-        <p:spPr>
-          <a:xfrm>
-            <a:off x="16429633" y="2473622"/>
-            <a:ext cx="2390718" cy="738664"/>
-          </a:xfrm>
-          <a:prstGeom prst="rect">
-            <a:avLst/>
-          </a:prstGeom>
-          <a:noFill/>
-        </p:spPr>
-        <p:txBody>
-          <a:bodyPr wrap="none" rtlCol="0">
-            <a:spAutoFit/>
-          </a:bodyPr>
-          <a:lstStyle/>
-          <a:p>
-            <a:pPr algn="ctr"/>
-            <a:r>
-              <a:rPr lang="en-US" sz="1400" b="1" dirty="0"/>
-              <a:t>2.v2. Filtered inserts:</a:t>
-            </a:r>
-          </a:p>
-          <a:p>
-            <a:pPr algn="ctr"/>
-            <a:r>
-              <a:rPr lang="en-US" sz="1400" dirty="0"/>
-              <a:t>- Insert length vs contig length</a:t>
-            </a:r>
-          </a:p>
-          <a:p>
-            <a:pPr algn="ctr"/>
-            <a:r>
-              <a:rPr lang="en-US" sz="1400" i="1" dirty="0">
-                <a:solidFill>
-                  <a:schemeClr val="accent2">
-                    <a:lumMod val="75000"/>
-                  </a:schemeClr>
-                </a:solidFill>
-              </a:rPr>
-              <a:t>Alternate thresholds</a:t>
-            </a:r>
-          </a:p>
-        </p:txBody>
-      </p:sp>
-      <p:sp>
-        <p:nvSpPr>
-          <p:cNvPr id="9" name="TextBox 8">
-            <a:extLst>
-              <a:ext uri="{FF2B5EF4-FFF2-40B4-BE49-F238E27FC236}">
-                <a16:creationId xmlns:a16="http://schemas.microsoft.com/office/drawing/2014/main" id="{CE9E3A89-700F-BD4B-B39C-DD01A77A5980}"/>
-              </a:ext>
-            </a:extLst>
-          </p:cNvPr>
-          <p:cNvSpPr txBox="1"/>
-          <p:nvPr/>
-        </p:nvSpPr>
-        <p:spPr>
-          <a:xfrm>
-            <a:off x="258477" y="156466"/>
-            <a:ext cx="4362727" cy="1323439"/>
-          </a:xfrm>
-          <a:prstGeom prst="rect">
-            <a:avLst/>
-          </a:prstGeom>
-          <a:noFill/>
-          <a:ln>
-            <a:solidFill>
-              <a:schemeClr val="tx1"/>
-            </a:solidFill>
-          </a:ln>
-        </p:spPr>
-        <p:txBody>
-          <a:bodyPr wrap="square" rtlCol="0">
-            <a:spAutoFit/>
-          </a:bodyPr>
-          <a:lstStyle/>
-          <a:p>
-            <a:r>
-              <a:rPr lang="en-US" sz="1600" b="1" dirty="0"/>
-              <a:t>Note: </a:t>
-            </a:r>
-            <a:r>
-              <a:rPr lang="en-US" sz="1600" i="1" dirty="0"/>
-              <a:t>The numbers/versions alongside the inserts can be used for version control (e.g. associated with a spreadsheet with all the counts for each step. They do not related to the numbered filtering steps/scripts in the bioinformatic pipeline.</a:t>
-            </a:r>
-          </a:p>
-        </p:txBody>
-      </p:sp>
-      <p:sp>
-        <p:nvSpPr>
-          <p:cNvPr id="12" name="TextBox 11">
-            <a:extLst>
-              <a:ext uri="{FF2B5EF4-FFF2-40B4-BE49-F238E27FC236}">
-                <a16:creationId xmlns:a16="http://schemas.microsoft.com/office/drawing/2014/main" id="{9D581CBE-81DD-0B46-8031-F67E8607273D}"/>
-              </a:ext>
-            </a:extLst>
-          </p:cNvPr>
-          <p:cNvSpPr txBox="1"/>
-          <p:nvPr/>
-        </p:nvSpPr>
-        <p:spPr>
-          <a:xfrm>
-            <a:off x="6061961" y="3618626"/>
-            <a:ext cx="2390719" cy="954107"/>
-          </a:xfrm>
-          <a:prstGeom prst="rect">
-            <a:avLst/>
-          </a:prstGeom>
-          <a:noFill/>
-        </p:spPr>
-        <p:txBody>
-          <a:bodyPr wrap="none" rtlCol="0">
-            <a:spAutoFit/>
-          </a:bodyPr>
-          <a:lstStyle/>
-          <a:p>
-            <a:pPr algn="ctr"/>
-            <a:r>
-              <a:rPr lang="en-US" sz="1400" b="1" dirty="0"/>
-              <a:t>3.v1. Filtered inserts:</a:t>
-            </a:r>
-          </a:p>
-          <a:p>
-            <a:pPr algn="ctr"/>
-            <a:r>
-              <a:rPr lang="en-US" sz="1400" dirty="0"/>
-              <a:t>- Insert length vs contig length</a:t>
-            </a:r>
-          </a:p>
-          <a:p>
-            <a:pPr algn="ctr"/>
-            <a:r>
-              <a:rPr lang="en-US" sz="1400" dirty="0"/>
-              <a:t>- False duplications</a:t>
-            </a:r>
-          </a:p>
-          <a:p>
-            <a:pPr algn="ctr"/>
-            <a:r>
-              <a:rPr lang="en-US" sz="1400" i="1" dirty="0">
-                <a:solidFill>
-                  <a:schemeClr val="accent1">
-                    <a:lumMod val="75000"/>
-                  </a:schemeClr>
-                </a:solidFill>
-              </a:rPr>
-              <a:t>Standard thresholds</a:t>
-            </a:r>
-          </a:p>
-        </p:txBody>
-      </p:sp>
-      <p:sp>
-        <p:nvSpPr>
-          <p:cNvPr id="13" name="TextBox 12">
-            <a:extLst>
-              <a:ext uri="{FF2B5EF4-FFF2-40B4-BE49-F238E27FC236}">
-                <a16:creationId xmlns:a16="http://schemas.microsoft.com/office/drawing/2014/main" id="{2CBE8C63-93C8-384C-B5CC-2DD847BFE618}"/>
-              </a:ext>
-            </a:extLst>
-          </p:cNvPr>
-          <p:cNvSpPr txBox="1"/>
-          <p:nvPr/>
-        </p:nvSpPr>
-        <p:spPr>
-          <a:xfrm>
-            <a:off x="16429631" y="3618626"/>
-            <a:ext cx="2390719" cy="954107"/>
-          </a:xfrm>
-          <a:prstGeom prst="rect">
-            <a:avLst/>
-          </a:prstGeom>
-          <a:noFill/>
-        </p:spPr>
-        <p:txBody>
-          <a:bodyPr wrap="none" rtlCol="0">
-            <a:spAutoFit/>
-          </a:bodyPr>
-          <a:lstStyle/>
-          <a:p>
-            <a:pPr algn="ctr"/>
-            <a:r>
-              <a:rPr lang="en-US" sz="1400" b="1" dirty="0"/>
-              <a:t>3.v2. Filtered inserts:</a:t>
-            </a:r>
-          </a:p>
-          <a:p>
-            <a:pPr algn="ctr"/>
-            <a:r>
-              <a:rPr lang="en-US" sz="1400" dirty="0"/>
-              <a:t>- Insert length vs contig length</a:t>
-            </a:r>
-          </a:p>
-          <a:p>
-            <a:pPr algn="ctr"/>
-            <a:r>
-              <a:rPr lang="en-US" sz="1400" dirty="0"/>
-              <a:t>- False duplications</a:t>
-            </a:r>
-          </a:p>
-          <a:p>
-            <a:pPr algn="ctr"/>
-            <a:r>
-              <a:rPr lang="en-US" sz="1400" i="1" dirty="0">
-                <a:solidFill>
-                  <a:schemeClr val="accent2">
-                    <a:lumMod val="75000"/>
-                  </a:schemeClr>
-                </a:solidFill>
-              </a:rPr>
-              <a:t>Alternate thresholds</a:t>
-            </a:r>
-          </a:p>
-        </p:txBody>
-      </p:sp>
-      <p:sp>
-        <p:nvSpPr>
-          <p:cNvPr id="14" name="TextBox 13">
-            <a:extLst>
-              <a:ext uri="{FF2B5EF4-FFF2-40B4-BE49-F238E27FC236}">
-                <a16:creationId xmlns:a16="http://schemas.microsoft.com/office/drawing/2014/main" id="{8D50C5D7-03F6-1846-A65C-2427BD56E71C}"/>
-              </a:ext>
-            </a:extLst>
-          </p:cNvPr>
-          <p:cNvSpPr txBox="1"/>
-          <p:nvPr/>
-        </p:nvSpPr>
-        <p:spPr>
-          <a:xfrm>
-            <a:off x="6034349" y="5151090"/>
-            <a:ext cx="2390719" cy="1169551"/>
-          </a:xfrm>
-          <a:prstGeom prst="rect">
-            <a:avLst/>
-          </a:prstGeom>
-          <a:noFill/>
-        </p:spPr>
-        <p:txBody>
-          <a:bodyPr wrap="none" rtlCol="0">
-            <a:spAutoFit/>
-          </a:bodyPr>
-          <a:lstStyle/>
-          <a:p>
-            <a:pPr algn="ctr"/>
-            <a:r>
-              <a:rPr lang="en-US" sz="1400" b="1" dirty="0"/>
-              <a:t>4.v1. Filtered inserts:</a:t>
-            </a:r>
-          </a:p>
-          <a:p>
-            <a:pPr algn="ctr"/>
-            <a:r>
-              <a:rPr lang="en-US" sz="1400" dirty="0"/>
-              <a:t>- Insert length vs contig length</a:t>
-            </a:r>
-          </a:p>
-          <a:p>
-            <a:pPr algn="ctr"/>
-            <a:r>
-              <a:rPr lang="en-US" sz="1400" dirty="0"/>
-              <a:t>- False duplications</a:t>
-            </a:r>
-          </a:p>
-          <a:p>
-            <a:pPr algn="ctr"/>
-            <a:r>
-              <a:rPr lang="en-US" sz="1400" dirty="0"/>
-              <a:t>- Flanked by Ns</a:t>
-            </a:r>
-          </a:p>
-          <a:p>
-            <a:pPr algn="ctr"/>
-            <a:r>
-              <a:rPr lang="en-US" sz="1400" i="1" dirty="0">
-                <a:solidFill>
-                  <a:schemeClr val="accent1">
-                    <a:lumMod val="75000"/>
-                  </a:schemeClr>
-                </a:solidFill>
-              </a:rPr>
-              <a:t>Standard thresholds</a:t>
-            </a:r>
-          </a:p>
-        </p:txBody>
-      </p:sp>
-      <p:sp>
-        <p:nvSpPr>
-          <p:cNvPr id="15" name="TextBox 14">
-            <a:extLst>
-              <a:ext uri="{FF2B5EF4-FFF2-40B4-BE49-F238E27FC236}">
-                <a16:creationId xmlns:a16="http://schemas.microsoft.com/office/drawing/2014/main" id="{07382D8C-47B0-3D47-9A60-CC4C6989A90D}"/>
-              </a:ext>
-            </a:extLst>
-          </p:cNvPr>
-          <p:cNvSpPr txBox="1"/>
-          <p:nvPr/>
-        </p:nvSpPr>
-        <p:spPr>
-          <a:xfrm>
-            <a:off x="16402020" y="5151090"/>
-            <a:ext cx="2390719" cy="1169551"/>
-          </a:xfrm>
-          <a:prstGeom prst="rect">
-            <a:avLst/>
-          </a:prstGeom>
-          <a:noFill/>
-        </p:spPr>
-        <p:txBody>
-          <a:bodyPr wrap="none" rtlCol="0">
-            <a:spAutoFit/>
-          </a:bodyPr>
-          <a:lstStyle/>
-          <a:p>
-            <a:pPr algn="ctr"/>
-            <a:r>
-              <a:rPr lang="en-US" sz="1400" b="1" dirty="0"/>
-              <a:t>4.v2. Filtered inserts:</a:t>
-            </a:r>
-          </a:p>
-          <a:p>
-            <a:pPr algn="ctr"/>
-            <a:r>
-              <a:rPr lang="en-US" sz="1400" dirty="0"/>
-              <a:t>- Insert length vs contig length</a:t>
-            </a:r>
-          </a:p>
-          <a:p>
-            <a:pPr algn="ctr"/>
-            <a:r>
-              <a:rPr lang="en-US" sz="1400" dirty="0"/>
-              <a:t>- False duplications</a:t>
-            </a:r>
-          </a:p>
-          <a:p>
-            <a:pPr algn="ctr"/>
-            <a:r>
-              <a:rPr lang="en-US" sz="1400" dirty="0"/>
-              <a:t>- Flanked by Ns</a:t>
-            </a:r>
-          </a:p>
-          <a:p>
-            <a:pPr algn="ctr"/>
-            <a:r>
-              <a:rPr lang="en-US" sz="1400" i="1" dirty="0">
-                <a:solidFill>
-                  <a:schemeClr val="accent2">
-                    <a:lumMod val="75000"/>
-                  </a:schemeClr>
-                </a:solidFill>
-              </a:rPr>
-              <a:t>Alternate thresholds</a:t>
-            </a:r>
-          </a:p>
-        </p:txBody>
-      </p:sp>
-      <p:sp>
-        <p:nvSpPr>
-          <p:cNvPr id="16" name="TextBox 15">
-            <a:extLst>
-              <a:ext uri="{FF2B5EF4-FFF2-40B4-BE49-F238E27FC236}">
-                <a16:creationId xmlns:a16="http://schemas.microsoft.com/office/drawing/2014/main" id="{4B7531FA-3444-C844-9A50-CF0405B132EA}"/>
-              </a:ext>
-            </a:extLst>
-          </p:cNvPr>
-          <p:cNvSpPr txBox="1"/>
-          <p:nvPr/>
-        </p:nvSpPr>
-        <p:spPr>
-          <a:xfrm>
-            <a:off x="5976550" y="6770845"/>
-            <a:ext cx="2390719" cy="1384995"/>
-          </a:xfrm>
-          <a:prstGeom prst="rect">
-            <a:avLst/>
-          </a:prstGeom>
-          <a:noFill/>
-        </p:spPr>
-        <p:txBody>
-          <a:bodyPr wrap="none" rtlCol="0">
-            <a:spAutoFit/>
-          </a:bodyPr>
-          <a:lstStyle/>
-          <a:p>
-            <a:pPr algn="ctr"/>
-            <a:r>
-              <a:rPr lang="en-US" sz="1400" b="1" dirty="0"/>
-              <a:t>5.v1. Filtered inserts:</a:t>
-            </a:r>
-          </a:p>
-          <a:p>
-            <a:pPr algn="ctr"/>
-            <a:r>
-              <a:rPr lang="en-US" sz="1400" dirty="0"/>
-              <a:t>- Insert length vs contig length</a:t>
-            </a:r>
-          </a:p>
-          <a:p>
-            <a:pPr algn="ctr"/>
-            <a:r>
-              <a:rPr lang="en-US" sz="1400" dirty="0"/>
-              <a:t>- False duplications</a:t>
-            </a:r>
-          </a:p>
-          <a:p>
-            <a:pPr algn="ctr"/>
-            <a:r>
-              <a:rPr lang="en-US" sz="1400" dirty="0"/>
-              <a:t>- Flanked by Ns</a:t>
-            </a:r>
-          </a:p>
-          <a:p>
-            <a:pPr algn="ctr"/>
-            <a:r>
-              <a:rPr lang="en-US" sz="1400" dirty="0"/>
-              <a:t>- Non-target bacteria</a:t>
-            </a:r>
-          </a:p>
-          <a:p>
-            <a:pPr algn="ctr"/>
-            <a:r>
-              <a:rPr lang="en-US" sz="1400" i="1" dirty="0">
-                <a:solidFill>
-                  <a:schemeClr val="accent1">
-                    <a:lumMod val="75000"/>
-                  </a:schemeClr>
-                </a:solidFill>
-              </a:rPr>
-              <a:t>Standard thresholds</a:t>
-            </a:r>
-          </a:p>
-        </p:txBody>
-      </p:sp>
-      <p:sp>
-        <p:nvSpPr>
-          <p:cNvPr id="17" name="TextBox 16">
-            <a:extLst>
-              <a:ext uri="{FF2B5EF4-FFF2-40B4-BE49-F238E27FC236}">
-                <a16:creationId xmlns:a16="http://schemas.microsoft.com/office/drawing/2014/main" id="{348EFCF4-FD6E-5740-B1AD-844F219CBE0D}"/>
-              </a:ext>
-            </a:extLst>
-          </p:cNvPr>
-          <p:cNvSpPr txBox="1"/>
-          <p:nvPr/>
-        </p:nvSpPr>
-        <p:spPr>
-          <a:xfrm>
-            <a:off x="16475344" y="6770844"/>
-            <a:ext cx="2390719" cy="1384995"/>
-          </a:xfrm>
-          <a:prstGeom prst="rect">
-            <a:avLst/>
-          </a:prstGeom>
-          <a:noFill/>
-        </p:spPr>
-        <p:txBody>
-          <a:bodyPr wrap="none" rtlCol="0">
-            <a:spAutoFit/>
-          </a:bodyPr>
-          <a:lstStyle/>
-          <a:p>
-            <a:pPr algn="ctr"/>
-            <a:r>
-              <a:rPr lang="en-US" sz="1400" b="1" dirty="0"/>
-              <a:t>5.v2. Filtered inserts:</a:t>
-            </a:r>
-          </a:p>
-          <a:p>
-            <a:pPr algn="ctr"/>
-            <a:r>
-              <a:rPr lang="en-US" sz="1400" dirty="0"/>
-              <a:t>- Insert length vs contig length</a:t>
-            </a:r>
-          </a:p>
-          <a:p>
-            <a:pPr algn="ctr"/>
-            <a:r>
-              <a:rPr lang="en-US" sz="1400" dirty="0"/>
-              <a:t>- False duplications</a:t>
-            </a:r>
-          </a:p>
-          <a:p>
-            <a:pPr algn="ctr"/>
-            <a:r>
-              <a:rPr lang="en-US" sz="1400" dirty="0"/>
-              <a:t>- Flanked by Ns</a:t>
-            </a:r>
-          </a:p>
-          <a:p>
-            <a:pPr algn="ctr"/>
-            <a:r>
-              <a:rPr lang="en-US" sz="1400" dirty="0"/>
-              <a:t>- Non-target bacteria</a:t>
-            </a:r>
-          </a:p>
-          <a:p>
-            <a:pPr algn="ctr"/>
-            <a:r>
-              <a:rPr lang="en-US" sz="1400" i="1" dirty="0">
-                <a:solidFill>
-                  <a:schemeClr val="accent2">
-                    <a:lumMod val="75000"/>
-                  </a:schemeClr>
-                </a:solidFill>
-              </a:rPr>
-              <a:t>Alternate thresholds</a:t>
-            </a:r>
-          </a:p>
-        </p:txBody>
-      </p:sp>
-      <p:sp>
-        <p:nvSpPr>
-          <p:cNvPr id="20" name="TextBox 19">
-            <a:extLst>
-              <a:ext uri="{FF2B5EF4-FFF2-40B4-BE49-F238E27FC236}">
-                <a16:creationId xmlns:a16="http://schemas.microsoft.com/office/drawing/2014/main" id="{FA6803DC-BA7F-8348-B934-4F6965560027}"/>
-              </a:ext>
-            </a:extLst>
-          </p:cNvPr>
-          <p:cNvSpPr txBox="1"/>
-          <p:nvPr/>
-        </p:nvSpPr>
-        <p:spPr>
-          <a:xfrm>
-            <a:off x="7246584" y="10949865"/>
-            <a:ext cx="2390719" cy="1600438"/>
-          </a:xfrm>
-          <a:prstGeom prst="rect">
-            <a:avLst/>
-          </a:prstGeom>
-          <a:noFill/>
-        </p:spPr>
-        <p:txBody>
-          <a:bodyPr wrap="none" rtlCol="0">
-            <a:spAutoFit/>
-          </a:bodyPr>
-          <a:lstStyle/>
-          <a:p>
-            <a:pPr algn="ctr"/>
-            <a:r>
-              <a:rPr lang="en-US" sz="1400" b="1" dirty="0"/>
-              <a:t>7.v2. Unique filtered inserts:</a:t>
-            </a:r>
-          </a:p>
-          <a:p>
-            <a:pPr algn="ctr"/>
-            <a:r>
-              <a:rPr lang="en-US" sz="1400" dirty="0"/>
-              <a:t>- Insert length vs contig length</a:t>
-            </a:r>
-          </a:p>
-          <a:p>
-            <a:pPr algn="ctr"/>
-            <a:r>
-              <a:rPr lang="en-US" sz="1400" dirty="0"/>
-              <a:t>- False duplications</a:t>
-            </a:r>
-          </a:p>
-          <a:p>
-            <a:pPr algn="ctr"/>
-            <a:r>
-              <a:rPr lang="en-US" sz="1400" dirty="0"/>
-              <a:t>- Flanked by Ns</a:t>
-            </a:r>
-          </a:p>
-          <a:p>
-            <a:pPr algn="ctr"/>
-            <a:r>
-              <a:rPr lang="en-US" sz="1400" dirty="0"/>
-              <a:t>- Non-target bacteria</a:t>
-            </a:r>
-          </a:p>
-          <a:p>
-            <a:pPr algn="ctr"/>
-            <a:r>
-              <a:rPr lang="en-US" sz="1400" dirty="0"/>
-              <a:t>- Sequence </a:t>
-            </a:r>
-            <a:r>
-              <a:rPr lang="en-US" sz="1400" dirty="0" err="1"/>
-              <a:t>complxity</a:t>
-            </a:r>
-            <a:endParaRPr lang="en-US" sz="1400" dirty="0"/>
-          </a:p>
-          <a:p>
-            <a:pPr algn="ctr"/>
-            <a:r>
-              <a:rPr lang="en-US" sz="1400" i="1" dirty="0">
-                <a:solidFill>
-                  <a:schemeClr val="accent1">
-                    <a:lumMod val="75000"/>
-                  </a:schemeClr>
-                </a:solidFill>
-              </a:rPr>
-              <a:t>Standard thresholds</a:t>
-            </a:r>
-          </a:p>
-        </p:txBody>
-      </p:sp>
-      <p:sp>
-        <p:nvSpPr>
-          <p:cNvPr id="23" name="TextBox 22">
-            <a:extLst>
-              <a:ext uri="{FF2B5EF4-FFF2-40B4-BE49-F238E27FC236}">
-                <a16:creationId xmlns:a16="http://schemas.microsoft.com/office/drawing/2014/main" id="{D458E0FA-05D3-044E-8785-C34DFEB30E50}"/>
-              </a:ext>
-            </a:extLst>
-          </p:cNvPr>
-          <p:cNvSpPr txBox="1"/>
-          <p:nvPr/>
-        </p:nvSpPr>
-        <p:spPr>
-          <a:xfrm>
-            <a:off x="14832565" y="10949865"/>
-            <a:ext cx="2921826" cy="1600438"/>
-          </a:xfrm>
-          <a:prstGeom prst="rect">
-            <a:avLst/>
-          </a:prstGeom>
-          <a:noFill/>
-        </p:spPr>
-        <p:txBody>
-          <a:bodyPr wrap="none" rtlCol="0">
-            <a:spAutoFit/>
-          </a:bodyPr>
-          <a:lstStyle/>
-          <a:p>
-            <a:pPr algn="ctr"/>
-            <a:r>
-              <a:rPr lang="en-US" sz="1400" b="1" dirty="0"/>
-              <a:t>7.v3. Filtered inserts with duplicates:</a:t>
-            </a:r>
-          </a:p>
-          <a:p>
-            <a:pPr algn="ctr"/>
-            <a:r>
-              <a:rPr lang="en-US" sz="1400" dirty="0"/>
-              <a:t>- Insert length vs contig length</a:t>
-            </a:r>
-          </a:p>
-          <a:p>
-            <a:pPr algn="ctr"/>
-            <a:r>
-              <a:rPr lang="en-US" sz="1400" dirty="0"/>
-              <a:t>- False duplications</a:t>
-            </a:r>
-          </a:p>
-          <a:p>
-            <a:pPr algn="ctr"/>
-            <a:r>
-              <a:rPr lang="en-US" sz="1400" dirty="0"/>
-              <a:t>- Flanked by Ns</a:t>
-            </a:r>
-          </a:p>
-          <a:p>
-            <a:pPr algn="ctr"/>
-            <a:r>
-              <a:rPr lang="en-US" sz="1400" dirty="0"/>
-              <a:t>- Non-target bacteria</a:t>
-            </a:r>
-          </a:p>
-          <a:p>
-            <a:pPr algn="ctr"/>
-            <a:r>
-              <a:rPr lang="en-US" sz="1400" dirty="0"/>
-              <a:t>- Sequence complexity</a:t>
-            </a:r>
-          </a:p>
-          <a:p>
-            <a:pPr algn="ctr"/>
-            <a:r>
-              <a:rPr lang="en-US" sz="1400" i="1" dirty="0">
-                <a:solidFill>
-                  <a:schemeClr val="accent2">
-                    <a:lumMod val="75000"/>
-                  </a:schemeClr>
-                </a:solidFill>
-              </a:rPr>
-              <a:t>Alternate thresholds</a:t>
-            </a:r>
-          </a:p>
-        </p:txBody>
-      </p:sp>
-      <p:sp>
-        <p:nvSpPr>
-          <p:cNvPr id="24" name="TextBox 23">
-            <a:extLst>
-              <a:ext uri="{FF2B5EF4-FFF2-40B4-BE49-F238E27FC236}">
-                <a16:creationId xmlns:a16="http://schemas.microsoft.com/office/drawing/2014/main" id="{F85D64B0-5957-B04E-8FD0-BC829C50747A}"/>
-              </a:ext>
-            </a:extLst>
-          </p:cNvPr>
-          <p:cNvSpPr txBox="1"/>
-          <p:nvPr/>
-        </p:nvSpPr>
-        <p:spPr>
-          <a:xfrm>
-            <a:off x="17708512" y="10949865"/>
-            <a:ext cx="2390719" cy="1600438"/>
-          </a:xfrm>
-          <a:prstGeom prst="rect">
-            <a:avLst/>
-          </a:prstGeom>
-          <a:noFill/>
-        </p:spPr>
-        <p:txBody>
-          <a:bodyPr wrap="none" rtlCol="0">
-            <a:spAutoFit/>
-          </a:bodyPr>
-          <a:lstStyle/>
-          <a:p>
-            <a:pPr algn="ctr"/>
-            <a:r>
-              <a:rPr lang="en-US" sz="1400" b="1" dirty="0"/>
-              <a:t>7.v4. Unique filtered inserts:</a:t>
-            </a:r>
-          </a:p>
-          <a:p>
-            <a:pPr algn="ctr"/>
-            <a:r>
-              <a:rPr lang="en-US" sz="1400" dirty="0"/>
-              <a:t>- Insert length vs contig length</a:t>
-            </a:r>
-          </a:p>
-          <a:p>
-            <a:pPr algn="ctr"/>
-            <a:r>
-              <a:rPr lang="en-US" sz="1400" dirty="0"/>
-              <a:t>- False duplications</a:t>
-            </a:r>
-          </a:p>
-          <a:p>
-            <a:pPr algn="ctr"/>
-            <a:r>
-              <a:rPr lang="en-US" sz="1400" dirty="0"/>
-              <a:t>- Flanked by Ns</a:t>
-            </a:r>
-          </a:p>
-          <a:p>
-            <a:pPr algn="ctr"/>
-            <a:r>
-              <a:rPr lang="en-US" sz="1400" dirty="0"/>
-              <a:t>- Non-target bacteria</a:t>
-            </a:r>
-          </a:p>
-          <a:p>
-            <a:pPr algn="ctr"/>
-            <a:r>
-              <a:rPr lang="en-US" sz="1400" dirty="0"/>
-              <a:t>- Sequence complexity</a:t>
-            </a:r>
-          </a:p>
-          <a:p>
-            <a:pPr algn="ctr"/>
-            <a:r>
-              <a:rPr lang="en-US" sz="1400" i="1" dirty="0">
-                <a:solidFill>
-                  <a:schemeClr val="accent2">
-                    <a:lumMod val="75000"/>
-                  </a:schemeClr>
-                </a:solidFill>
-              </a:rPr>
-              <a:t>Alternate thresholds</a:t>
-            </a:r>
-          </a:p>
-        </p:txBody>
-      </p:sp>
-      <p:sp>
-        <p:nvSpPr>
-          <p:cNvPr id="27" name="TextBox 26">
-            <a:extLst>
-              <a:ext uri="{FF2B5EF4-FFF2-40B4-BE49-F238E27FC236}">
-                <a16:creationId xmlns:a16="http://schemas.microsoft.com/office/drawing/2014/main" id="{38099BC1-7C5A-7046-99A9-6BBCB024205D}"/>
-              </a:ext>
-            </a:extLst>
-          </p:cNvPr>
-          <p:cNvSpPr txBox="1"/>
-          <p:nvPr/>
-        </p:nvSpPr>
-        <p:spPr>
-          <a:xfrm>
-            <a:off x="4406137" y="10949865"/>
-            <a:ext cx="2921826" cy="1600438"/>
-          </a:xfrm>
-          <a:prstGeom prst="rect">
-            <a:avLst/>
-          </a:prstGeom>
-          <a:noFill/>
-        </p:spPr>
-        <p:txBody>
-          <a:bodyPr wrap="none" rtlCol="0">
-            <a:spAutoFit/>
-          </a:bodyPr>
-          <a:lstStyle/>
-          <a:p>
-            <a:pPr algn="ctr"/>
-            <a:r>
-              <a:rPr lang="en-US" sz="1400" b="1" dirty="0"/>
-              <a:t>7.v1. Filtered inserts with duplicates:</a:t>
-            </a:r>
-          </a:p>
-          <a:p>
-            <a:pPr algn="ctr"/>
-            <a:r>
-              <a:rPr lang="en-US" sz="1400" dirty="0"/>
-              <a:t>- Insert length vs contig length</a:t>
-            </a:r>
-          </a:p>
-          <a:p>
-            <a:pPr algn="ctr"/>
-            <a:r>
-              <a:rPr lang="en-US" sz="1400" dirty="0"/>
-              <a:t>- False duplications</a:t>
-            </a:r>
-          </a:p>
-          <a:p>
-            <a:pPr algn="ctr"/>
-            <a:r>
-              <a:rPr lang="en-US" sz="1400" dirty="0"/>
-              <a:t>- Flanked by Ns</a:t>
-            </a:r>
-          </a:p>
-          <a:p>
-            <a:pPr algn="ctr"/>
-            <a:r>
-              <a:rPr lang="en-US" sz="1400" dirty="0"/>
-              <a:t>- Non-target bacteria</a:t>
-            </a:r>
-          </a:p>
-          <a:p>
-            <a:pPr algn="ctr"/>
-            <a:r>
-              <a:rPr lang="en-US" sz="1400" dirty="0"/>
-              <a:t>- Sequence complexity</a:t>
-            </a:r>
-          </a:p>
-          <a:p>
-            <a:pPr algn="ctr"/>
-            <a:r>
-              <a:rPr lang="en-US" sz="1400" i="1" dirty="0">
-                <a:solidFill>
-                  <a:schemeClr val="accent1">
-                    <a:lumMod val="75000"/>
-                  </a:schemeClr>
-                </a:solidFill>
-              </a:rPr>
-              <a:t>Standard thresholds</a:t>
-            </a:r>
-          </a:p>
-        </p:txBody>
-      </p:sp>
-      <p:sp>
-        <p:nvSpPr>
-          <p:cNvPr id="28" name="TextBox 27">
-            <a:extLst>
-              <a:ext uri="{FF2B5EF4-FFF2-40B4-BE49-F238E27FC236}">
-                <a16:creationId xmlns:a16="http://schemas.microsoft.com/office/drawing/2014/main" id="{6EF5C63B-4DB0-AD4D-911F-26DE25E9492B}"/>
-              </a:ext>
-            </a:extLst>
-          </p:cNvPr>
-          <p:cNvSpPr txBox="1"/>
-          <p:nvPr/>
-        </p:nvSpPr>
-        <p:spPr>
-          <a:xfrm>
-            <a:off x="6777830" y="13032520"/>
-            <a:ext cx="3365665" cy="1600438"/>
-          </a:xfrm>
-          <a:prstGeom prst="rect">
-            <a:avLst/>
-          </a:prstGeom>
-          <a:noFill/>
-        </p:spPr>
-        <p:txBody>
-          <a:bodyPr wrap="none" rtlCol="0">
-            <a:spAutoFit/>
-          </a:bodyPr>
-          <a:lstStyle/>
-          <a:p>
-            <a:pPr algn="ctr"/>
-            <a:r>
-              <a:rPr lang="en-US" sz="1400" b="1" dirty="0"/>
-              <a:t>8.v1. Unique putatively old filtered inserts:</a:t>
-            </a:r>
-          </a:p>
-          <a:p>
-            <a:pPr algn="ctr"/>
-            <a:r>
-              <a:rPr lang="en-US" sz="1400" dirty="0"/>
-              <a:t>- Insert length vs contig length</a:t>
-            </a:r>
-          </a:p>
-          <a:p>
-            <a:pPr algn="ctr"/>
-            <a:r>
-              <a:rPr lang="en-US" sz="1400" dirty="0"/>
-              <a:t>- False duplications</a:t>
-            </a:r>
-          </a:p>
-          <a:p>
-            <a:pPr algn="ctr"/>
-            <a:r>
-              <a:rPr lang="en-US" sz="1400" dirty="0"/>
-              <a:t>- Flanked by Ns</a:t>
-            </a:r>
-          </a:p>
-          <a:p>
-            <a:pPr algn="ctr"/>
-            <a:r>
-              <a:rPr lang="en-US" sz="1400" dirty="0"/>
-              <a:t>- Non-target bacteria</a:t>
-            </a:r>
-          </a:p>
-          <a:p>
-            <a:pPr algn="ctr"/>
-            <a:r>
-              <a:rPr lang="en-US" sz="1400" dirty="0"/>
-              <a:t>- Sequence complexity</a:t>
-            </a:r>
-          </a:p>
-          <a:p>
-            <a:pPr algn="ctr"/>
-            <a:r>
-              <a:rPr lang="en-US" sz="1400" i="1" dirty="0">
-                <a:solidFill>
-                  <a:schemeClr val="accent1">
-                    <a:lumMod val="75000"/>
-                  </a:schemeClr>
-                </a:solidFill>
-              </a:rPr>
-              <a:t>Standard thresholds</a:t>
-            </a:r>
-          </a:p>
-        </p:txBody>
-      </p:sp>
-      <p:sp>
-        <p:nvSpPr>
-          <p:cNvPr id="30" name="TextBox 29">
-            <a:extLst>
-              <a:ext uri="{FF2B5EF4-FFF2-40B4-BE49-F238E27FC236}">
-                <a16:creationId xmlns:a16="http://schemas.microsoft.com/office/drawing/2014/main" id="{F1C9C604-83BF-D946-9DA4-D7F31A751C55}"/>
-              </a:ext>
-            </a:extLst>
-          </p:cNvPr>
-          <p:cNvSpPr txBox="1"/>
-          <p:nvPr/>
-        </p:nvSpPr>
-        <p:spPr>
-          <a:xfrm>
-            <a:off x="17183230" y="13032520"/>
-            <a:ext cx="3365665" cy="1600438"/>
-          </a:xfrm>
-          <a:prstGeom prst="rect">
-            <a:avLst/>
-          </a:prstGeom>
-          <a:noFill/>
-        </p:spPr>
-        <p:txBody>
-          <a:bodyPr wrap="none" rtlCol="0">
-            <a:spAutoFit/>
-          </a:bodyPr>
-          <a:lstStyle/>
-          <a:p>
-            <a:pPr algn="ctr"/>
-            <a:r>
-              <a:rPr lang="en-US" sz="1400" b="1" dirty="0"/>
-              <a:t>8.v2. Unique putatively old filtered inserts:</a:t>
-            </a:r>
-          </a:p>
-          <a:p>
-            <a:pPr algn="ctr"/>
-            <a:r>
-              <a:rPr lang="en-US" sz="1400" dirty="0"/>
-              <a:t>- Insert length vs contig length</a:t>
-            </a:r>
-          </a:p>
-          <a:p>
-            <a:pPr algn="ctr"/>
-            <a:r>
-              <a:rPr lang="en-US" sz="1400" dirty="0"/>
-              <a:t>- False duplications</a:t>
-            </a:r>
-          </a:p>
-          <a:p>
-            <a:pPr algn="ctr"/>
-            <a:r>
-              <a:rPr lang="en-US" sz="1400" dirty="0"/>
-              <a:t>- Flanked by Ns</a:t>
-            </a:r>
-          </a:p>
-          <a:p>
-            <a:pPr algn="ctr"/>
-            <a:r>
-              <a:rPr lang="en-US" sz="1400" dirty="0"/>
-              <a:t>- Non-target bacteria</a:t>
-            </a:r>
-          </a:p>
-          <a:p>
-            <a:pPr algn="ctr"/>
-            <a:r>
-              <a:rPr lang="en-US" sz="1400" dirty="0"/>
-              <a:t>- Sequence complexity</a:t>
-            </a:r>
-          </a:p>
-          <a:p>
-            <a:pPr algn="ctr"/>
-            <a:r>
-              <a:rPr lang="en-US" sz="1400" i="1" dirty="0">
-                <a:solidFill>
-                  <a:schemeClr val="accent2">
-                    <a:lumMod val="75000"/>
-                  </a:schemeClr>
-                </a:solidFill>
-              </a:rPr>
-              <a:t>Alternate thresholds</a:t>
-            </a:r>
-          </a:p>
-        </p:txBody>
-      </p:sp>
-      <p:cxnSp>
-        <p:nvCxnSpPr>
-          <p:cNvPr id="33" name="Straight Arrow Connector 32">
-            <a:extLst>
-              <a:ext uri="{FF2B5EF4-FFF2-40B4-BE49-F238E27FC236}">
-                <a16:creationId xmlns:a16="http://schemas.microsoft.com/office/drawing/2014/main" id="{9A542E3C-41E7-FD46-9C1D-F365971515B2}"/>
-              </a:ext>
-            </a:extLst>
-          </p:cNvPr>
-          <p:cNvCxnSpPr>
-            <a:cxnSpLocks/>
-          </p:cNvCxnSpPr>
-          <p:nvPr/>
-        </p:nvCxnSpPr>
-        <p:spPr>
-          <a:xfrm flipH="1">
-            <a:off x="8425068" y="625682"/>
-            <a:ext cx="3114660" cy="843487"/>
-          </a:xfrm>
-          <a:prstGeom prst="straightConnector1">
-            <a:avLst/>
-          </a:prstGeom>
-          <a:ln>
-            <a:solidFill>
-              <a:schemeClr val="tx1"/>
-            </a:solidFill>
-            <a:tailEnd type="triangle"/>
-          </a:ln>
-        </p:spPr>
-        <p:style>
-          <a:lnRef idx="1">
-            <a:schemeClr val="accent1"/>
-          </a:lnRef>
-          <a:fillRef idx="0">
-            <a:schemeClr val="accent1"/>
-          </a:fillRef>
-          <a:effectRef idx="0">
-            <a:schemeClr val="accent1"/>
-          </a:effectRef>
-          <a:fontRef idx="minor">
-            <a:schemeClr val="tx1"/>
-          </a:fontRef>
-        </p:style>
-      </p:cxnSp>
-      <p:cxnSp>
-        <p:nvCxnSpPr>
-          <p:cNvPr id="35" name="Straight Arrow Connector 34">
-            <a:extLst>
-              <a:ext uri="{FF2B5EF4-FFF2-40B4-BE49-F238E27FC236}">
-                <a16:creationId xmlns:a16="http://schemas.microsoft.com/office/drawing/2014/main" id="{B1618980-A340-1F47-82EA-5C084CF4A795}"/>
-              </a:ext>
-            </a:extLst>
-          </p:cNvPr>
-          <p:cNvCxnSpPr>
-            <a:cxnSpLocks/>
-          </p:cNvCxnSpPr>
-          <p:nvPr/>
-        </p:nvCxnSpPr>
-        <p:spPr>
-          <a:xfrm>
-            <a:off x="13198236" y="625682"/>
-            <a:ext cx="3114660" cy="843487"/>
-          </a:xfrm>
-          <a:prstGeom prst="straightConnector1">
-            <a:avLst/>
-          </a:prstGeom>
-          <a:ln>
-            <a:solidFill>
-              <a:schemeClr val="tx1"/>
-            </a:solidFill>
-            <a:tailEnd type="triangle"/>
-          </a:ln>
-        </p:spPr>
-        <p:style>
-          <a:lnRef idx="1">
-            <a:schemeClr val="accent1"/>
-          </a:lnRef>
-          <a:fillRef idx="0">
-            <a:schemeClr val="accent1"/>
-          </a:fillRef>
-          <a:effectRef idx="0">
-            <a:schemeClr val="accent1"/>
-          </a:effectRef>
-          <a:fontRef idx="minor">
-            <a:schemeClr val="tx1"/>
-          </a:fontRef>
-        </p:style>
-      </p:cxnSp>
-      <p:cxnSp>
-        <p:nvCxnSpPr>
-          <p:cNvPr id="41" name="Straight Arrow Connector 40">
-            <a:extLst>
-              <a:ext uri="{FF2B5EF4-FFF2-40B4-BE49-F238E27FC236}">
-                <a16:creationId xmlns:a16="http://schemas.microsoft.com/office/drawing/2014/main" id="{1E10A0AC-93A2-0041-BFEB-449ECABBB3C5}"/>
-              </a:ext>
-            </a:extLst>
-          </p:cNvPr>
-          <p:cNvCxnSpPr>
-            <a:cxnSpLocks/>
-          </p:cNvCxnSpPr>
-          <p:nvPr/>
-        </p:nvCxnSpPr>
-        <p:spPr>
-          <a:xfrm flipH="1">
-            <a:off x="5867048" y="10156041"/>
-            <a:ext cx="545359" cy="650842"/>
-          </a:xfrm>
-          <a:prstGeom prst="straightConnector1">
-            <a:avLst/>
-          </a:prstGeom>
-          <a:ln>
-            <a:solidFill>
-              <a:schemeClr val="tx1"/>
-            </a:solidFill>
-            <a:tailEnd type="triangle"/>
-          </a:ln>
-        </p:spPr>
-        <p:style>
-          <a:lnRef idx="1">
-            <a:schemeClr val="accent1"/>
-          </a:lnRef>
-          <a:fillRef idx="0">
-            <a:schemeClr val="accent1"/>
-          </a:fillRef>
-          <a:effectRef idx="0">
-            <a:schemeClr val="accent1"/>
-          </a:effectRef>
-          <a:fontRef idx="minor">
-            <a:schemeClr val="tx1"/>
-          </a:fontRef>
-        </p:style>
-      </p:cxnSp>
-      <p:cxnSp>
-        <p:nvCxnSpPr>
-          <p:cNvPr id="43" name="Straight Arrow Connector 42">
-            <a:extLst>
-              <a:ext uri="{FF2B5EF4-FFF2-40B4-BE49-F238E27FC236}">
-                <a16:creationId xmlns:a16="http://schemas.microsoft.com/office/drawing/2014/main" id="{AC795674-A231-1A43-9999-A5CAF1038820}"/>
-              </a:ext>
-            </a:extLst>
-          </p:cNvPr>
-          <p:cNvCxnSpPr>
-            <a:cxnSpLocks/>
-          </p:cNvCxnSpPr>
-          <p:nvPr/>
-        </p:nvCxnSpPr>
-        <p:spPr>
-          <a:xfrm>
-            <a:off x="7915304" y="10150685"/>
-            <a:ext cx="545359" cy="650842"/>
-          </a:xfrm>
-          <a:prstGeom prst="straightConnector1">
-            <a:avLst/>
-          </a:prstGeom>
-          <a:ln>
-            <a:solidFill>
-              <a:schemeClr val="tx1"/>
-            </a:solidFill>
-            <a:tailEnd type="triangle"/>
-          </a:ln>
-        </p:spPr>
-        <p:style>
-          <a:lnRef idx="1">
-            <a:schemeClr val="accent1"/>
-          </a:lnRef>
-          <a:fillRef idx="0">
-            <a:schemeClr val="accent1"/>
-          </a:fillRef>
-          <a:effectRef idx="0">
-            <a:schemeClr val="accent1"/>
-          </a:effectRef>
-          <a:fontRef idx="minor">
-            <a:schemeClr val="tx1"/>
-          </a:fontRef>
-        </p:style>
-      </p:cxnSp>
-      <p:cxnSp>
-        <p:nvCxnSpPr>
-          <p:cNvPr id="46" name="Straight Arrow Connector 45">
-            <a:extLst>
-              <a:ext uri="{FF2B5EF4-FFF2-40B4-BE49-F238E27FC236}">
-                <a16:creationId xmlns:a16="http://schemas.microsoft.com/office/drawing/2014/main" id="{331A2F39-6529-784E-8A96-E2E80E7CDD48}"/>
-              </a:ext>
-            </a:extLst>
-          </p:cNvPr>
-          <p:cNvCxnSpPr>
-            <a:cxnSpLocks/>
-          </p:cNvCxnSpPr>
-          <p:nvPr/>
-        </p:nvCxnSpPr>
-        <p:spPr>
-          <a:xfrm flipH="1">
-            <a:off x="16346418" y="10150685"/>
-            <a:ext cx="545359" cy="650842"/>
-          </a:xfrm>
-          <a:prstGeom prst="straightConnector1">
-            <a:avLst/>
-          </a:prstGeom>
-          <a:ln>
-            <a:solidFill>
-              <a:schemeClr val="tx1"/>
-            </a:solidFill>
-            <a:tailEnd type="triangle"/>
-          </a:ln>
-        </p:spPr>
-        <p:style>
-          <a:lnRef idx="1">
-            <a:schemeClr val="accent1"/>
-          </a:lnRef>
-          <a:fillRef idx="0">
-            <a:schemeClr val="accent1"/>
-          </a:fillRef>
-          <a:effectRef idx="0">
-            <a:schemeClr val="accent1"/>
-          </a:effectRef>
-          <a:fontRef idx="minor">
-            <a:schemeClr val="tx1"/>
-          </a:fontRef>
-        </p:style>
-      </p:cxnSp>
-      <p:cxnSp>
-        <p:nvCxnSpPr>
-          <p:cNvPr id="47" name="Straight Arrow Connector 46">
-            <a:extLst>
-              <a:ext uri="{FF2B5EF4-FFF2-40B4-BE49-F238E27FC236}">
-                <a16:creationId xmlns:a16="http://schemas.microsoft.com/office/drawing/2014/main" id="{D7705B34-B6D8-7B4E-8B80-B3788AD858D7}"/>
-              </a:ext>
-            </a:extLst>
-          </p:cNvPr>
-          <p:cNvCxnSpPr>
-            <a:cxnSpLocks/>
-          </p:cNvCxnSpPr>
-          <p:nvPr/>
-        </p:nvCxnSpPr>
-        <p:spPr>
-          <a:xfrm>
-            <a:off x="18394674" y="10145329"/>
-            <a:ext cx="545359" cy="650842"/>
-          </a:xfrm>
-          <a:prstGeom prst="straightConnector1">
-            <a:avLst/>
-          </a:prstGeom>
-          <a:ln>
-            <a:solidFill>
-              <a:schemeClr val="tx1"/>
-            </a:solidFill>
-            <a:tailEnd type="triangle"/>
-          </a:ln>
-        </p:spPr>
-        <p:style>
-          <a:lnRef idx="1">
-            <a:schemeClr val="accent1"/>
-          </a:lnRef>
-          <a:fillRef idx="0">
-            <a:schemeClr val="accent1"/>
-          </a:fillRef>
-          <a:effectRef idx="0">
-            <a:schemeClr val="accent1"/>
-          </a:effectRef>
-          <a:fontRef idx="minor">
-            <a:schemeClr val="tx1"/>
-          </a:fontRef>
-        </p:style>
-      </p:cxnSp>
-      <p:cxnSp>
-        <p:nvCxnSpPr>
-          <p:cNvPr id="50" name="Straight Arrow Connector 49">
-            <a:extLst>
-              <a:ext uri="{FF2B5EF4-FFF2-40B4-BE49-F238E27FC236}">
-                <a16:creationId xmlns:a16="http://schemas.microsoft.com/office/drawing/2014/main" id="{8D8769D7-6309-EF43-949D-3F5D6A94F337}"/>
-              </a:ext>
-            </a:extLst>
-          </p:cNvPr>
-          <p:cNvCxnSpPr>
-            <a:cxnSpLocks/>
-          </p:cNvCxnSpPr>
-          <p:nvPr/>
-        </p:nvCxnSpPr>
-        <p:spPr>
-          <a:xfrm>
-            <a:off x="7257320" y="1992389"/>
-            <a:ext cx="0" cy="447793"/>
-          </a:xfrm>
-          <a:prstGeom prst="straightConnector1">
-            <a:avLst/>
-          </a:prstGeom>
-          <a:ln>
-            <a:solidFill>
-              <a:schemeClr val="tx1"/>
-            </a:solidFill>
-            <a:tailEnd type="triangle"/>
-          </a:ln>
-        </p:spPr>
-        <p:style>
-          <a:lnRef idx="1">
-            <a:schemeClr val="accent1"/>
-          </a:lnRef>
-          <a:fillRef idx="0">
-            <a:schemeClr val="accent1"/>
-          </a:fillRef>
-          <a:effectRef idx="0">
-            <a:schemeClr val="accent1"/>
-          </a:effectRef>
-          <a:fontRef idx="minor">
-            <a:schemeClr val="tx1"/>
-          </a:fontRef>
-        </p:style>
-      </p:cxnSp>
-      <p:cxnSp>
-        <p:nvCxnSpPr>
-          <p:cNvPr id="52" name="Straight Arrow Connector 51">
-            <a:extLst>
-              <a:ext uri="{FF2B5EF4-FFF2-40B4-BE49-F238E27FC236}">
-                <a16:creationId xmlns:a16="http://schemas.microsoft.com/office/drawing/2014/main" id="{BEF9459E-08E5-9D46-B1F7-DD88BFA29DB7}"/>
-              </a:ext>
-            </a:extLst>
-          </p:cNvPr>
-          <p:cNvCxnSpPr>
-            <a:cxnSpLocks/>
-          </p:cNvCxnSpPr>
-          <p:nvPr/>
-        </p:nvCxnSpPr>
-        <p:spPr>
-          <a:xfrm>
-            <a:off x="7244108" y="3169870"/>
-            <a:ext cx="0" cy="447793"/>
-          </a:xfrm>
-          <a:prstGeom prst="straightConnector1">
-            <a:avLst/>
-          </a:prstGeom>
-          <a:ln>
-            <a:solidFill>
-              <a:schemeClr val="tx1"/>
-            </a:solidFill>
-            <a:tailEnd type="triangle"/>
-          </a:ln>
-        </p:spPr>
-        <p:style>
-          <a:lnRef idx="1">
-            <a:schemeClr val="accent1"/>
-          </a:lnRef>
-          <a:fillRef idx="0">
-            <a:schemeClr val="accent1"/>
-          </a:fillRef>
-          <a:effectRef idx="0">
-            <a:schemeClr val="accent1"/>
-          </a:effectRef>
-          <a:fontRef idx="minor">
-            <a:schemeClr val="tx1"/>
-          </a:fontRef>
-        </p:style>
-      </p:cxnSp>
-      <p:cxnSp>
-        <p:nvCxnSpPr>
-          <p:cNvPr id="53" name="Straight Arrow Connector 52">
-            <a:extLst>
-              <a:ext uri="{FF2B5EF4-FFF2-40B4-BE49-F238E27FC236}">
-                <a16:creationId xmlns:a16="http://schemas.microsoft.com/office/drawing/2014/main" id="{E87FD5F4-0AC1-8348-A9D6-105805AE84E0}"/>
-              </a:ext>
-            </a:extLst>
-          </p:cNvPr>
-          <p:cNvCxnSpPr>
-            <a:cxnSpLocks/>
-          </p:cNvCxnSpPr>
-          <p:nvPr/>
-        </p:nvCxnSpPr>
-        <p:spPr>
-          <a:xfrm>
-            <a:off x="7225820" y="4609309"/>
-            <a:ext cx="0" cy="447793"/>
-          </a:xfrm>
-          <a:prstGeom prst="straightConnector1">
-            <a:avLst/>
-          </a:prstGeom>
-          <a:ln>
-            <a:solidFill>
-              <a:schemeClr val="tx1"/>
-            </a:solidFill>
-            <a:tailEnd type="triangle"/>
-          </a:ln>
-        </p:spPr>
-        <p:style>
-          <a:lnRef idx="1">
-            <a:schemeClr val="accent1"/>
-          </a:lnRef>
-          <a:fillRef idx="0">
-            <a:schemeClr val="accent1"/>
-          </a:fillRef>
-          <a:effectRef idx="0">
-            <a:schemeClr val="accent1"/>
-          </a:effectRef>
-          <a:fontRef idx="minor">
-            <a:schemeClr val="tx1"/>
-          </a:fontRef>
-        </p:style>
-      </p:cxnSp>
-      <p:cxnSp>
-        <p:nvCxnSpPr>
-          <p:cNvPr id="54" name="Straight Arrow Connector 53">
-            <a:extLst>
-              <a:ext uri="{FF2B5EF4-FFF2-40B4-BE49-F238E27FC236}">
-                <a16:creationId xmlns:a16="http://schemas.microsoft.com/office/drawing/2014/main" id="{82A524E1-5C8A-434E-A3CE-95287F8AE912}"/>
-              </a:ext>
-            </a:extLst>
-          </p:cNvPr>
-          <p:cNvCxnSpPr>
-            <a:cxnSpLocks/>
-          </p:cNvCxnSpPr>
-          <p:nvPr/>
-        </p:nvCxnSpPr>
-        <p:spPr>
-          <a:xfrm>
-            <a:off x="17610591" y="1992389"/>
-            <a:ext cx="0" cy="447793"/>
-          </a:xfrm>
-          <a:prstGeom prst="straightConnector1">
-            <a:avLst/>
-          </a:prstGeom>
-          <a:ln>
-            <a:solidFill>
-              <a:schemeClr val="tx1"/>
-            </a:solidFill>
-            <a:tailEnd type="triangle"/>
-          </a:ln>
-        </p:spPr>
-        <p:style>
-          <a:lnRef idx="1">
-            <a:schemeClr val="accent1"/>
-          </a:lnRef>
-          <a:fillRef idx="0">
-            <a:schemeClr val="accent1"/>
-          </a:fillRef>
-          <a:effectRef idx="0">
-            <a:schemeClr val="accent1"/>
-          </a:effectRef>
-          <a:fontRef idx="minor">
-            <a:schemeClr val="tx1"/>
-          </a:fontRef>
-        </p:style>
-      </p:cxnSp>
-      <p:cxnSp>
-        <p:nvCxnSpPr>
-          <p:cNvPr id="55" name="Straight Arrow Connector 54">
-            <a:extLst>
-              <a:ext uri="{FF2B5EF4-FFF2-40B4-BE49-F238E27FC236}">
-                <a16:creationId xmlns:a16="http://schemas.microsoft.com/office/drawing/2014/main" id="{67DA0B2E-3885-3840-B80A-8EFD30152B76}"/>
-              </a:ext>
-            </a:extLst>
-          </p:cNvPr>
-          <p:cNvCxnSpPr>
-            <a:cxnSpLocks/>
-          </p:cNvCxnSpPr>
-          <p:nvPr/>
-        </p:nvCxnSpPr>
-        <p:spPr>
-          <a:xfrm>
-            <a:off x="17597379" y="3169870"/>
-            <a:ext cx="0" cy="447793"/>
-          </a:xfrm>
-          <a:prstGeom prst="straightConnector1">
-            <a:avLst/>
-          </a:prstGeom>
-          <a:ln>
-            <a:solidFill>
-              <a:schemeClr val="tx1"/>
-            </a:solidFill>
-            <a:tailEnd type="triangle"/>
-          </a:ln>
-        </p:spPr>
-        <p:style>
-          <a:lnRef idx="1">
-            <a:schemeClr val="accent1"/>
-          </a:lnRef>
-          <a:fillRef idx="0">
-            <a:schemeClr val="accent1"/>
-          </a:fillRef>
-          <a:effectRef idx="0">
-            <a:schemeClr val="accent1"/>
-          </a:effectRef>
-          <a:fontRef idx="minor">
-            <a:schemeClr val="tx1"/>
-          </a:fontRef>
-        </p:style>
-      </p:cxnSp>
-      <p:cxnSp>
-        <p:nvCxnSpPr>
-          <p:cNvPr id="56" name="Straight Arrow Connector 55">
-            <a:extLst>
-              <a:ext uri="{FF2B5EF4-FFF2-40B4-BE49-F238E27FC236}">
-                <a16:creationId xmlns:a16="http://schemas.microsoft.com/office/drawing/2014/main" id="{8CCA2B6A-89CA-F947-B4C1-3DC707B03094}"/>
-              </a:ext>
-            </a:extLst>
-          </p:cNvPr>
-          <p:cNvCxnSpPr>
-            <a:cxnSpLocks/>
-          </p:cNvCxnSpPr>
-          <p:nvPr/>
-        </p:nvCxnSpPr>
-        <p:spPr>
-          <a:xfrm>
-            <a:off x="17579091" y="4609309"/>
-            <a:ext cx="0" cy="447793"/>
-          </a:xfrm>
-          <a:prstGeom prst="straightConnector1">
-            <a:avLst/>
-          </a:prstGeom>
-          <a:ln>
-            <a:solidFill>
-              <a:schemeClr val="tx1"/>
-            </a:solidFill>
-            <a:tailEnd type="triangle"/>
-          </a:ln>
-        </p:spPr>
-        <p:style>
-          <a:lnRef idx="1">
-            <a:schemeClr val="accent1"/>
-          </a:lnRef>
-          <a:fillRef idx="0">
-            <a:schemeClr val="accent1"/>
-          </a:fillRef>
-          <a:effectRef idx="0">
-            <a:schemeClr val="accent1"/>
-          </a:effectRef>
-          <a:fontRef idx="minor">
-            <a:schemeClr val="tx1"/>
-          </a:fontRef>
-        </p:style>
-      </p:cxnSp>
-      <p:cxnSp>
-        <p:nvCxnSpPr>
-          <p:cNvPr id="57" name="Straight Arrow Connector 56">
-            <a:extLst>
-              <a:ext uri="{FF2B5EF4-FFF2-40B4-BE49-F238E27FC236}">
-                <a16:creationId xmlns:a16="http://schemas.microsoft.com/office/drawing/2014/main" id="{042505FD-B585-CB4E-B35F-301B8EB11289}"/>
-              </a:ext>
-            </a:extLst>
-          </p:cNvPr>
-          <p:cNvCxnSpPr>
-            <a:cxnSpLocks/>
-          </p:cNvCxnSpPr>
-          <p:nvPr/>
-        </p:nvCxnSpPr>
-        <p:spPr>
-          <a:xfrm>
-            <a:off x="8460663" y="12550303"/>
-            <a:ext cx="0" cy="447793"/>
-          </a:xfrm>
-          <a:prstGeom prst="straightConnector1">
-            <a:avLst/>
-          </a:prstGeom>
-          <a:ln>
-            <a:solidFill>
-              <a:schemeClr val="tx1"/>
-            </a:solidFill>
-            <a:tailEnd type="triangle"/>
-          </a:ln>
-        </p:spPr>
-        <p:style>
-          <a:lnRef idx="1">
-            <a:schemeClr val="accent1"/>
-          </a:lnRef>
-          <a:fillRef idx="0">
-            <a:schemeClr val="accent1"/>
-          </a:fillRef>
-          <a:effectRef idx="0">
-            <a:schemeClr val="accent1"/>
-          </a:effectRef>
-          <a:fontRef idx="minor">
-            <a:schemeClr val="tx1"/>
-          </a:fontRef>
-        </p:style>
-      </p:cxnSp>
-      <p:cxnSp>
-        <p:nvCxnSpPr>
-          <p:cNvPr id="58" name="Straight Arrow Connector 57">
-            <a:extLst>
-              <a:ext uri="{FF2B5EF4-FFF2-40B4-BE49-F238E27FC236}">
-                <a16:creationId xmlns:a16="http://schemas.microsoft.com/office/drawing/2014/main" id="{6C8DB00C-870A-BC42-8ED2-66844AAD633A}"/>
-              </a:ext>
-            </a:extLst>
-          </p:cNvPr>
-          <p:cNvCxnSpPr>
-            <a:cxnSpLocks/>
-          </p:cNvCxnSpPr>
-          <p:nvPr/>
-        </p:nvCxnSpPr>
-        <p:spPr>
-          <a:xfrm>
-            <a:off x="7171910" y="6318354"/>
-            <a:ext cx="0" cy="447793"/>
-          </a:xfrm>
-          <a:prstGeom prst="straightConnector1">
-            <a:avLst/>
-          </a:prstGeom>
-          <a:ln>
-            <a:solidFill>
-              <a:schemeClr val="tx1"/>
-            </a:solidFill>
-            <a:tailEnd type="triangle"/>
-          </a:ln>
-        </p:spPr>
-        <p:style>
-          <a:lnRef idx="1">
-            <a:schemeClr val="accent1"/>
-          </a:lnRef>
-          <a:fillRef idx="0">
-            <a:schemeClr val="accent1"/>
-          </a:fillRef>
-          <a:effectRef idx="0">
-            <a:schemeClr val="accent1"/>
-          </a:effectRef>
-          <a:fontRef idx="minor">
-            <a:schemeClr val="tx1"/>
-          </a:fontRef>
-        </p:style>
-      </p:cxnSp>
-      <p:cxnSp>
-        <p:nvCxnSpPr>
-          <p:cNvPr id="59" name="Straight Arrow Connector 58">
-            <a:extLst>
-              <a:ext uri="{FF2B5EF4-FFF2-40B4-BE49-F238E27FC236}">
-                <a16:creationId xmlns:a16="http://schemas.microsoft.com/office/drawing/2014/main" id="{CBA25FCA-0518-6C43-BE79-1A1DD2B9ABB9}"/>
-              </a:ext>
-            </a:extLst>
-          </p:cNvPr>
-          <p:cNvCxnSpPr>
-            <a:cxnSpLocks/>
-          </p:cNvCxnSpPr>
-          <p:nvPr/>
-        </p:nvCxnSpPr>
-        <p:spPr>
-          <a:xfrm>
-            <a:off x="18897849" y="12550303"/>
+            <a:off x="7171909" y="8137714"/>
             <a:ext cx="0" cy="447793"/>
           </a:xfrm>
           <a:prstGeom prst="straightConnector1">
@@ -8813,7 +4541,7 @@
         </p:nvCxnSpPr>
         <p:spPr>
           <a:xfrm>
-            <a:off x="17597379" y="6248452"/>
+            <a:off x="17662988" y="8294262"/>
             <a:ext cx="0" cy="447793"/>
           </a:xfrm>
           <a:prstGeom prst="straightConnector1">
@@ -8843,10 +4571,10 @@
       </p:cxnSp>
       <p:sp>
         <p:nvSpPr>
-          <p:cNvPr id="70" name="TextBox 69">
+          <p:cNvPr id="42" name="TextBox 41">
             <a:extLst>
               <a:ext uri="{FF2B5EF4-FFF2-40B4-BE49-F238E27FC236}">
-                <a16:creationId xmlns:a16="http://schemas.microsoft.com/office/drawing/2014/main" id="{70AFDFF3-CBC6-F749-ADD0-5662D9A069CA}"/>
+                <a16:creationId xmlns:a16="http://schemas.microsoft.com/office/drawing/2014/main" id="{25303DFD-6A6C-7B40-B7CF-0A6F73BC8980}"/>
               </a:ext>
             </a:extLst>
           </p:cNvPr>
@@ -8855,8 +4583,8 @@
         </p:nvSpPr>
         <p:spPr>
           <a:xfrm>
-            <a:off x="5976550" y="8553009"/>
-            <a:ext cx="2390719" cy="1600438"/>
+            <a:off x="6030460" y="6752719"/>
+            <a:ext cx="2390719" cy="1384995"/>
           </a:xfrm>
           <a:prstGeom prst="rect">
             <a:avLst/>
@@ -8872,7 +4600,7 @@
             <a:pPr algn="ctr"/>
             <a:r>
               <a:rPr lang="en-US" sz="1400" b="1" dirty="0"/>
-              <a:t>6.v1. Filtered inserts:</a:t>
+              <a:t>5.v1. Filtered inserts:</a:t>
             </a:r>
           </a:p>
           <a:p>
@@ -8893,21 +4621,14 @@
             <a:pPr algn="ctr"/>
             <a:r>
               <a:rPr lang="en-US" sz="1400" dirty="0"/>
+              <a:t>- Sequence complexity</a:t>
+            </a:r>
+          </a:p>
+          <a:p>
+            <a:pPr algn="ctr"/>
+            <a:r>
+              <a:rPr lang="en-US" sz="1400" dirty="0"/>
               <a:t>- Flanked by Ns</a:t>
-            </a:r>
-          </a:p>
-          <a:p>
-            <a:pPr algn="ctr"/>
-            <a:r>
-              <a:rPr lang="en-US" sz="1400" dirty="0"/>
-              <a:t>- Non-target bacteria</a:t>
-            </a:r>
-          </a:p>
-          <a:p>
-            <a:pPr algn="ctr"/>
-            <a:r>
-              <a:rPr lang="en-US" sz="1400" dirty="0"/>
-              <a:t>- Sequence complexity</a:t>
             </a:r>
           </a:p>
           <a:p>
@@ -8925,12 +4646,89 @@
           </a:p>
         </p:txBody>
       </p:sp>
+      <p:sp>
+        <p:nvSpPr>
+          <p:cNvPr id="44" name="TextBox 43">
+            <a:extLst>
+              <a:ext uri="{FF2B5EF4-FFF2-40B4-BE49-F238E27FC236}">
+                <a16:creationId xmlns:a16="http://schemas.microsoft.com/office/drawing/2014/main" id="{7336D22B-6F54-9240-B923-42DFE8F134B7}"/>
+              </a:ext>
+            </a:extLst>
+          </p:cNvPr>
+          <p:cNvSpPr txBox="1"/>
+          <p:nvPr/>
+        </p:nvSpPr>
+        <p:spPr>
+          <a:xfrm>
+            <a:off x="16449308" y="6815594"/>
+            <a:ext cx="2296141" cy="1384995"/>
+          </a:xfrm>
+          <a:prstGeom prst="rect">
+            <a:avLst/>
+          </a:prstGeom>
+          <a:noFill/>
+        </p:spPr>
+        <p:txBody>
+          <a:bodyPr wrap="none" rtlCol="0">
+            <a:spAutoFit/>
+          </a:bodyPr>
+          <a:lstStyle/>
+          <a:p>
+            <a:pPr algn="ctr"/>
+            <a:r>
+              <a:rPr lang="en-US" sz="1400" b="1" dirty="0"/>
+              <a:t>5.v2. Filtered inserts:</a:t>
+            </a:r>
+          </a:p>
+          <a:p>
+            <a:pPr algn="ctr"/>
+            <a:r>
+              <a:rPr lang="en-US" sz="1400" dirty="0"/>
+              <a:t>Insert length vs contig length</a:t>
+            </a:r>
+          </a:p>
+          <a:p>
+            <a:pPr algn="ctr"/>
+            <a:r>
+              <a:rPr lang="en-US" sz="1400" dirty="0"/>
+              <a:t>- False duplications</a:t>
+            </a:r>
+          </a:p>
+          <a:p>
+            <a:pPr algn="ctr"/>
+            <a:r>
+              <a:rPr lang="en-US" sz="1400" dirty="0"/>
+              <a:t>- Sequence complexity</a:t>
+            </a:r>
+          </a:p>
+          <a:p>
+            <a:pPr algn="ctr"/>
+            <a:r>
+              <a:rPr lang="en-US" sz="1400" dirty="0"/>
+              <a:t>- Flanked by Ns</a:t>
+            </a:r>
+          </a:p>
+          <a:p>
+            <a:pPr algn="ctr"/>
+            <a:r>
+              <a:rPr lang="en-US" sz="1400" i="1" dirty="0">
+                <a:solidFill>
+                  <a:schemeClr val="accent2">
+                    <a:lumMod val="75000"/>
+                  </a:schemeClr>
+                </a:solidFill>
+              </a:rPr>
+              <a:t>Alternate thresholds</a:t>
+            </a:r>
+          </a:p>
+        </p:txBody>
+      </p:sp>
       <p:cxnSp>
         <p:nvCxnSpPr>
-          <p:cNvPr id="71" name="Straight Arrow Connector 70">
+          <p:cNvPr id="45" name="Straight Arrow Connector 44">
             <a:extLst>
               <a:ext uri="{FF2B5EF4-FFF2-40B4-BE49-F238E27FC236}">
-                <a16:creationId xmlns:a16="http://schemas.microsoft.com/office/drawing/2014/main" id="{2399C1A9-3106-A24E-AB7D-1C9C2AF72630}"/>
+                <a16:creationId xmlns:a16="http://schemas.microsoft.com/office/drawing/2014/main" id="{99B5AE58-014A-EF45-81F8-A04514BF2AA7}"/>
               </a:ext>
             </a:extLst>
           </p:cNvPr>
@@ -8941,7 +4739,7 @@
         </p:nvCxnSpPr>
         <p:spPr>
           <a:xfrm>
-            <a:off x="7171910" y="8100518"/>
+            <a:off x="7221931" y="6257238"/>
             <a:ext cx="0" cy="447793"/>
           </a:xfrm>
           <a:prstGeom prst="straightConnector1">
@@ -8969,96 +4767,12 @@
           </a:fontRef>
         </p:style>
       </p:cxnSp>
-      <p:sp>
-        <p:nvSpPr>
-          <p:cNvPr id="72" name="TextBox 71">
+      <p:cxnSp>
+        <p:nvCxnSpPr>
+          <p:cNvPr id="48" name="Straight Arrow Connector 47">
             <a:extLst>
               <a:ext uri="{FF2B5EF4-FFF2-40B4-BE49-F238E27FC236}">
-                <a16:creationId xmlns:a16="http://schemas.microsoft.com/office/drawing/2014/main" id="{51AD45CF-A5BA-1043-8FE6-8D9278B03DAE}"/>
-              </a:ext>
-            </a:extLst>
-          </p:cNvPr>
-          <p:cNvSpPr txBox="1"/>
-          <p:nvPr/>
-        </p:nvSpPr>
-        <p:spPr>
-          <a:xfrm>
-            <a:off x="16513152" y="8557707"/>
-            <a:ext cx="2390719" cy="1600438"/>
-          </a:xfrm>
-          <a:prstGeom prst="rect">
-            <a:avLst/>
-          </a:prstGeom>
-          <a:noFill/>
-        </p:spPr>
-        <p:txBody>
-          <a:bodyPr wrap="none" rtlCol="0">
-            <a:spAutoFit/>
-          </a:bodyPr>
-          <a:lstStyle/>
-          <a:p>
-            <a:pPr algn="ctr"/>
-            <a:r>
-              <a:rPr lang="en-US" sz="1400" b="1" dirty="0"/>
-              <a:t>6.v2. Filtered inserts:</a:t>
-            </a:r>
-          </a:p>
-          <a:p>
-            <a:pPr algn="ctr"/>
-            <a:r>
-              <a:rPr lang="en-US" sz="1400" dirty="0"/>
-              <a:t>- Insert length vs contig length</a:t>
-            </a:r>
-          </a:p>
-          <a:p>
-            <a:pPr algn="ctr"/>
-            <a:r>
-              <a:rPr lang="en-US" sz="1400" dirty="0"/>
-              <a:t>- False duplications</a:t>
-            </a:r>
-          </a:p>
-          <a:p>
-            <a:pPr algn="ctr"/>
-            <a:r>
-              <a:rPr lang="en-US" sz="1400" dirty="0"/>
-              <a:t>- Flanked by Ns</a:t>
-            </a:r>
-          </a:p>
-          <a:p>
-            <a:pPr algn="ctr"/>
-            <a:r>
-              <a:rPr lang="en-US" sz="1400" dirty="0"/>
-              <a:t>- Non-target bacteria</a:t>
-            </a:r>
-          </a:p>
-          <a:p>
-            <a:pPr algn="ctr"/>
-            <a:r>
-              <a:rPr lang="en-US" sz="1400" dirty="0"/>
-              <a:t>- Sequence complexity</a:t>
-            </a:r>
-          </a:p>
-          <a:p>
-            <a:pPr algn="ctr"/>
-            <a:r>
-              <a:rPr lang="en-US" sz="1400" i="1" dirty="0">
-                <a:solidFill>
-                  <a:schemeClr val="accent2">
-                    <a:lumMod val="75000"/>
-                  </a:schemeClr>
-                </a:solidFill>
-              </a:rPr>
-              <a:t>Alternate thresholds</a:t>
-            </a:r>
-          </a:p>
-        </p:txBody>
-      </p:sp>
-      <p:cxnSp>
-        <p:nvCxnSpPr>
-          <p:cNvPr id="73" name="Straight Arrow Connector 72">
-            <a:extLst>
-              <a:ext uri="{FF2B5EF4-FFF2-40B4-BE49-F238E27FC236}">
-                <a16:creationId xmlns:a16="http://schemas.microsoft.com/office/drawing/2014/main" id="{12527E14-DBE2-924F-B11E-75DAF8426A30}"/>
+                <a16:creationId xmlns:a16="http://schemas.microsoft.com/office/drawing/2014/main" id="{6F48E10C-BE2D-5145-AA11-4269774ACC6E}"/>
               </a:ext>
             </a:extLst>
           </p:cNvPr>
@@ -9069,7 +4783,7 @@
         </p:nvCxnSpPr>
         <p:spPr>
           <a:xfrm>
-            <a:off x="17708512" y="8105216"/>
+            <a:off x="17610548" y="6320641"/>
             <a:ext cx="0" cy="447793"/>
           </a:xfrm>
           <a:prstGeom prst="straightConnector1">
@@ -9097,6 +4811,537 @@
           </a:fontRef>
         </p:style>
       </p:cxnSp>
+      <p:sp>
+        <p:nvSpPr>
+          <p:cNvPr id="3" name="Sun 2">
+            <a:extLst>
+              <a:ext uri="{FF2B5EF4-FFF2-40B4-BE49-F238E27FC236}">
+                <a16:creationId xmlns:a16="http://schemas.microsoft.com/office/drawing/2014/main" id="{4364D50A-9967-C446-80C8-B0D63D927604}"/>
+              </a:ext>
+            </a:extLst>
+          </p:cNvPr>
+          <p:cNvSpPr/>
+          <p:nvPr/>
+        </p:nvSpPr>
+        <p:spPr>
+          <a:xfrm>
+            <a:off x="19087195" y="1575519"/>
+            <a:ext cx="202828" cy="202828"/>
+          </a:xfrm>
+          <a:prstGeom prst="sun">
+            <a:avLst/>
+          </a:prstGeom>
+          <a:solidFill>
+            <a:schemeClr val="accent2"/>
+          </a:solidFill>
+        </p:spPr>
+        <p:style>
+          <a:lnRef idx="2">
+            <a:schemeClr val="accent1">
+              <a:shade val="50000"/>
+            </a:schemeClr>
+          </a:lnRef>
+          <a:fillRef idx="1">
+            <a:schemeClr val="accent1"/>
+          </a:fillRef>
+          <a:effectRef idx="0">
+            <a:schemeClr val="accent1"/>
+          </a:effectRef>
+          <a:fontRef idx="minor">
+            <a:schemeClr val="lt1"/>
+          </a:fontRef>
+        </p:style>
+        <p:txBody>
+          <a:bodyPr rtlCol="0" anchor="ctr"/>
+          <a:lstStyle/>
+          <a:p>
+            <a:pPr algn="ctr"/>
+            <a:endParaRPr lang="en-US"/>
+          </a:p>
+        </p:txBody>
+      </p:sp>
+      <p:sp>
+        <p:nvSpPr>
+          <p:cNvPr id="49" name="Sun 48">
+            <a:extLst>
+              <a:ext uri="{FF2B5EF4-FFF2-40B4-BE49-F238E27FC236}">
+                <a16:creationId xmlns:a16="http://schemas.microsoft.com/office/drawing/2014/main" id="{1AAE7072-21A4-FD45-ACA7-EC5A7A284B71}"/>
+              </a:ext>
+            </a:extLst>
+          </p:cNvPr>
+          <p:cNvSpPr/>
+          <p:nvPr/>
+        </p:nvSpPr>
+        <p:spPr>
+          <a:xfrm>
+            <a:off x="19087195" y="3994265"/>
+            <a:ext cx="202828" cy="202828"/>
+          </a:xfrm>
+          <a:prstGeom prst="sun">
+            <a:avLst/>
+          </a:prstGeom>
+          <a:solidFill>
+            <a:schemeClr val="accent2"/>
+          </a:solidFill>
+        </p:spPr>
+        <p:style>
+          <a:lnRef idx="2">
+            <a:schemeClr val="accent1">
+              <a:shade val="50000"/>
+            </a:schemeClr>
+          </a:lnRef>
+          <a:fillRef idx="1">
+            <a:schemeClr val="accent1"/>
+          </a:fillRef>
+          <a:effectRef idx="0">
+            <a:schemeClr val="accent1"/>
+          </a:effectRef>
+          <a:fontRef idx="minor">
+            <a:schemeClr val="lt1"/>
+          </a:fontRef>
+        </p:style>
+        <p:txBody>
+          <a:bodyPr rtlCol="0" anchor="ctr"/>
+          <a:lstStyle/>
+          <a:p>
+            <a:pPr algn="ctr"/>
+            <a:endParaRPr lang="en-US"/>
+          </a:p>
+        </p:txBody>
+      </p:sp>
+      <p:sp>
+        <p:nvSpPr>
+          <p:cNvPr id="51" name="TextBox 50">
+            <a:extLst>
+              <a:ext uri="{FF2B5EF4-FFF2-40B4-BE49-F238E27FC236}">
+                <a16:creationId xmlns:a16="http://schemas.microsoft.com/office/drawing/2014/main" id="{D44967D5-3605-5E4A-B6E5-10E6BE29D6DD}"/>
+              </a:ext>
+            </a:extLst>
+          </p:cNvPr>
+          <p:cNvSpPr txBox="1"/>
+          <p:nvPr/>
+        </p:nvSpPr>
+        <p:spPr>
+          <a:xfrm>
+            <a:off x="17716901" y="11082594"/>
+            <a:ext cx="2298321" cy="1600438"/>
+          </a:xfrm>
+          <a:prstGeom prst="rect">
+            <a:avLst/>
+          </a:prstGeom>
+          <a:noFill/>
+        </p:spPr>
+        <p:txBody>
+          <a:bodyPr wrap="none" rtlCol="0">
+            <a:spAutoFit/>
+          </a:bodyPr>
+          <a:lstStyle/>
+          <a:p>
+            <a:pPr algn="ctr"/>
+            <a:r>
+              <a:rPr lang="en-US" sz="1400" b="1" dirty="0"/>
+              <a:t>7.v4. Unique filtered inserts:</a:t>
+            </a:r>
+          </a:p>
+          <a:p>
+            <a:pPr algn="ctr"/>
+            <a:r>
+              <a:rPr lang="en-US" sz="1400" dirty="0"/>
+              <a:t>Insert length vs contig length</a:t>
+            </a:r>
+          </a:p>
+          <a:p>
+            <a:pPr algn="ctr"/>
+            <a:r>
+              <a:rPr lang="en-US" sz="1400" dirty="0"/>
+              <a:t>- False duplications</a:t>
+            </a:r>
+            <a:br>
+              <a:rPr lang="en-US" sz="1400" dirty="0"/>
+            </a:br>
+            <a:r>
+              <a:rPr lang="en-US" sz="1400" dirty="0"/>
+              <a:t>- Sequence complexity</a:t>
+            </a:r>
+          </a:p>
+          <a:p>
+            <a:pPr algn="ctr"/>
+            <a:r>
+              <a:rPr lang="en-US" sz="1400" dirty="0"/>
+              <a:t>- Flanked by Ns</a:t>
+            </a:r>
+          </a:p>
+          <a:p>
+            <a:pPr algn="ctr"/>
+            <a:r>
+              <a:rPr lang="en-US" sz="1400" dirty="0"/>
+              <a:t>- Non-target bacteria</a:t>
+            </a:r>
+          </a:p>
+          <a:p>
+            <a:pPr algn="ctr"/>
+            <a:r>
+              <a:rPr lang="en-US" sz="1400" i="1" dirty="0">
+                <a:solidFill>
+                  <a:schemeClr val="accent2">
+                    <a:lumMod val="75000"/>
+                  </a:schemeClr>
+                </a:solidFill>
+              </a:rPr>
+              <a:t>Alternate thresholds</a:t>
+            </a:r>
+          </a:p>
+        </p:txBody>
+      </p:sp>
+      <p:sp>
+        <p:nvSpPr>
+          <p:cNvPr id="60" name="TextBox 59">
+            <a:extLst>
+              <a:ext uri="{FF2B5EF4-FFF2-40B4-BE49-F238E27FC236}">
+                <a16:creationId xmlns:a16="http://schemas.microsoft.com/office/drawing/2014/main" id="{2616213D-729F-EB41-A3D3-1CB2C19FB1FE}"/>
+              </a:ext>
+            </a:extLst>
+          </p:cNvPr>
+          <p:cNvSpPr txBox="1"/>
+          <p:nvPr/>
+        </p:nvSpPr>
+        <p:spPr>
+          <a:xfrm>
+            <a:off x="14830255" y="11082594"/>
+            <a:ext cx="2921826" cy="1600438"/>
+          </a:xfrm>
+          <a:prstGeom prst="rect">
+            <a:avLst/>
+          </a:prstGeom>
+          <a:noFill/>
+        </p:spPr>
+        <p:txBody>
+          <a:bodyPr wrap="none" rtlCol="0">
+            <a:spAutoFit/>
+          </a:bodyPr>
+          <a:lstStyle/>
+          <a:p>
+            <a:pPr algn="ctr"/>
+            <a:r>
+              <a:rPr lang="en-US" sz="1400" b="1" dirty="0"/>
+              <a:t>7.v3. Filtered inserts with duplicates:</a:t>
+            </a:r>
+          </a:p>
+          <a:p>
+            <a:pPr algn="ctr"/>
+            <a:r>
+              <a:rPr lang="en-US" sz="1400" dirty="0"/>
+              <a:t>- Insert length vs contig length</a:t>
+            </a:r>
+          </a:p>
+          <a:p>
+            <a:pPr algn="ctr"/>
+            <a:r>
+              <a:rPr lang="en-US" sz="1400" dirty="0"/>
+              <a:t>- False duplications</a:t>
+            </a:r>
+            <a:br>
+              <a:rPr lang="en-US" sz="1400" dirty="0"/>
+            </a:br>
+            <a:r>
+              <a:rPr lang="en-US" sz="1400" dirty="0"/>
+              <a:t>- Sequence complexity</a:t>
+            </a:r>
+          </a:p>
+          <a:p>
+            <a:pPr algn="ctr"/>
+            <a:r>
+              <a:rPr lang="en-US" sz="1400" dirty="0"/>
+              <a:t>- Flanked by Ns</a:t>
+            </a:r>
+          </a:p>
+          <a:p>
+            <a:pPr algn="ctr"/>
+            <a:r>
+              <a:rPr lang="en-US" sz="1400" dirty="0"/>
+              <a:t>- Non-target bacteria</a:t>
+            </a:r>
+          </a:p>
+          <a:p>
+            <a:pPr algn="ctr"/>
+            <a:r>
+              <a:rPr lang="en-US" sz="1400" i="1" dirty="0">
+                <a:solidFill>
+                  <a:schemeClr val="accent2">
+                    <a:lumMod val="75000"/>
+                  </a:schemeClr>
+                </a:solidFill>
+              </a:rPr>
+              <a:t>Alternate thresholds</a:t>
+            </a:r>
+          </a:p>
+        </p:txBody>
+      </p:sp>
+      <p:sp>
+        <p:nvSpPr>
+          <p:cNvPr id="61" name="TextBox 60">
+            <a:extLst>
+              <a:ext uri="{FF2B5EF4-FFF2-40B4-BE49-F238E27FC236}">
+                <a16:creationId xmlns:a16="http://schemas.microsoft.com/office/drawing/2014/main" id="{9CEF96A2-DA4C-0945-BABA-141796027DC7}"/>
+              </a:ext>
+            </a:extLst>
+          </p:cNvPr>
+          <p:cNvSpPr txBox="1"/>
+          <p:nvPr/>
+        </p:nvSpPr>
+        <p:spPr>
+          <a:xfrm>
+            <a:off x="17310959" y="13153403"/>
+            <a:ext cx="3365665" cy="1600438"/>
+          </a:xfrm>
+          <a:prstGeom prst="rect">
+            <a:avLst/>
+          </a:prstGeom>
+          <a:noFill/>
+        </p:spPr>
+        <p:txBody>
+          <a:bodyPr wrap="none" rtlCol="0">
+            <a:spAutoFit/>
+          </a:bodyPr>
+          <a:lstStyle/>
+          <a:p>
+            <a:pPr algn="ctr"/>
+            <a:r>
+              <a:rPr lang="en-US" sz="1400" b="1" dirty="0"/>
+              <a:t>8.v2. Unique putatively old filtered inserts:</a:t>
+            </a:r>
+          </a:p>
+          <a:p>
+            <a:pPr algn="ctr"/>
+            <a:r>
+              <a:rPr lang="en-US" sz="1400" dirty="0"/>
+              <a:t>Insert length vs contig length</a:t>
+            </a:r>
+          </a:p>
+          <a:p>
+            <a:pPr algn="ctr"/>
+            <a:r>
+              <a:rPr lang="en-US" sz="1400" dirty="0"/>
+              <a:t>- False duplications</a:t>
+            </a:r>
+            <a:br>
+              <a:rPr lang="en-US" sz="1400" dirty="0"/>
+            </a:br>
+            <a:r>
+              <a:rPr lang="en-US" sz="1400" dirty="0"/>
+              <a:t>- Sequence complexity</a:t>
+            </a:r>
+          </a:p>
+          <a:p>
+            <a:pPr algn="ctr"/>
+            <a:r>
+              <a:rPr lang="en-US" sz="1400" dirty="0"/>
+              <a:t>- Flanked by Ns</a:t>
+            </a:r>
+          </a:p>
+          <a:p>
+            <a:pPr algn="ctr"/>
+            <a:r>
+              <a:rPr lang="en-US" sz="1400" dirty="0"/>
+              <a:t>- Non-target bacteria</a:t>
+            </a:r>
+          </a:p>
+          <a:p>
+            <a:pPr algn="ctr"/>
+            <a:r>
+              <a:rPr lang="en-US" sz="1400" i="1" dirty="0">
+                <a:solidFill>
+                  <a:schemeClr val="accent2">
+                    <a:lumMod val="75000"/>
+                  </a:schemeClr>
+                </a:solidFill>
+              </a:rPr>
+              <a:t>Alternate thresholds</a:t>
+            </a:r>
+          </a:p>
+        </p:txBody>
+      </p:sp>
+      <p:cxnSp>
+        <p:nvCxnSpPr>
+          <p:cNvPr id="62" name="Straight Arrow Connector 61">
+            <a:extLst>
+              <a:ext uri="{FF2B5EF4-FFF2-40B4-BE49-F238E27FC236}">
+                <a16:creationId xmlns:a16="http://schemas.microsoft.com/office/drawing/2014/main" id="{BAC655D3-5B76-BF45-8D8E-AB4AD50DCBCF}"/>
+              </a:ext>
+            </a:extLst>
+          </p:cNvPr>
+          <p:cNvCxnSpPr>
+            <a:cxnSpLocks/>
+          </p:cNvCxnSpPr>
+          <p:nvPr/>
+        </p:nvCxnSpPr>
+        <p:spPr>
+          <a:xfrm flipH="1">
+            <a:off x="16291166" y="10404517"/>
+            <a:ext cx="545359" cy="650842"/>
+          </a:xfrm>
+          <a:prstGeom prst="straightConnector1">
+            <a:avLst/>
+          </a:prstGeom>
+          <a:ln>
+            <a:solidFill>
+              <a:schemeClr val="tx1"/>
+            </a:solidFill>
+            <a:tailEnd type="triangle"/>
+          </a:ln>
+        </p:spPr>
+        <p:style>
+          <a:lnRef idx="1">
+            <a:schemeClr val="accent1"/>
+          </a:lnRef>
+          <a:fillRef idx="0">
+            <a:schemeClr val="accent1"/>
+          </a:fillRef>
+          <a:effectRef idx="0">
+            <a:schemeClr val="accent1"/>
+          </a:effectRef>
+          <a:fontRef idx="minor">
+            <a:schemeClr val="tx1"/>
+          </a:fontRef>
+        </p:style>
+      </p:cxnSp>
+      <p:cxnSp>
+        <p:nvCxnSpPr>
+          <p:cNvPr id="63" name="Straight Arrow Connector 62">
+            <a:extLst>
+              <a:ext uri="{FF2B5EF4-FFF2-40B4-BE49-F238E27FC236}">
+                <a16:creationId xmlns:a16="http://schemas.microsoft.com/office/drawing/2014/main" id="{1CEFBD08-A37D-474B-9ADF-36F7C8960033}"/>
+              </a:ext>
+            </a:extLst>
+          </p:cNvPr>
+          <p:cNvCxnSpPr>
+            <a:cxnSpLocks/>
+          </p:cNvCxnSpPr>
+          <p:nvPr/>
+        </p:nvCxnSpPr>
+        <p:spPr>
+          <a:xfrm>
+            <a:off x="18339422" y="10399161"/>
+            <a:ext cx="545359" cy="650842"/>
+          </a:xfrm>
+          <a:prstGeom prst="straightConnector1">
+            <a:avLst/>
+          </a:prstGeom>
+          <a:ln>
+            <a:solidFill>
+              <a:schemeClr val="tx1"/>
+            </a:solidFill>
+            <a:tailEnd type="triangle"/>
+          </a:ln>
+        </p:spPr>
+        <p:style>
+          <a:lnRef idx="1">
+            <a:schemeClr val="accent1"/>
+          </a:lnRef>
+          <a:fillRef idx="0">
+            <a:schemeClr val="accent1"/>
+          </a:fillRef>
+          <a:effectRef idx="0">
+            <a:schemeClr val="accent1"/>
+          </a:effectRef>
+          <a:fontRef idx="minor">
+            <a:schemeClr val="tx1"/>
+          </a:fontRef>
+        </p:style>
+      </p:cxnSp>
+      <p:cxnSp>
+        <p:nvCxnSpPr>
+          <p:cNvPr id="64" name="Straight Arrow Connector 63">
+            <a:extLst>
+              <a:ext uri="{FF2B5EF4-FFF2-40B4-BE49-F238E27FC236}">
+                <a16:creationId xmlns:a16="http://schemas.microsoft.com/office/drawing/2014/main" id="{A7F3EF3D-ECA9-1845-8ABE-35845D86126F}"/>
+              </a:ext>
+            </a:extLst>
+          </p:cNvPr>
+          <p:cNvCxnSpPr>
+            <a:cxnSpLocks/>
+          </p:cNvCxnSpPr>
+          <p:nvPr/>
+        </p:nvCxnSpPr>
+        <p:spPr>
+          <a:xfrm>
+            <a:off x="18884781" y="12683032"/>
+            <a:ext cx="0" cy="447793"/>
+          </a:xfrm>
+          <a:prstGeom prst="straightConnector1">
+            <a:avLst/>
+          </a:prstGeom>
+          <a:ln>
+            <a:solidFill>
+              <a:schemeClr val="tx1"/>
+            </a:solidFill>
+            <a:tailEnd type="triangle"/>
+          </a:ln>
+        </p:spPr>
+        <p:style>
+          <a:lnRef idx="1">
+            <a:schemeClr val="accent1"/>
+          </a:lnRef>
+          <a:fillRef idx="0">
+            <a:schemeClr val="accent1"/>
+          </a:fillRef>
+          <a:effectRef idx="0">
+            <a:schemeClr val="accent1"/>
+          </a:effectRef>
+          <a:fontRef idx="minor">
+            <a:schemeClr val="tx1"/>
+          </a:fontRef>
+        </p:style>
+      </p:cxnSp>
+      <p:sp>
+        <p:nvSpPr>
+          <p:cNvPr id="65" name="Sun 64">
+            <a:extLst>
+              <a:ext uri="{FF2B5EF4-FFF2-40B4-BE49-F238E27FC236}">
+                <a16:creationId xmlns:a16="http://schemas.microsoft.com/office/drawing/2014/main" id="{DB69A1F4-85B2-0E44-AB34-B61CB6F44BA7}"/>
+              </a:ext>
+            </a:extLst>
+          </p:cNvPr>
+          <p:cNvSpPr/>
+          <p:nvPr/>
+        </p:nvSpPr>
+        <p:spPr>
+          <a:xfrm>
+            <a:off x="20387229" y="11713295"/>
+            <a:ext cx="202828" cy="202828"/>
+          </a:xfrm>
+          <a:prstGeom prst="sun">
+            <a:avLst/>
+          </a:prstGeom>
+          <a:solidFill>
+            <a:schemeClr val="accent2"/>
+          </a:solidFill>
+        </p:spPr>
+        <p:style>
+          <a:lnRef idx="2">
+            <a:schemeClr val="accent1">
+              <a:shade val="50000"/>
+            </a:schemeClr>
+          </a:lnRef>
+          <a:fillRef idx="1">
+            <a:schemeClr val="accent1"/>
+          </a:fillRef>
+          <a:effectRef idx="0">
+            <a:schemeClr val="accent1"/>
+          </a:effectRef>
+          <a:fontRef idx="minor">
+            <a:schemeClr val="lt1"/>
+          </a:fontRef>
+        </p:style>
+        <p:txBody>
+          <a:bodyPr rtlCol="0" anchor="ctr"/>
+          <a:lstStyle/>
+          <a:p>
+            <a:pPr algn="ctr"/>
+            <a:endParaRPr lang="en-US"/>
+          </a:p>
+        </p:txBody>
+      </p:sp>
     </p:spTree>
     <p:extLst>
       <p:ext uri="{BB962C8B-B14F-4D97-AF65-F5344CB8AC3E}">

--- a/HGT_filtering-pipeline.pptx
+++ b/HGT_filtering-pipeline.pptx
@@ -243,7 +243,7 @@
           <a:p>
             <a:fld id="{9386A93F-6D44-2341-95C7-2E010A24378A}" type="datetimeFigureOut">
               <a:rPr lang="en-US" smtClean="0"/>
-              <a:t>5/1/25</a:t>
+              <a:t>5/7/25</a:t>
             </a:fld>
             <a:endParaRPr lang="en-US"/>
           </a:p>
@@ -413,7 +413,7 @@
           <a:p>
             <a:fld id="{9386A93F-6D44-2341-95C7-2E010A24378A}" type="datetimeFigureOut">
               <a:rPr lang="en-US" smtClean="0"/>
-              <a:t>5/1/25</a:t>
+              <a:t>5/7/25</a:t>
             </a:fld>
             <a:endParaRPr lang="en-US"/>
           </a:p>
@@ -593,7 +593,7 @@
           <a:p>
             <a:fld id="{9386A93F-6D44-2341-95C7-2E010A24378A}" type="datetimeFigureOut">
               <a:rPr lang="en-US" smtClean="0"/>
-              <a:t>5/1/25</a:t>
+              <a:t>5/7/25</a:t>
             </a:fld>
             <a:endParaRPr lang="en-US"/>
           </a:p>
@@ -763,7 +763,7 @@
           <a:p>
             <a:fld id="{9386A93F-6D44-2341-95C7-2E010A24378A}" type="datetimeFigureOut">
               <a:rPr lang="en-US" smtClean="0"/>
-              <a:t>5/1/25</a:t>
+              <a:t>5/7/25</a:t>
             </a:fld>
             <a:endParaRPr lang="en-US"/>
           </a:p>
@@ -1009,7 +1009,7 @@
           <a:p>
             <a:fld id="{9386A93F-6D44-2341-95C7-2E010A24378A}" type="datetimeFigureOut">
               <a:rPr lang="en-US" smtClean="0"/>
-              <a:t>5/1/25</a:t>
+              <a:t>5/7/25</a:t>
             </a:fld>
             <a:endParaRPr lang="en-US"/>
           </a:p>
@@ -1241,7 +1241,7 @@
           <a:p>
             <a:fld id="{9386A93F-6D44-2341-95C7-2E010A24378A}" type="datetimeFigureOut">
               <a:rPr lang="en-US" smtClean="0"/>
-              <a:t>5/1/25</a:t>
+              <a:t>5/7/25</a:t>
             </a:fld>
             <a:endParaRPr lang="en-US"/>
           </a:p>
@@ -1608,7 +1608,7 @@
           <a:p>
             <a:fld id="{9386A93F-6D44-2341-95C7-2E010A24378A}" type="datetimeFigureOut">
               <a:rPr lang="en-US" smtClean="0"/>
-              <a:t>5/1/25</a:t>
+              <a:t>5/7/25</a:t>
             </a:fld>
             <a:endParaRPr lang="en-US"/>
           </a:p>
@@ -1726,7 +1726,7 @@
           <a:p>
             <a:fld id="{9386A93F-6D44-2341-95C7-2E010A24378A}" type="datetimeFigureOut">
               <a:rPr lang="en-US" smtClean="0"/>
-              <a:t>5/1/25</a:t>
+              <a:t>5/7/25</a:t>
             </a:fld>
             <a:endParaRPr lang="en-US"/>
           </a:p>
@@ -1821,7 +1821,7 @@
           <a:p>
             <a:fld id="{9386A93F-6D44-2341-95C7-2E010A24378A}" type="datetimeFigureOut">
               <a:rPr lang="en-US" smtClean="0"/>
-              <a:t>5/1/25</a:t>
+              <a:t>5/7/25</a:t>
             </a:fld>
             <a:endParaRPr lang="en-US"/>
           </a:p>
@@ -2098,7 +2098,7 @@
           <a:p>
             <a:fld id="{9386A93F-6D44-2341-95C7-2E010A24378A}" type="datetimeFigureOut">
               <a:rPr lang="en-US" smtClean="0"/>
-              <a:t>5/1/25</a:t>
+              <a:t>5/7/25</a:t>
             </a:fld>
             <a:endParaRPr lang="en-US"/>
           </a:p>
@@ -2355,7 +2355,7 @@
           <a:p>
             <a:fld id="{9386A93F-6D44-2341-95C7-2E010A24378A}" type="datetimeFigureOut">
               <a:rPr lang="en-US" smtClean="0"/>
-              <a:t>5/1/25</a:t>
+              <a:t>5/7/25</a:t>
             </a:fld>
             <a:endParaRPr lang="en-US"/>
           </a:p>
@@ -2568,7 +2568,7 @@
           <a:p>
             <a:fld id="{9386A93F-6D44-2341-95C7-2E010A24378A}" type="datetimeFigureOut">
               <a:rPr lang="en-US" smtClean="0"/>
-              <a:t>5/1/25</a:t>
+              <a:t>5/7/25</a:t>
             </a:fld>
             <a:endParaRPr lang="en-US"/>
           </a:p>
@@ -5342,6 +5342,142 @@
           </a:p>
         </p:txBody>
       </p:sp>
+      <p:sp>
+        <p:nvSpPr>
+          <p:cNvPr id="46" name="Sun 45">
+            <a:extLst>
+              <a:ext uri="{FF2B5EF4-FFF2-40B4-BE49-F238E27FC236}">
+                <a16:creationId xmlns:a16="http://schemas.microsoft.com/office/drawing/2014/main" id="{D05C800A-54C5-F74E-9FCB-6F12DF209D6E}"/>
+              </a:ext>
+            </a:extLst>
+          </p:cNvPr>
+          <p:cNvSpPr/>
+          <p:nvPr/>
+        </p:nvSpPr>
+        <p:spPr>
+          <a:xfrm>
+            <a:off x="21007435" y="2032719"/>
+            <a:ext cx="202828" cy="202828"/>
+          </a:xfrm>
+          <a:prstGeom prst="sun">
+            <a:avLst/>
+          </a:prstGeom>
+          <a:solidFill>
+            <a:schemeClr val="accent2"/>
+          </a:solidFill>
+        </p:spPr>
+        <p:style>
+          <a:lnRef idx="2">
+            <a:schemeClr val="accent1">
+              <a:shade val="50000"/>
+            </a:schemeClr>
+          </a:lnRef>
+          <a:fillRef idx="1">
+            <a:schemeClr val="accent1"/>
+          </a:fillRef>
+          <a:effectRef idx="0">
+            <a:schemeClr val="accent1"/>
+          </a:effectRef>
+          <a:fontRef idx="minor">
+            <a:schemeClr val="lt1"/>
+          </a:fontRef>
+        </p:style>
+        <p:txBody>
+          <a:bodyPr rtlCol="0" anchor="ctr"/>
+          <a:lstStyle/>
+          <a:p>
+            <a:pPr algn="ctr"/>
+            <a:endParaRPr lang="en-US"/>
+          </a:p>
+        </p:txBody>
+      </p:sp>
+      <p:sp>
+        <p:nvSpPr>
+          <p:cNvPr id="10" name="TextBox 9">
+            <a:extLst>
+              <a:ext uri="{FF2B5EF4-FFF2-40B4-BE49-F238E27FC236}">
+                <a16:creationId xmlns:a16="http://schemas.microsoft.com/office/drawing/2014/main" id="{FC48FAF8-9EFF-5447-B45F-342E51A576D0}"/>
+              </a:ext>
+            </a:extLst>
+          </p:cNvPr>
+          <p:cNvSpPr txBox="1"/>
+          <p:nvPr/>
+        </p:nvSpPr>
+        <p:spPr>
+          <a:xfrm>
+            <a:off x="21416638" y="1730779"/>
+            <a:ext cx="3078479" cy="830997"/>
+          </a:xfrm>
+          <a:prstGeom prst="rect">
+            <a:avLst/>
+          </a:prstGeom>
+          <a:noFill/>
+        </p:spPr>
+        <p:txBody>
+          <a:bodyPr wrap="square" rtlCol="0">
+            <a:spAutoFit/>
+          </a:bodyPr>
+          <a:lstStyle/>
+          <a:p>
+            <a:r>
+              <a:rPr lang="en-US" sz="2400" dirty="0"/>
+              <a:t>Indicates that step has alternate thresholds</a:t>
+            </a:r>
+          </a:p>
+        </p:txBody>
+      </p:sp>
+      <p:sp>
+        <p:nvSpPr>
+          <p:cNvPr id="11" name="Rectangle 10">
+            <a:extLst>
+              <a:ext uri="{FF2B5EF4-FFF2-40B4-BE49-F238E27FC236}">
+                <a16:creationId xmlns:a16="http://schemas.microsoft.com/office/drawing/2014/main" id="{5B1B0A67-B3DD-7F4E-8558-64AC8DB85BFD}"/>
+              </a:ext>
+            </a:extLst>
+          </p:cNvPr>
+          <p:cNvSpPr/>
+          <p:nvPr/>
+        </p:nvSpPr>
+        <p:spPr>
+          <a:xfrm>
+            <a:off x="20885514" y="1575519"/>
+            <a:ext cx="3599671" cy="1103762"/>
+          </a:xfrm>
+          <a:prstGeom prst="rect">
+            <a:avLst/>
+          </a:prstGeom>
+          <a:noFill/>
+          <a:ln>
+            <a:solidFill>
+              <a:schemeClr val="tx1"/>
+            </a:solidFill>
+          </a:ln>
+        </p:spPr>
+        <p:style>
+          <a:lnRef idx="2">
+            <a:schemeClr val="accent1">
+              <a:shade val="50000"/>
+            </a:schemeClr>
+          </a:lnRef>
+          <a:fillRef idx="1">
+            <a:schemeClr val="accent1"/>
+          </a:fillRef>
+          <a:effectRef idx="0">
+            <a:schemeClr val="accent1"/>
+          </a:effectRef>
+          <a:fontRef idx="minor">
+            <a:schemeClr val="lt1"/>
+          </a:fontRef>
+        </p:style>
+        <p:txBody>
+          <a:bodyPr rtlCol="0" anchor="ctr"/>
+          <a:lstStyle/>
+          <a:p>
+            <a:pPr algn="ctr"/>
+            <a:endParaRPr lang="en-US"/>
+          </a:p>
+        </p:txBody>
+      </p:sp>
     </p:spTree>
     <p:extLst>
       <p:ext uri="{BB962C8B-B14F-4D97-AF65-F5344CB8AC3E}">

--- a/HGT_filtering-pipeline.pptx
+++ b/HGT_filtering-pipeline.pptx
@@ -6,6 +6,7 @@
   </p:sldMasterIdLst>
   <p:sldIdLst>
     <p:sldId id="258" r:id="rId2"/>
+    <p:sldId id="259" r:id="rId3"/>
   </p:sldIdLst>
   <p:sldSz cx="25199975" cy="14712950"/>
   <p:notesSz cx="6858000" cy="9144000"/>
@@ -243,7 +244,7 @@
           <a:p>
             <a:fld id="{9386A93F-6D44-2341-95C7-2E010A24378A}" type="datetimeFigureOut">
               <a:rPr lang="en-US" smtClean="0"/>
-              <a:t>5/7/25</a:t>
+              <a:t>9/28/25</a:t>
             </a:fld>
             <a:endParaRPr lang="en-US"/>
           </a:p>
@@ -413,7 +414,7 @@
           <a:p>
             <a:fld id="{9386A93F-6D44-2341-95C7-2E010A24378A}" type="datetimeFigureOut">
               <a:rPr lang="en-US" smtClean="0"/>
-              <a:t>5/7/25</a:t>
+              <a:t>9/28/25</a:t>
             </a:fld>
             <a:endParaRPr lang="en-US"/>
           </a:p>
@@ -593,7 +594,7 @@
           <a:p>
             <a:fld id="{9386A93F-6D44-2341-95C7-2E010A24378A}" type="datetimeFigureOut">
               <a:rPr lang="en-US" smtClean="0"/>
-              <a:t>5/7/25</a:t>
+              <a:t>9/28/25</a:t>
             </a:fld>
             <a:endParaRPr lang="en-US"/>
           </a:p>
@@ -763,7 +764,7 @@
           <a:p>
             <a:fld id="{9386A93F-6D44-2341-95C7-2E010A24378A}" type="datetimeFigureOut">
               <a:rPr lang="en-US" smtClean="0"/>
-              <a:t>5/7/25</a:t>
+              <a:t>9/28/25</a:t>
             </a:fld>
             <a:endParaRPr lang="en-US"/>
           </a:p>
@@ -1009,7 +1010,7 @@
           <a:p>
             <a:fld id="{9386A93F-6D44-2341-95C7-2E010A24378A}" type="datetimeFigureOut">
               <a:rPr lang="en-US" smtClean="0"/>
-              <a:t>5/7/25</a:t>
+              <a:t>9/28/25</a:t>
             </a:fld>
             <a:endParaRPr lang="en-US"/>
           </a:p>
@@ -1241,7 +1242,7 @@
           <a:p>
             <a:fld id="{9386A93F-6D44-2341-95C7-2E010A24378A}" type="datetimeFigureOut">
               <a:rPr lang="en-US" smtClean="0"/>
-              <a:t>5/7/25</a:t>
+              <a:t>9/28/25</a:t>
             </a:fld>
             <a:endParaRPr lang="en-US"/>
           </a:p>
@@ -1608,7 +1609,7 @@
           <a:p>
             <a:fld id="{9386A93F-6D44-2341-95C7-2E010A24378A}" type="datetimeFigureOut">
               <a:rPr lang="en-US" smtClean="0"/>
-              <a:t>5/7/25</a:t>
+              <a:t>9/28/25</a:t>
             </a:fld>
             <a:endParaRPr lang="en-US"/>
           </a:p>
@@ -1726,7 +1727,7 @@
           <a:p>
             <a:fld id="{9386A93F-6D44-2341-95C7-2E010A24378A}" type="datetimeFigureOut">
               <a:rPr lang="en-US" smtClean="0"/>
-              <a:t>5/7/25</a:t>
+              <a:t>9/28/25</a:t>
             </a:fld>
             <a:endParaRPr lang="en-US"/>
           </a:p>
@@ -1821,7 +1822,7 @@
           <a:p>
             <a:fld id="{9386A93F-6D44-2341-95C7-2E010A24378A}" type="datetimeFigureOut">
               <a:rPr lang="en-US" smtClean="0"/>
-              <a:t>5/7/25</a:t>
+              <a:t>9/28/25</a:t>
             </a:fld>
             <a:endParaRPr lang="en-US"/>
           </a:p>
@@ -2098,7 +2099,7 @@
           <a:p>
             <a:fld id="{9386A93F-6D44-2341-95C7-2E010A24378A}" type="datetimeFigureOut">
               <a:rPr lang="en-US" smtClean="0"/>
-              <a:t>5/7/25</a:t>
+              <a:t>9/28/25</a:t>
             </a:fld>
             <a:endParaRPr lang="en-US"/>
           </a:p>
@@ -2355,7 +2356,7 @@
           <a:p>
             <a:fld id="{9386A93F-6D44-2341-95C7-2E010A24378A}" type="datetimeFigureOut">
               <a:rPr lang="en-US" smtClean="0"/>
-              <a:t>5/7/25</a:t>
+              <a:t>9/28/25</a:t>
             </a:fld>
             <a:endParaRPr lang="en-US"/>
           </a:p>
@@ -2568,7 +2569,7 @@
           <a:p>
             <a:fld id="{9386A93F-6D44-2341-95C7-2E010A24378A}" type="datetimeFigureOut">
               <a:rPr lang="en-US" smtClean="0"/>
-              <a:t>5/7/25</a:t>
+              <a:t>9/28/25</a:t>
             </a:fld>
             <a:endParaRPr lang="en-US"/>
           </a:p>
@@ -5491,6 +5492,829 @@
 </p:sld>
 </file>
 
+<file path=ppt/slides/slide2.xml><?xml version="1.0" encoding="utf-8"?>
+<p:sld xmlns:a="http://schemas.openxmlformats.org/drawingml/2006/main" xmlns:r="http://schemas.openxmlformats.org/officeDocument/2006/relationships" xmlns:p="http://schemas.openxmlformats.org/presentationml/2006/main">
+  <p:cSld>
+    <p:spTree>
+      <p:nvGrpSpPr>
+        <p:cNvPr id="1" name=""/>
+        <p:cNvGrpSpPr/>
+        <p:nvPr/>
+      </p:nvGrpSpPr>
+      <p:grpSpPr>
+        <a:xfrm>
+          <a:off x="0" y="0"/>
+          <a:ext cx="0" cy="0"/>
+          <a:chOff x="0" y="0"/>
+          <a:chExt cx="0" cy="0"/>
+        </a:xfrm>
+      </p:grpSpPr>
+      <p:sp>
+        <p:nvSpPr>
+          <p:cNvPr id="21" name="TextBox 20">
+            <a:extLst>
+              <a:ext uri="{FF2B5EF4-FFF2-40B4-BE49-F238E27FC236}">
+                <a16:creationId xmlns:a16="http://schemas.microsoft.com/office/drawing/2014/main" id="{545CE03D-C4E9-1D4B-A693-7D8993CDE0E9}"/>
+              </a:ext>
+            </a:extLst>
+          </p:cNvPr>
+          <p:cNvSpPr txBox="1"/>
+          <p:nvPr/>
+        </p:nvSpPr>
+        <p:spPr>
+          <a:xfrm>
+            <a:off x="312821" y="409074"/>
+            <a:ext cx="1731756" cy="584775"/>
+          </a:xfrm>
+          <a:prstGeom prst="rect">
+            <a:avLst/>
+          </a:prstGeom>
+          <a:noFill/>
+        </p:spPr>
+        <p:txBody>
+          <a:bodyPr wrap="none" rtlCol="0">
+            <a:spAutoFit/>
+          </a:bodyPr>
+          <a:lstStyle/>
+          <a:p>
+            <a:r>
+              <a:rPr lang="en-US" sz="3200" b="1" dirty="0"/>
+              <a:t>Figure S1</a:t>
+            </a:r>
+          </a:p>
+        </p:txBody>
+      </p:sp>
+      <p:sp>
+        <p:nvSpPr>
+          <p:cNvPr id="22" name="TextBox 21">
+            <a:extLst>
+              <a:ext uri="{FF2B5EF4-FFF2-40B4-BE49-F238E27FC236}">
+                <a16:creationId xmlns:a16="http://schemas.microsoft.com/office/drawing/2014/main" id="{A5A9C6EF-E05D-0940-81B5-B91353BEEB0B}"/>
+              </a:ext>
+            </a:extLst>
+          </p:cNvPr>
+          <p:cNvSpPr txBox="1"/>
+          <p:nvPr/>
+        </p:nvSpPr>
+        <p:spPr>
+          <a:xfrm>
+            <a:off x="10019868" y="224949"/>
+            <a:ext cx="4286245" cy="1339213"/>
+          </a:xfrm>
+          <a:prstGeom prst="rect">
+            <a:avLst/>
+          </a:prstGeom>
+          <a:noFill/>
+          <a:ln w="28575">
+            <a:solidFill>
+              <a:srgbClr val="FF0000"/>
+            </a:solidFill>
+          </a:ln>
+        </p:spPr>
+        <p:txBody>
+          <a:bodyPr wrap="square" rtlCol="0">
+            <a:spAutoFit/>
+          </a:bodyPr>
+          <a:lstStyle/>
+          <a:p>
+            <a:pPr algn="ctr"/>
+            <a:r>
+              <a:rPr lang="en-US" dirty="0"/>
+              <a:t>Inserts characterized via alignment of Blattabacterium fragments</a:t>
+            </a:r>
+          </a:p>
+        </p:txBody>
+      </p:sp>
+      <p:sp>
+        <p:nvSpPr>
+          <p:cNvPr id="23" name="Down Arrow 22">
+            <a:extLst>
+              <a:ext uri="{FF2B5EF4-FFF2-40B4-BE49-F238E27FC236}">
+                <a16:creationId xmlns:a16="http://schemas.microsoft.com/office/drawing/2014/main" id="{A405A806-B41B-9A48-BEE1-4B3BB92BB7DA}"/>
+              </a:ext>
+            </a:extLst>
+          </p:cNvPr>
+          <p:cNvSpPr/>
+          <p:nvPr/>
+        </p:nvSpPr>
+        <p:spPr>
+          <a:xfrm>
+            <a:off x="12060871" y="1622503"/>
+            <a:ext cx="369250" cy="736930"/>
+          </a:xfrm>
+          <a:prstGeom prst="downArrow">
+            <a:avLst/>
+          </a:prstGeom>
+          <a:solidFill>
+            <a:schemeClr val="tx1"/>
+          </a:solidFill>
+        </p:spPr>
+        <p:style>
+          <a:lnRef idx="2">
+            <a:schemeClr val="accent1">
+              <a:shade val="50000"/>
+            </a:schemeClr>
+          </a:lnRef>
+          <a:fillRef idx="1">
+            <a:schemeClr val="accent1"/>
+          </a:fillRef>
+          <a:effectRef idx="0">
+            <a:schemeClr val="accent1"/>
+          </a:effectRef>
+          <a:fontRef idx="minor">
+            <a:schemeClr val="lt1"/>
+          </a:fontRef>
+        </p:style>
+        <p:txBody>
+          <a:bodyPr rtlCol="0" anchor="ctr"/>
+          <a:lstStyle/>
+          <a:p>
+            <a:pPr algn="ctr"/>
+            <a:endParaRPr lang="en-US"/>
+          </a:p>
+        </p:txBody>
+      </p:sp>
+      <p:sp>
+        <p:nvSpPr>
+          <p:cNvPr id="24" name="TextBox 23">
+            <a:extLst>
+              <a:ext uri="{FF2B5EF4-FFF2-40B4-BE49-F238E27FC236}">
+                <a16:creationId xmlns:a16="http://schemas.microsoft.com/office/drawing/2014/main" id="{76B77F7F-A393-7142-8063-C1F7DEF7F40F}"/>
+              </a:ext>
+            </a:extLst>
+          </p:cNvPr>
+          <p:cNvSpPr txBox="1"/>
+          <p:nvPr/>
+        </p:nvSpPr>
+        <p:spPr>
+          <a:xfrm>
+            <a:off x="10121224" y="2448914"/>
+            <a:ext cx="4083535" cy="923586"/>
+          </a:xfrm>
+          <a:prstGeom prst="rect">
+            <a:avLst/>
+          </a:prstGeom>
+          <a:noFill/>
+          <a:ln w="28575">
+            <a:solidFill>
+              <a:schemeClr val="accent1"/>
+            </a:solidFill>
+          </a:ln>
+        </p:spPr>
+        <p:txBody>
+          <a:bodyPr wrap="square" rtlCol="0">
+            <a:spAutoFit/>
+          </a:bodyPr>
+          <a:lstStyle/>
+          <a:p>
+            <a:pPr algn="ctr"/>
+            <a:r>
+              <a:rPr lang="en-US" dirty="0"/>
+              <a:t>Genuine Blattabacterium sequences/inserts removed  </a:t>
+            </a:r>
+          </a:p>
+        </p:txBody>
+      </p:sp>
+      <p:sp>
+        <p:nvSpPr>
+          <p:cNvPr id="25" name="Down Arrow 24">
+            <a:extLst>
+              <a:ext uri="{FF2B5EF4-FFF2-40B4-BE49-F238E27FC236}">
+                <a16:creationId xmlns:a16="http://schemas.microsoft.com/office/drawing/2014/main" id="{13EB6D68-094E-FB46-BACB-633E2C97166D}"/>
+              </a:ext>
+            </a:extLst>
+          </p:cNvPr>
+          <p:cNvSpPr/>
+          <p:nvPr/>
+        </p:nvSpPr>
+        <p:spPr>
+          <a:xfrm>
+            <a:off x="12060871" y="3433405"/>
+            <a:ext cx="369250" cy="736930"/>
+          </a:xfrm>
+          <a:prstGeom prst="downArrow">
+            <a:avLst/>
+          </a:prstGeom>
+          <a:solidFill>
+            <a:schemeClr val="tx1"/>
+          </a:solidFill>
+        </p:spPr>
+        <p:style>
+          <a:lnRef idx="2">
+            <a:schemeClr val="accent1">
+              <a:shade val="50000"/>
+            </a:schemeClr>
+          </a:lnRef>
+          <a:fillRef idx="1">
+            <a:schemeClr val="accent1"/>
+          </a:fillRef>
+          <a:effectRef idx="0">
+            <a:schemeClr val="accent1"/>
+          </a:effectRef>
+          <a:fontRef idx="minor">
+            <a:schemeClr val="lt1"/>
+          </a:fontRef>
+        </p:style>
+        <p:txBody>
+          <a:bodyPr rtlCol="0" anchor="ctr"/>
+          <a:lstStyle/>
+          <a:p>
+            <a:pPr algn="ctr"/>
+            <a:endParaRPr lang="en-US"/>
+          </a:p>
+        </p:txBody>
+      </p:sp>
+      <p:sp>
+        <p:nvSpPr>
+          <p:cNvPr id="26" name="TextBox 25">
+            <a:extLst>
+              <a:ext uri="{FF2B5EF4-FFF2-40B4-BE49-F238E27FC236}">
+                <a16:creationId xmlns:a16="http://schemas.microsoft.com/office/drawing/2014/main" id="{5CB0DE31-354C-5147-892D-BF987031C0C4}"/>
+              </a:ext>
+            </a:extLst>
+          </p:cNvPr>
+          <p:cNvSpPr txBox="1"/>
+          <p:nvPr/>
+        </p:nvSpPr>
+        <p:spPr>
+          <a:xfrm>
+            <a:off x="10272712" y="4285801"/>
+            <a:ext cx="3757613" cy="507960"/>
+          </a:xfrm>
+          <a:prstGeom prst="rect">
+            <a:avLst/>
+          </a:prstGeom>
+          <a:noFill/>
+          <a:ln w="28575">
+            <a:solidFill>
+              <a:srgbClr val="FF0000"/>
+            </a:solidFill>
+          </a:ln>
+        </p:spPr>
+        <p:txBody>
+          <a:bodyPr wrap="square" rtlCol="0">
+            <a:spAutoFit/>
+          </a:bodyPr>
+          <a:lstStyle/>
+          <a:p>
+            <a:pPr algn="ctr"/>
+            <a:r>
+              <a:rPr lang="en-US" dirty="0"/>
+              <a:t>False duplicates removed</a:t>
+            </a:r>
+          </a:p>
+        </p:txBody>
+      </p:sp>
+      <p:sp>
+        <p:nvSpPr>
+          <p:cNvPr id="27" name="Down Arrow 26">
+            <a:extLst>
+              <a:ext uri="{FF2B5EF4-FFF2-40B4-BE49-F238E27FC236}">
+                <a16:creationId xmlns:a16="http://schemas.microsoft.com/office/drawing/2014/main" id="{334B1BBD-BB80-274A-9E59-42BF196F379C}"/>
+              </a:ext>
+            </a:extLst>
+          </p:cNvPr>
+          <p:cNvSpPr/>
+          <p:nvPr/>
+        </p:nvSpPr>
+        <p:spPr>
+          <a:xfrm>
+            <a:off x="12060871" y="4879032"/>
+            <a:ext cx="369250" cy="736930"/>
+          </a:xfrm>
+          <a:prstGeom prst="downArrow">
+            <a:avLst/>
+          </a:prstGeom>
+          <a:solidFill>
+            <a:schemeClr val="tx1"/>
+          </a:solidFill>
+        </p:spPr>
+        <p:style>
+          <a:lnRef idx="2">
+            <a:schemeClr val="accent1">
+              <a:shade val="50000"/>
+            </a:schemeClr>
+          </a:lnRef>
+          <a:fillRef idx="1">
+            <a:schemeClr val="accent1"/>
+          </a:fillRef>
+          <a:effectRef idx="0">
+            <a:schemeClr val="accent1"/>
+          </a:effectRef>
+          <a:fontRef idx="minor">
+            <a:schemeClr val="lt1"/>
+          </a:fontRef>
+        </p:style>
+        <p:txBody>
+          <a:bodyPr rtlCol="0" anchor="ctr"/>
+          <a:lstStyle/>
+          <a:p>
+            <a:pPr algn="ctr"/>
+            <a:endParaRPr lang="en-US"/>
+          </a:p>
+        </p:txBody>
+      </p:sp>
+      <p:sp>
+        <p:nvSpPr>
+          <p:cNvPr id="28" name="TextBox 27">
+            <a:extLst>
+              <a:ext uri="{FF2B5EF4-FFF2-40B4-BE49-F238E27FC236}">
+                <a16:creationId xmlns:a16="http://schemas.microsoft.com/office/drawing/2014/main" id="{F21F511E-80BA-E546-860F-1F2CC2BBEC6D}"/>
+              </a:ext>
+            </a:extLst>
+          </p:cNvPr>
+          <p:cNvSpPr txBox="1"/>
+          <p:nvPr/>
+        </p:nvSpPr>
+        <p:spPr>
+          <a:xfrm>
+            <a:off x="10203728" y="5733444"/>
+            <a:ext cx="4083535" cy="923586"/>
+          </a:xfrm>
+          <a:prstGeom prst="rect">
+            <a:avLst/>
+          </a:prstGeom>
+          <a:noFill/>
+          <a:ln w="28575">
+            <a:solidFill>
+              <a:schemeClr val="accent1"/>
+            </a:solidFill>
+          </a:ln>
+        </p:spPr>
+        <p:txBody>
+          <a:bodyPr wrap="square" rtlCol="0">
+            <a:spAutoFit/>
+          </a:bodyPr>
+          <a:lstStyle/>
+          <a:p>
+            <a:pPr algn="ctr"/>
+            <a:r>
+              <a:rPr lang="en-US" dirty="0"/>
+              <a:t>Highly repetitive low-complexity inserts removed </a:t>
+            </a:r>
+          </a:p>
+        </p:txBody>
+      </p:sp>
+      <p:sp>
+        <p:nvSpPr>
+          <p:cNvPr id="29" name="Down Arrow 28">
+            <a:extLst>
+              <a:ext uri="{FF2B5EF4-FFF2-40B4-BE49-F238E27FC236}">
+                <a16:creationId xmlns:a16="http://schemas.microsoft.com/office/drawing/2014/main" id="{C6AAEFA2-1CAE-6840-A1E2-B6E347B70ED0}"/>
+              </a:ext>
+            </a:extLst>
+          </p:cNvPr>
+          <p:cNvSpPr/>
+          <p:nvPr/>
+        </p:nvSpPr>
+        <p:spPr>
+          <a:xfrm>
+            <a:off x="12060870" y="6722933"/>
+            <a:ext cx="369250" cy="736930"/>
+          </a:xfrm>
+          <a:prstGeom prst="downArrow">
+            <a:avLst/>
+          </a:prstGeom>
+          <a:solidFill>
+            <a:schemeClr val="tx1"/>
+          </a:solidFill>
+        </p:spPr>
+        <p:style>
+          <a:lnRef idx="2">
+            <a:schemeClr val="accent1">
+              <a:shade val="50000"/>
+            </a:schemeClr>
+          </a:lnRef>
+          <a:fillRef idx="1">
+            <a:schemeClr val="accent1"/>
+          </a:fillRef>
+          <a:effectRef idx="0">
+            <a:schemeClr val="accent1"/>
+          </a:effectRef>
+          <a:fontRef idx="minor">
+            <a:schemeClr val="lt1"/>
+          </a:fontRef>
+        </p:style>
+        <p:txBody>
+          <a:bodyPr rtlCol="0" anchor="ctr"/>
+          <a:lstStyle/>
+          <a:p>
+            <a:pPr algn="ctr"/>
+            <a:endParaRPr lang="en-US"/>
+          </a:p>
+        </p:txBody>
+      </p:sp>
+      <p:sp>
+        <p:nvSpPr>
+          <p:cNvPr id="30" name="TextBox 29">
+            <a:extLst>
+              <a:ext uri="{FF2B5EF4-FFF2-40B4-BE49-F238E27FC236}">
+                <a16:creationId xmlns:a16="http://schemas.microsoft.com/office/drawing/2014/main" id="{EDFFBEE2-53CA-B746-9037-C0B9028BE09F}"/>
+              </a:ext>
+            </a:extLst>
+          </p:cNvPr>
+          <p:cNvSpPr txBox="1"/>
+          <p:nvPr/>
+        </p:nvSpPr>
+        <p:spPr>
+          <a:xfrm>
+            <a:off x="10410669" y="7572886"/>
+            <a:ext cx="3557587" cy="923586"/>
+          </a:xfrm>
+          <a:prstGeom prst="rect">
+            <a:avLst/>
+          </a:prstGeom>
+          <a:noFill/>
+          <a:ln w="28575">
+            <a:solidFill>
+              <a:schemeClr val="accent1"/>
+            </a:solidFill>
+          </a:ln>
+        </p:spPr>
+        <p:txBody>
+          <a:bodyPr wrap="square" rtlCol="0">
+            <a:spAutoFit/>
+          </a:bodyPr>
+          <a:lstStyle/>
+          <a:p>
+            <a:pPr algn="ctr"/>
+            <a:r>
+              <a:rPr lang="en-US" dirty="0"/>
+              <a:t>Inserts more similar to other bacteria removed</a:t>
+            </a:r>
+          </a:p>
+        </p:txBody>
+      </p:sp>
+      <p:sp>
+        <p:nvSpPr>
+          <p:cNvPr id="31" name="Down Arrow 30">
+            <a:extLst>
+              <a:ext uri="{FF2B5EF4-FFF2-40B4-BE49-F238E27FC236}">
+                <a16:creationId xmlns:a16="http://schemas.microsoft.com/office/drawing/2014/main" id="{8D4983D3-C9AC-1140-A50C-42DAAA142EF6}"/>
+              </a:ext>
+            </a:extLst>
+          </p:cNvPr>
+          <p:cNvSpPr/>
+          <p:nvPr/>
+        </p:nvSpPr>
+        <p:spPr>
+          <a:xfrm rot="2912297">
+            <a:off x="10688163" y="9920525"/>
+            <a:ext cx="369250" cy="1074430"/>
+          </a:xfrm>
+          <a:prstGeom prst="downArrow">
+            <a:avLst/>
+          </a:prstGeom>
+          <a:solidFill>
+            <a:schemeClr val="tx1"/>
+          </a:solidFill>
+        </p:spPr>
+        <p:style>
+          <a:lnRef idx="2">
+            <a:schemeClr val="accent1">
+              <a:shade val="50000"/>
+            </a:schemeClr>
+          </a:lnRef>
+          <a:fillRef idx="1">
+            <a:schemeClr val="accent1"/>
+          </a:fillRef>
+          <a:effectRef idx="0">
+            <a:schemeClr val="accent1"/>
+          </a:effectRef>
+          <a:fontRef idx="minor">
+            <a:schemeClr val="lt1"/>
+          </a:fontRef>
+        </p:style>
+        <p:txBody>
+          <a:bodyPr rtlCol="0" anchor="ctr"/>
+          <a:lstStyle/>
+          <a:p>
+            <a:pPr algn="ctr"/>
+            <a:endParaRPr lang="en-US"/>
+          </a:p>
+        </p:txBody>
+      </p:sp>
+      <p:sp>
+        <p:nvSpPr>
+          <p:cNvPr id="32" name="Down Arrow 31">
+            <a:extLst>
+              <a:ext uri="{FF2B5EF4-FFF2-40B4-BE49-F238E27FC236}">
+                <a16:creationId xmlns:a16="http://schemas.microsoft.com/office/drawing/2014/main" id="{197907DB-ED72-D644-B079-747A06132BBD}"/>
+              </a:ext>
+            </a:extLst>
+          </p:cNvPr>
+          <p:cNvSpPr/>
+          <p:nvPr/>
+        </p:nvSpPr>
+        <p:spPr>
+          <a:xfrm rot="18687703" flipH="1">
+            <a:off x="13258800" y="9920525"/>
+            <a:ext cx="369250" cy="1074430"/>
+          </a:xfrm>
+          <a:prstGeom prst="downArrow">
+            <a:avLst/>
+          </a:prstGeom>
+          <a:solidFill>
+            <a:schemeClr val="tx1"/>
+          </a:solidFill>
+        </p:spPr>
+        <p:style>
+          <a:lnRef idx="2">
+            <a:schemeClr val="accent1">
+              <a:shade val="50000"/>
+            </a:schemeClr>
+          </a:lnRef>
+          <a:fillRef idx="1">
+            <a:schemeClr val="accent1"/>
+          </a:fillRef>
+          <a:effectRef idx="0">
+            <a:schemeClr val="accent1"/>
+          </a:effectRef>
+          <a:fontRef idx="minor">
+            <a:schemeClr val="lt1"/>
+          </a:fontRef>
+        </p:style>
+        <p:txBody>
+          <a:bodyPr rtlCol="0" anchor="ctr"/>
+          <a:lstStyle/>
+          <a:p>
+            <a:pPr algn="ctr"/>
+            <a:endParaRPr lang="en-US"/>
+          </a:p>
+        </p:txBody>
+      </p:sp>
+      <p:sp>
+        <p:nvSpPr>
+          <p:cNvPr id="33" name="TextBox 32">
+            <a:extLst>
+              <a:ext uri="{FF2B5EF4-FFF2-40B4-BE49-F238E27FC236}">
+                <a16:creationId xmlns:a16="http://schemas.microsoft.com/office/drawing/2014/main" id="{A36A9684-8A5D-FA4C-8934-39EEF8AA7AAF}"/>
+              </a:ext>
+            </a:extLst>
+          </p:cNvPr>
+          <p:cNvSpPr txBox="1"/>
+          <p:nvPr/>
+        </p:nvSpPr>
+        <p:spPr>
+          <a:xfrm>
+            <a:off x="9329738" y="10998660"/>
+            <a:ext cx="1757362" cy="507960"/>
+          </a:xfrm>
+          <a:prstGeom prst="rect">
+            <a:avLst/>
+          </a:prstGeom>
+          <a:noFill/>
+          <a:ln w="28575">
+            <a:solidFill>
+              <a:schemeClr val="accent1"/>
+            </a:solidFill>
+          </a:ln>
+        </p:spPr>
+        <p:txBody>
+          <a:bodyPr wrap="square" rtlCol="0">
+            <a:spAutoFit/>
+          </a:bodyPr>
+          <a:lstStyle/>
+          <a:p>
+            <a:pPr algn="ctr"/>
+            <a:r>
+              <a:rPr lang="en-US" dirty="0"/>
+              <a:t>All inserts</a:t>
+            </a:r>
+          </a:p>
+        </p:txBody>
+      </p:sp>
+      <p:sp>
+        <p:nvSpPr>
+          <p:cNvPr id="34" name="TextBox 33">
+            <a:extLst>
+              <a:ext uri="{FF2B5EF4-FFF2-40B4-BE49-F238E27FC236}">
+                <a16:creationId xmlns:a16="http://schemas.microsoft.com/office/drawing/2014/main" id="{0A94E8B1-219B-EA48-A183-DE1765FF26DB}"/>
+              </a:ext>
+            </a:extLst>
+          </p:cNvPr>
+          <p:cNvSpPr txBox="1"/>
+          <p:nvPr/>
+        </p:nvSpPr>
+        <p:spPr>
+          <a:xfrm>
+            <a:off x="12508469" y="10998660"/>
+            <a:ext cx="4265056" cy="923586"/>
+          </a:xfrm>
+          <a:prstGeom prst="rect">
+            <a:avLst/>
+          </a:prstGeom>
+          <a:noFill/>
+          <a:ln w="28575">
+            <a:solidFill>
+              <a:srgbClr val="FF0000"/>
+            </a:solidFill>
+          </a:ln>
+        </p:spPr>
+        <p:txBody>
+          <a:bodyPr wrap="square" rtlCol="0">
+            <a:spAutoFit/>
+          </a:bodyPr>
+          <a:lstStyle/>
+          <a:p>
+            <a:pPr algn="ctr"/>
+            <a:r>
+              <a:rPr lang="en-US" dirty="0"/>
+              <a:t>Unique inserts identified (duplicated inserts removed)</a:t>
+            </a:r>
+          </a:p>
+        </p:txBody>
+      </p:sp>
+      <p:sp>
+        <p:nvSpPr>
+          <p:cNvPr id="36" name="Down Arrow 35">
+            <a:extLst>
+              <a:ext uri="{FF2B5EF4-FFF2-40B4-BE49-F238E27FC236}">
+                <a16:creationId xmlns:a16="http://schemas.microsoft.com/office/drawing/2014/main" id="{0568BB51-2C85-0D4E-BB1B-AA5ED2B3A0C7}"/>
+              </a:ext>
+            </a:extLst>
+          </p:cNvPr>
+          <p:cNvSpPr/>
+          <p:nvPr/>
+        </p:nvSpPr>
+        <p:spPr>
+          <a:xfrm>
+            <a:off x="14612421" y="12012164"/>
+            <a:ext cx="369250" cy="736930"/>
+          </a:xfrm>
+          <a:prstGeom prst="downArrow">
+            <a:avLst/>
+          </a:prstGeom>
+        </p:spPr>
+        <p:style>
+          <a:lnRef idx="2">
+            <a:schemeClr val="accent1">
+              <a:shade val="50000"/>
+            </a:schemeClr>
+          </a:lnRef>
+          <a:fillRef idx="1">
+            <a:schemeClr val="accent1"/>
+          </a:fillRef>
+          <a:effectRef idx="0">
+            <a:schemeClr val="accent1"/>
+          </a:effectRef>
+          <a:fontRef idx="minor">
+            <a:schemeClr val="lt1"/>
+          </a:fontRef>
+        </p:style>
+        <p:txBody>
+          <a:bodyPr rtlCol="0" anchor="ctr"/>
+          <a:lstStyle/>
+          <a:p>
+            <a:pPr algn="ctr"/>
+            <a:endParaRPr lang="en-US"/>
+          </a:p>
+        </p:txBody>
+      </p:sp>
+      <p:sp>
+        <p:nvSpPr>
+          <p:cNvPr id="37" name="TextBox 36">
+            <a:extLst>
+              <a:ext uri="{FF2B5EF4-FFF2-40B4-BE49-F238E27FC236}">
+                <a16:creationId xmlns:a16="http://schemas.microsoft.com/office/drawing/2014/main" id="{8F2C0856-C1E4-4C45-B66D-8493737319CA}"/>
+              </a:ext>
+            </a:extLst>
+          </p:cNvPr>
+          <p:cNvSpPr txBox="1"/>
+          <p:nvPr/>
+        </p:nvSpPr>
+        <p:spPr>
+          <a:xfrm>
+            <a:off x="13199742" y="12872549"/>
+            <a:ext cx="3194607" cy="923586"/>
+          </a:xfrm>
+          <a:prstGeom prst="rect">
+            <a:avLst/>
+          </a:prstGeom>
+          <a:noFill/>
+          <a:ln w="28575">
+            <a:solidFill>
+              <a:schemeClr val="accent1"/>
+            </a:solidFill>
+          </a:ln>
+        </p:spPr>
+        <p:txBody>
+          <a:bodyPr wrap="square" rtlCol="0">
+            <a:spAutoFit/>
+          </a:bodyPr>
+          <a:lstStyle/>
+          <a:p>
+            <a:pPr algn="ctr"/>
+            <a:r>
+              <a:rPr lang="en-US" dirty="0"/>
+              <a:t>Putatively ancestral inserts identified</a:t>
+            </a:r>
+          </a:p>
+        </p:txBody>
+      </p:sp>
+      <p:sp>
+        <p:nvSpPr>
+          <p:cNvPr id="38" name="Down Arrow 37">
+            <a:extLst>
+              <a:ext uri="{FF2B5EF4-FFF2-40B4-BE49-F238E27FC236}">
+                <a16:creationId xmlns:a16="http://schemas.microsoft.com/office/drawing/2014/main" id="{1EB783CD-2D15-174D-9711-DABB0169C942}"/>
+              </a:ext>
+            </a:extLst>
+          </p:cNvPr>
+          <p:cNvSpPr/>
+          <p:nvPr/>
+        </p:nvSpPr>
+        <p:spPr>
+          <a:xfrm>
+            <a:off x="12060870" y="8550298"/>
+            <a:ext cx="369250" cy="736930"/>
+          </a:xfrm>
+          <a:prstGeom prst="downArrow">
+            <a:avLst/>
+          </a:prstGeom>
+          <a:solidFill>
+            <a:schemeClr val="tx1"/>
+          </a:solidFill>
+        </p:spPr>
+        <p:style>
+          <a:lnRef idx="2">
+            <a:schemeClr val="accent1">
+              <a:shade val="50000"/>
+            </a:schemeClr>
+          </a:lnRef>
+          <a:fillRef idx="1">
+            <a:schemeClr val="accent1"/>
+          </a:fillRef>
+          <a:effectRef idx="0">
+            <a:schemeClr val="accent1"/>
+          </a:effectRef>
+          <a:fontRef idx="minor">
+            <a:schemeClr val="lt1"/>
+          </a:fontRef>
+        </p:style>
+        <p:txBody>
+          <a:bodyPr rtlCol="0" anchor="ctr"/>
+          <a:lstStyle/>
+          <a:p>
+            <a:pPr algn="ctr"/>
+            <a:endParaRPr lang="en-US"/>
+          </a:p>
+        </p:txBody>
+      </p:sp>
+      <p:sp>
+        <p:nvSpPr>
+          <p:cNvPr id="39" name="TextBox 38">
+            <a:extLst>
+              <a:ext uri="{FF2B5EF4-FFF2-40B4-BE49-F238E27FC236}">
+                <a16:creationId xmlns:a16="http://schemas.microsoft.com/office/drawing/2014/main" id="{207D494A-26E6-D34F-8167-8317CFAA2F25}"/>
+              </a:ext>
+            </a:extLst>
+          </p:cNvPr>
+          <p:cNvSpPr txBox="1"/>
+          <p:nvPr/>
+        </p:nvSpPr>
+        <p:spPr>
+          <a:xfrm>
+            <a:off x="10203728" y="9410683"/>
+            <a:ext cx="4083535" cy="507960"/>
+          </a:xfrm>
+          <a:prstGeom prst="rect">
+            <a:avLst/>
+          </a:prstGeom>
+          <a:noFill/>
+          <a:ln w="28575">
+            <a:solidFill>
+              <a:schemeClr val="accent1"/>
+            </a:solidFill>
+          </a:ln>
+        </p:spPr>
+        <p:txBody>
+          <a:bodyPr wrap="square" rtlCol="0">
+            <a:spAutoFit/>
+          </a:bodyPr>
+          <a:lstStyle/>
+          <a:p>
+            <a:pPr algn="ctr"/>
+            <a:r>
+              <a:rPr lang="en-US" dirty="0"/>
+              <a:t>Manual curation of inserts</a:t>
+            </a:r>
+          </a:p>
+        </p:txBody>
+      </p:sp>
+    </p:spTree>
+    <p:extLst>
+      <p:ext uri="{BB962C8B-B14F-4D97-AF65-F5344CB8AC3E}">
+        <p14:creationId xmlns:p14="http://schemas.microsoft.com/office/powerpoint/2010/main" val="1398200414"/>
+      </p:ext>
+    </p:extLst>
+  </p:cSld>
+  <p:clrMapOvr>
+    <a:masterClrMapping/>
+  </p:clrMapOvr>
+</p:sld>
+</file>
+
 <file path=ppt/theme/theme1.xml><?xml version="1.0" encoding="utf-8"?>
 <a:theme xmlns:a="http://schemas.openxmlformats.org/drawingml/2006/main" name="Office Theme">
   <a:themeElements>

--- a/HGT_filtering-pipeline.pptx
+++ b/HGT_filtering-pipeline.pptx
@@ -244,7 +244,7 @@
           <a:p>
             <a:fld id="{9386A93F-6D44-2341-95C7-2E010A24378A}" type="datetimeFigureOut">
               <a:rPr lang="en-US" smtClean="0"/>
-              <a:t>9/28/25</a:t>
+              <a:t>10/19/25</a:t>
             </a:fld>
             <a:endParaRPr lang="en-US"/>
           </a:p>
@@ -414,7 +414,7 @@
           <a:p>
             <a:fld id="{9386A93F-6D44-2341-95C7-2E010A24378A}" type="datetimeFigureOut">
               <a:rPr lang="en-US" smtClean="0"/>
-              <a:t>9/28/25</a:t>
+              <a:t>10/19/25</a:t>
             </a:fld>
             <a:endParaRPr lang="en-US"/>
           </a:p>
@@ -594,7 +594,7 @@
           <a:p>
             <a:fld id="{9386A93F-6D44-2341-95C7-2E010A24378A}" type="datetimeFigureOut">
               <a:rPr lang="en-US" smtClean="0"/>
-              <a:t>9/28/25</a:t>
+              <a:t>10/19/25</a:t>
             </a:fld>
             <a:endParaRPr lang="en-US"/>
           </a:p>
@@ -764,7 +764,7 @@
           <a:p>
             <a:fld id="{9386A93F-6D44-2341-95C7-2E010A24378A}" type="datetimeFigureOut">
               <a:rPr lang="en-US" smtClean="0"/>
-              <a:t>9/28/25</a:t>
+              <a:t>10/19/25</a:t>
             </a:fld>
             <a:endParaRPr lang="en-US"/>
           </a:p>
@@ -1010,7 +1010,7 @@
           <a:p>
             <a:fld id="{9386A93F-6D44-2341-95C7-2E010A24378A}" type="datetimeFigureOut">
               <a:rPr lang="en-US" smtClean="0"/>
-              <a:t>9/28/25</a:t>
+              <a:t>10/19/25</a:t>
             </a:fld>
             <a:endParaRPr lang="en-US"/>
           </a:p>
@@ -1242,7 +1242,7 @@
           <a:p>
             <a:fld id="{9386A93F-6D44-2341-95C7-2E010A24378A}" type="datetimeFigureOut">
               <a:rPr lang="en-US" smtClean="0"/>
-              <a:t>9/28/25</a:t>
+              <a:t>10/19/25</a:t>
             </a:fld>
             <a:endParaRPr lang="en-US"/>
           </a:p>
@@ -1609,7 +1609,7 @@
           <a:p>
             <a:fld id="{9386A93F-6D44-2341-95C7-2E010A24378A}" type="datetimeFigureOut">
               <a:rPr lang="en-US" smtClean="0"/>
-              <a:t>9/28/25</a:t>
+              <a:t>10/19/25</a:t>
             </a:fld>
             <a:endParaRPr lang="en-US"/>
           </a:p>
@@ -1727,7 +1727,7 @@
           <a:p>
             <a:fld id="{9386A93F-6D44-2341-95C7-2E010A24378A}" type="datetimeFigureOut">
               <a:rPr lang="en-US" smtClean="0"/>
-              <a:t>9/28/25</a:t>
+              <a:t>10/19/25</a:t>
             </a:fld>
             <a:endParaRPr lang="en-US"/>
           </a:p>
@@ -1822,7 +1822,7 @@
           <a:p>
             <a:fld id="{9386A93F-6D44-2341-95C7-2E010A24378A}" type="datetimeFigureOut">
               <a:rPr lang="en-US" smtClean="0"/>
-              <a:t>9/28/25</a:t>
+              <a:t>10/19/25</a:t>
             </a:fld>
             <a:endParaRPr lang="en-US"/>
           </a:p>
@@ -2099,7 +2099,7 @@
           <a:p>
             <a:fld id="{9386A93F-6D44-2341-95C7-2E010A24378A}" type="datetimeFigureOut">
               <a:rPr lang="en-US" smtClean="0"/>
-              <a:t>9/28/25</a:t>
+              <a:t>10/19/25</a:t>
             </a:fld>
             <a:endParaRPr lang="en-US"/>
           </a:p>
@@ -2356,7 +2356,7 @@
           <a:p>
             <a:fld id="{9386A93F-6D44-2341-95C7-2E010A24378A}" type="datetimeFigureOut">
               <a:rPr lang="en-US" smtClean="0"/>
-              <a:t>9/28/25</a:t>
+              <a:t>10/19/25</a:t>
             </a:fld>
             <a:endParaRPr lang="en-US"/>
           </a:p>
@@ -2569,7 +2569,7 @@
           <a:p>
             <a:fld id="{9386A93F-6D44-2341-95C7-2E010A24378A}" type="datetimeFigureOut">
               <a:rPr lang="en-US" smtClean="0"/>
-              <a:t>9/28/25</a:t>
+              <a:t>10/19/25</a:t>
             </a:fld>
             <a:endParaRPr lang="en-US"/>
           </a:p>
@@ -5511,6 +5511,60 @@
       </p:grpSpPr>
       <p:sp>
         <p:nvSpPr>
+          <p:cNvPr id="2" name="Rectangle 1">
+            <a:extLst>
+              <a:ext uri="{FF2B5EF4-FFF2-40B4-BE49-F238E27FC236}">
+                <a16:creationId xmlns:a16="http://schemas.microsoft.com/office/drawing/2014/main" id="{A000F6BC-E29F-1440-BC0C-A26FF0DCE7A6}"/>
+              </a:ext>
+            </a:extLst>
+          </p:cNvPr>
+          <p:cNvSpPr/>
+          <p:nvPr/>
+        </p:nvSpPr>
+        <p:spPr>
+          <a:xfrm>
+            <a:off x="7315200" y="13919385"/>
+            <a:ext cx="10416209" cy="3467467"/>
+          </a:xfrm>
+          <a:prstGeom prst="rect">
+            <a:avLst/>
+          </a:prstGeom>
+          <a:solidFill>
+            <a:schemeClr val="bg1"/>
+          </a:solidFill>
+          <a:ln>
+            <a:solidFill>
+              <a:schemeClr val="bg1"/>
+            </a:solidFill>
+          </a:ln>
+        </p:spPr>
+        <p:style>
+          <a:lnRef idx="2">
+            <a:schemeClr val="accent1">
+              <a:shade val="50000"/>
+            </a:schemeClr>
+          </a:lnRef>
+          <a:fillRef idx="1">
+            <a:schemeClr val="accent1"/>
+          </a:fillRef>
+          <a:effectRef idx="0">
+            <a:schemeClr val="accent1"/>
+          </a:effectRef>
+          <a:fontRef idx="minor">
+            <a:schemeClr val="lt1"/>
+          </a:fontRef>
+        </p:style>
+        <p:txBody>
+          <a:bodyPr rtlCol="0" anchor="ctr"/>
+          <a:lstStyle/>
+          <a:p>
+            <a:pPr algn="ctr"/>
+            <a:endParaRPr lang="en-US"/>
+          </a:p>
+        </p:txBody>
+      </p:sp>
+      <p:sp>
+        <p:nvSpPr>
           <p:cNvPr id="21" name="TextBox 20">
             <a:extLst>
               <a:ext uri="{FF2B5EF4-FFF2-40B4-BE49-F238E27FC236}">
@@ -5608,6 +5662,11 @@
           <a:solidFill>
             <a:schemeClr val="tx1"/>
           </a:solidFill>
+          <a:ln>
+            <a:solidFill>
+              <a:schemeClr val="tx1"/>
+            </a:solidFill>
+          </a:ln>
         </p:spPr>
         <p:style>
           <a:lnRef idx="2">
@@ -5698,6 +5757,11 @@
           <a:solidFill>
             <a:schemeClr val="tx1"/>
           </a:solidFill>
+          <a:ln>
+            <a:solidFill>
+              <a:schemeClr val="tx1"/>
+            </a:solidFill>
+          </a:ln>
         </p:spPr>
         <p:style>
           <a:lnRef idx="2">
@@ -5788,6 +5852,11 @@
           <a:solidFill>
             <a:schemeClr val="tx1"/>
           </a:solidFill>
+          <a:ln>
+            <a:solidFill>
+              <a:schemeClr val="tx1"/>
+            </a:solidFill>
+          </a:ln>
         </p:spPr>
         <p:style>
           <a:lnRef idx="2">
@@ -5878,6 +5947,11 @@
           <a:solidFill>
             <a:schemeClr val="tx1"/>
           </a:solidFill>
+          <a:ln>
+            <a:solidFill>
+              <a:schemeClr val="tx1"/>
+            </a:solidFill>
+          </a:ln>
         </p:spPr>
         <p:style>
           <a:lnRef idx="2">
@@ -5959,7 +6033,7 @@
         </p:nvSpPr>
         <p:spPr>
           <a:xfrm rot="2912297">
-            <a:off x="10688163" y="9920525"/>
+            <a:off x="10688163" y="9869725"/>
             <a:ext cx="369250" cy="1074430"/>
           </a:xfrm>
           <a:prstGeom prst="downArrow">
@@ -5968,6 +6042,11 @@
           <a:solidFill>
             <a:schemeClr val="tx1"/>
           </a:solidFill>
+          <a:ln>
+            <a:solidFill>
+              <a:schemeClr val="tx1"/>
+            </a:solidFill>
+          </a:ln>
         </p:spPr>
         <p:style>
           <a:lnRef idx="2">
@@ -6008,7 +6087,7 @@
         </p:nvSpPr>
         <p:spPr>
           <a:xfrm rot="18687703" flipH="1">
-            <a:off x="13258800" y="9920525"/>
+            <a:off x="13258800" y="9869725"/>
             <a:ext cx="369250" cy="1074430"/>
           </a:xfrm>
           <a:prstGeom prst="downArrow">
@@ -6017,6 +6096,11 @@
           <a:solidFill>
             <a:schemeClr val="tx1"/>
           </a:solidFill>
+          <a:ln>
+            <a:solidFill>
+              <a:schemeClr val="tx1"/>
+            </a:solidFill>
+          </a:ln>
         </p:spPr>
         <p:style>
           <a:lnRef idx="2">
@@ -6057,7 +6141,7 @@
         </p:nvSpPr>
         <p:spPr>
           <a:xfrm>
-            <a:off x="9329738" y="10998660"/>
+            <a:off x="9329738" y="10947860"/>
             <a:ext cx="1757362" cy="507960"/>
           </a:xfrm>
           <a:prstGeom prst="rect">
@@ -6098,7 +6182,7 @@
         </p:nvSpPr>
         <p:spPr>
           <a:xfrm>
-            <a:off x="12508469" y="10998660"/>
+            <a:off x="12508469" y="10947860"/>
             <a:ext cx="4265056" cy="923586"/>
           </a:xfrm>
           <a:prstGeom prst="rect">
@@ -6122,52 +6206,6 @@
               <a:rPr lang="en-US" dirty="0"/>
               <a:t>Unique inserts identified (duplicated inserts removed)</a:t>
             </a:r>
-          </a:p>
-        </p:txBody>
-      </p:sp>
-      <p:sp>
-        <p:nvSpPr>
-          <p:cNvPr id="36" name="Down Arrow 35">
-            <a:extLst>
-              <a:ext uri="{FF2B5EF4-FFF2-40B4-BE49-F238E27FC236}">
-                <a16:creationId xmlns:a16="http://schemas.microsoft.com/office/drawing/2014/main" id="{0568BB51-2C85-0D4E-BB1B-AA5ED2B3A0C7}"/>
-              </a:ext>
-            </a:extLst>
-          </p:cNvPr>
-          <p:cNvSpPr/>
-          <p:nvPr/>
-        </p:nvSpPr>
-        <p:spPr>
-          <a:xfrm>
-            <a:off x="14612421" y="12012164"/>
-            <a:ext cx="369250" cy="736930"/>
-          </a:xfrm>
-          <a:prstGeom prst="downArrow">
-            <a:avLst/>
-          </a:prstGeom>
-        </p:spPr>
-        <p:style>
-          <a:lnRef idx="2">
-            <a:schemeClr val="accent1">
-              <a:shade val="50000"/>
-            </a:schemeClr>
-          </a:lnRef>
-          <a:fillRef idx="1">
-            <a:schemeClr val="accent1"/>
-          </a:fillRef>
-          <a:effectRef idx="0">
-            <a:schemeClr val="accent1"/>
-          </a:effectRef>
-          <a:fontRef idx="minor">
-            <a:schemeClr val="lt1"/>
-          </a:fontRef>
-        </p:style>
-        <p:txBody>
-          <a:bodyPr rtlCol="0" anchor="ctr"/>
-          <a:lstStyle/>
-          <a:p>
-            <a:pPr algn="ctr"/>
-            <a:endParaRPr lang="en-US"/>
           </a:p>
         </p:txBody>
       </p:sp>
@@ -6185,7 +6223,7 @@
         </p:nvSpPr>
         <p:spPr>
           <a:xfrm>
-            <a:off x="13199742" y="12872549"/>
+            <a:off x="13097484" y="14082570"/>
             <a:ext cx="3194607" cy="923586"/>
           </a:xfrm>
           <a:prstGeom prst="rect">
@@ -6235,6 +6273,11 @@
           <a:solidFill>
             <a:schemeClr val="tx1"/>
           </a:solidFill>
+          <a:ln>
+            <a:solidFill>
+              <a:schemeClr val="tx1"/>
+            </a:solidFill>
+          </a:ln>
         </p:spPr>
         <p:style>
           <a:lnRef idx="2">
@@ -6275,7 +6318,156 @@
         </p:nvSpPr>
         <p:spPr>
           <a:xfrm>
-            <a:off x="10203728" y="9410683"/>
+            <a:off x="10203728" y="9359883"/>
+            <a:ext cx="4083535" cy="507960"/>
+          </a:xfrm>
+          <a:prstGeom prst="rect">
+            <a:avLst/>
+          </a:prstGeom>
+          <a:noFill/>
+          <a:ln w="28575">
+            <a:solidFill>
+              <a:schemeClr val="accent1"/>
+            </a:solidFill>
+          </a:ln>
+        </p:spPr>
+        <p:txBody>
+          <a:bodyPr wrap="square" rtlCol="0">
+            <a:spAutoFit/>
+          </a:bodyPr>
+          <a:lstStyle/>
+          <a:p>
+            <a:pPr algn="ctr"/>
+            <a:r>
+              <a:rPr lang="en-US" dirty="0"/>
+              <a:t>Manual curation of inserts</a:t>
+            </a:r>
+          </a:p>
+        </p:txBody>
+      </p:sp>
+      <p:sp>
+        <p:nvSpPr>
+          <p:cNvPr id="20" name="Down Arrow 19">
+            <a:extLst>
+              <a:ext uri="{FF2B5EF4-FFF2-40B4-BE49-F238E27FC236}">
+                <a16:creationId xmlns:a16="http://schemas.microsoft.com/office/drawing/2014/main" id="{927B8E96-45F1-2C4B-938E-63F4A027EAEF}"/>
+              </a:ext>
+            </a:extLst>
+          </p:cNvPr>
+          <p:cNvSpPr/>
+          <p:nvPr/>
+        </p:nvSpPr>
+        <p:spPr>
+          <a:xfrm>
+            <a:off x="14507172" y="13288679"/>
+            <a:ext cx="369250" cy="736930"/>
+          </a:xfrm>
+          <a:prstGeom prst="downArrow">
+            <a:avLst/>
+          </a:prstGeom>
+          <a:solidFill>
+            <a:schemeClr val="tx1"/>
+          </a:solidFill>
+          <a:ln>
+            <a:solidFill>
+              <a:schemeClr val="tx1"/>
+            </a:solidFill>
+          </a:ln>
+        </p:spPr>
+        <p:style>
+          <a:lnRef idx="2">
+            <a:schemeClr val="accent1">
+              <a:shade val="50000"/>
+            </a:schemeClr>
+          </a:lnRef>
+          <a:fillRef idx="1">
+            <a:schemeClr val="accent1"/>
+          </a:fillRef>
+          <a:effectRef idx="0">
+            <a:schemeClr val="accent1"/>
+          </a:effectRef>
+          <a:fontRef idx="minor">
+            <a:schemeClr val="lt1"/>
+          </a:fontRef>
+        </p:style>
+        <p:txBody>
+          <a:bodyPr rtlCol="0" anchor="ctr"/>
+          <a:lstStyle/>
+          <a:p>
+            <a:pPr algn="ctr"/>
+            <a:endParaRPr lang="en-US"/>
+          </a:p>
+        </p:txBody>
+      </p:sp>
+      <p:sp>
+        <p:nvSpPr>
+          <p:cNvPr id="35" name="Down Arrow 34">
+            <a:extLst>
+              <a:ext uri="{FF2B5EF4-FFF2-40B4-BE49-F238E27FC236}">
+                <a16:creationId xmlns:a16="http://schemas.microsoft.com/office/drawing/2014/main" id="{B623D049-8A91-1E40-9173-EF6BB96C7A72}"/>
+              </a:ext>
+            </a:extLst>
+          </p:cNvPr>
+          <p:cNvSpPr/>
+          <p:nvPr/>
+        </p:nvSpPr>
+        <p:spPr>
+          <a:xfrm>
+            <a:off x="14507172" y="11918307"/>
+            <a:ext cx="369250" cy="736930"/>
+          </a:xfrm>
+          <a:prstGeom prst="downArrow">
+            <a:avLst/>
+          </a:prstGeom>
+          <a:solidFill>
+            <a:schemeClr val="tx1"/>
+          </a:solidFill>
+          <a:ln>
+            <a:solidFill>
+              <a:schemeClr val="tx1"/>
+            </a:solidFill>
+          </a:ln>
+        </p:spPr>
+        <p:style>
+          <a:lnRef idx="2">
+            <a:schemeClr val="accent1">
+              <a:shade val="50000"/>
+            </a:schemeClr>
+          </a:lnRef>
+          <a:fillRef idx="1">
+            <a:schemeClr val="accent1"/>
+          </a:fillRef>
+          <a:effectRef idx="0">
+            <a:schemeClr val="accent1"/>
+          </a:effectRef>
+          <a:fontRef idx="minor">
+            <a:schemeClr val="lt1"/>
+          </a:fontRef>
+        </p:style>
+        <p:txBody>
+          <a:bodyPr rtlCol="0" anchor="ctr"/>
+          <a:lstStyle/>
+          <a:p>
+            <a:pPr algn="ctr"/>
+            <a:endParaRPr lang="en-US"/>
+          </a:p>
+        </p:txBody>
+      </p:sp>
+      <p:sp>
+        <p:nvSpPr>
+          <p:cNvPr id="40" name="TextBox 39">
+            <a:extLst>
+              <a:ext uri="{FF2B5EF4-FFF2-40B4-BE49-F238E27FC236}">
+                <a16:creationId xmlns:a16="http://schemas.microsoft.com/office/drawing/2014/main" id="{580DA297-A3BD-E247-9616-9DBE76D67D75}"/>
+              </a:ext>
+            </a:extLst>
+          </p:cNvPr>
+          <p:cNvSpPr txBox="1"/>
+          <p:nvPr/>
+        </p:nvSpPr>
+        <p:spPr>
+          <a:xfrm>
+            <a:off x="12599229" y="12723758"/>
             <a:ext cx="4083535" cy="507960"/>
           </a:xfrm>
           <a:prstGeom prst="rect">

--- a/HGT_filtering-pipeline.pptx
+++ b/HGT_filtering-pipeline.pptx
@@ -244,7 +244,7 @@
           <a:p>
             <a:fld id="{9386A93F-6D44-2341-95C7-2E010A24378A}" type="datetimeFigureOut">
               <a:rPr lang="en-US" smtClean="0"/>
-              <a:t>10/19/25</a:t>
+              <a:t>10/20/25</a:t>
             </a:fld>
             <a:endParaRPr lang="en-US"/>
           </a:p>
@@ -414,7 +414,7 @@
           <a:p>
             <a:fld id="{9386A93F-6D44-2341-95C7-2E010A24378A}" type="datetimeFigureOut">
               <a:rPr lang="en-US" smtClean="0"/>
-              <a:t>10/19/25</a:t>
+              <a:t>10/20/25</a:t>
             </a:fld>
             <a:endParaRPr lang="en-US"/>
           </a:p>
@@ -594,7 +594,7 @@
           <a:p>
             <a:fld id="{9386A93F-6D44-2341-95C7-2E010A24378A}" type="datetimeFigureOut">
               <a:rPr lang="en-US" smtClean="0"/>
-              <a:t>10/19/25</a:t>
+              <a:t>10/20/25</a:t>
             </a:fld>
             <a:endParaRPr lang="en-US"/>
           </a:p>
@@ -764,7 +764,7 @@
           <a:p>
             <a:fld id="{9386A93F-6D44-2341-95C7-2E010A24378A}" type="datetimeFigureOut">
               <a:rPr lang="en-US" smtClean="0"/>
-              <a:t>10/19/25</a:t>
+              <a:t>10/20/25</a:t>
             </a:fld>
             <a:endParaRPr lang="en-US"/>
           </a:p>
@@ -1010,7 +1010,7 @@
           <a:p>
             <a:fld id="{9386A93F-6D44-2341-95C7-2E010A24378A}" type="datetimeFigureOut">
               <a:rPr lang="en-US" smtClean="0"/>
-              <a:t>10/19/25</a:t>
+              <a:t>10/20/25</a:t>
             </a:fld>
             <a:endParaRPr lang="en-US"/>
           </a:p>
@@ -1242,7 +1242,7 @@
           <a:p>
             <a:fld id="{9386A93F-6D44-2341-95C7-2E010A24378A}" type="datetimeFigureOut">
               <a:rPr lang="en-US" smtClean="0"/>
-              <a:t>10/19/25</a:t>
+              <a:t>10/20/25</a:t>
             </a:fld>
             <a:endParaRPr lang="en-US"/>
           </a:p>
@@ -1609,7 +1609,7 @@
           <a:p>
             <a:fld id="{9386A93F-6D44-2341-95C7-2E010A24378A}" type="datetimeFigureOut">
               <a:rPr lang="en-US" smtClean="0"/>
-              <a:t>10/19/25</a:t>
+              <a:t>10/20/25</a:t>
             </a:fld>
             <a:endParaRPr lang="en-US"/>
           </a:p>
@@ -1727,7 +1727,7 @@
           <a:p>
             <a:fld id="{9386A93F-6D44-2341-95C7-2E010A24378A}" type="datetimeFigureOut">
               <a:rPr lang="en-US" smtClean="0"/>
-              <a:t>10/19/25</a:t>
+              <a:t>10/20/25</a:t>
             </a:fld>
             <a:endParaRPr lang="en-US"/>
           </a:p>
@@ -1822,7 +1822,7 @@
           <a:p>
             <a:fld id="{9386A93F-6D44-2341-95C7-2E010A24378A}" type="datetimeFigureOut">
               <a:rPr lang="en-US" smtClean="0"/>
-              <a:t>10/19/25</a:t>
+              <a:t>10/20/25</a:t>
             </a:fld>
             <a:endParaRPr lang="en-US"/>
           </a:p>
@@ -2099,7 +2099,7 @@
           <a:p>
             <a:fld id="{9386A93F-6D44-2341-95C7-2E010A24378A}" type="datetimeFigureOut">
               <a:rPr lang="en-US" smtClean="0"/>
-              <a:t>10/19/25</a:t>
+              <a:t>10/20/25</a:t>
             </a:fld>
             <a:endParaRPr lang="en-US"/>
           </a:p>
@@ -2356,7 +2356,7 @@
           <a:p>
             <a:fld id="{9386A93F-6D44-2341-95C7-2E010A24378A}" type="datetimeFigureOut">
               <a:rPr lang="en-US" smtClean="0"/>
-              <a:t>10/19/25</a:t>
+              <a:t>10/20/25</a:t>
             </a:fld>
             <a:endParaRPr lang="en-US"/>
           </a:p>
@@ -2569,7 +2569,7 @@
           <a:p>
             <a:fld id="{9386A93F-6D44-2341-95C7-2E010A24378A}" type="datetimeFigureOut">
               <a:rPr lang="en-US" smtClean="0"/>
-              <a:t>10/19/25</a:t>
+              <a:t>10/20/25</a:t>
             </a:fld>
             <a:endParaRPr lang="en-US"/>
           </a:p>
@@ -6223,7 +6223,7 @@
         </p:nvSpPr>
         <p:spPr>
           <a:xfrm>
-            <a:off x="13097484" y="14082570"/>
+            <a:off x="13097484" y="12744429"/>
             <a:ext cx="3194607" cy="923586"/>
           </a:xfrm>
           <a:prstGeom prst="rect">
@@ -6359,7 +6359,7 @@
         </p:nvSpPr>
         <p:spPr>
           <a:xfrm>
-            <a:off x="14507172" y="13288679"/>
+            <a:off x="14507172" y="13734731"/>
             <a:ext cx="369250" cy="736930"/>
           </a:xfrm>
           <a:prstGeom prst="downArrow">
@@ -6467,7 +6467,7 @@
         </p:nvSpPr>
         <p:spPr>
           <a:xfrm>
-            <a:off x="12599229" y="12723758"/>
+            <a:off x="12666135" y="14552561"/>
             <a:ext cx="4083535" cy="507960"/>
           </a:xfrm>
           <a:prstGeom prst="rect">
